--- a/sample-files/sample.pptx
+++ b/sample-files/sample.pptx
@@ -1,19 +1,19 @@
 
 <file path=ppt/presentation.xml><?xml version="1.0" encoding="utf-8"?>
-<p:presentation xmlns:a="http://schemas.openxmlformats.org/drawingml/2006/main" xmlns:r="http://schemas.openxmlformats.org/officeDocument/2006/relationships" xmlns:p="http://schemas.openxmlformats.org/presentationml/2006/main" xmlns:m="http://schemas.openxmlformats.org/officeDocument/2006/math" xmlns:a14="http://schemas.microsoft.com/office/drawing/2010/main">
+<p:presentation xmlns:a="http://schemas.openxmlformats.org/drawingml/2006/main" xmlns:r="http://schemas.openxmlformats.org/officeDocument/2006/relationships" xmlns:p="http://schemas.openxmlformats.org/presentationml/2006/main" xmlns:m="http://schemas.openxmlformats.org/officeDocument/2006/math" xmlns:w="http://schemas.openxmlformats.org/wordprocessingml/2006/main">
   <p:sldMasterIdLst>
-    <p:sldMasterId id="2147483648" r:id="rId5"/>
+    <p:sldMasterId id="2147483648" r:id="rId1"/>
   </p:sldMasterIdLst>
   <p:notesMasterIdLst>
-    <p:notesMasterId r:id="rId7"/>
+    <p:notesMasterId r:id="rId5"/>
   </p:notesMasterIdLst>
   <p:sldIdLst>
-    <p:sldId id="256" r:id="rId8"/>
+    <p:sldId id="256" r:id="rId4"/>
   </p:sldIdLst>
   <p:sldSz cx="24384000" cy="13716000"/>
   <p:notesSz cx="6858000" cy="9144000"/>
   <p:defaultTextStyle>
-    <a:defPPr marL="0" marR="0" indent="0" algn="l" defTabSz="914400" rtl="0" fontAlgn="auto" latinLnBrk="1" hangingPunct="0">
+    <a:defPPr marL="0" marR="0" indent="0" algn="l" defTabSz="914400" rtl="0">
       <a:lnSpc>
         <a:spcPct val="100000"/>
       </a:lnSpc>
@@ -27,19 +27,16 @@
       <a:buSzTx/>
       <a:buFontTx/>
       <a:buNone/>
-      <a:tabLst/>
-      <a:defRPr b="0" baseline="0" cap="none" i="0" spc="0" strike="noStrike" sz="1800" u="none" kumimoji="0" normalizeH="0">
+      <a:defRPr sz="1800" b="0" i="0" u="none" strike="noStrike" cap="none" spc="0">
         <a:ln>
           <a:noFill/>
         </a:ln>
         <a:solidFill>
           <a:srgbClr val="000000"/>
         </a:solidFill>
-        <a:effectLst/>
-        <a:uFillTx/>
       </a:defRPr>
     </a:defPPr>
-    <a:lvl1pPr marL="0" marR="0" indent="0" algn="l" defTabSz="825500" rtl="0" fontAlgn="auto" latinLnBrk="0" hangingPunct="0">
+    <a:lvl1pPr marL="0" marR="0" indent="0" algn="l" defTabSz="825500" rtl="0">
       <a:lnSpc>
         <a:spcPct val="100000"/>
       </a:lnSpc>
@@ -53,23 +50,19 @@
       <a:buSzTx/>
       <a:buFontTx/>
       <a:buNone/>
-      <a:tabLst/>
-      <a:defRPr b="0" baseline="0" cap="none" i="0" spc="0" strike="noStrike" sz="4800" u="none" kumimoji="0" normalizeH="0">
+      <a:defRPr sz="4800" b="0" i="0" u="none" strike="noStrike" cap="none" spc="0">
         <a:ln>
           <a:noFill/>
         </a:ln>
         <a:solidFill>
           <a:srgbClr val="FFFFFF"/>
         </a:solidFill>
-        <a:effectLst/>
-        <a:uFillTx/>
         <a:latin typeface="Helvetica Neue"/>
         <a:ea typeface="Helvetica Neue"/>
         <a:cs typeface="Helvetica Neue"/>
-        <a:sym typeface="Helvetica Neue"/>
       </a:defRPr>
     </a:lvl1pPr>
-    <a:lvl2pPr marL="0" marR="0" indent="0" algn="l" defTabSz="825500" rtl="0" fontAlgn="auto" latinLnBrk="0" hangingPunct="0">
+    <a:lvl2pPr marL="0" marR="0" indent="0" algn="l" defTabSz="825500" rtl="0">
       <a:lnSpc>
         <a:spcPct val="100000"/>
       </a:lnSpc>
@@ -83,23 +76,19 @@
       <a:buSzTx/>
       <a:buFontTx/>
       <a:buNone/>
-      <a:tabLst/>
-      <a:defRPr b="0" baseline="0" cap="none" i="0" spc="0" strike="noStrike" sz="4800" u="none" kumimoji="0" normalizeH="0">
+      <a:defRPr sz="4800" b="0" i="0" u="none" strike="noStrike" cap="none" spc="0">
         <a:ln>
           <a:noFill/>
         </a:ln>
         <a:solidFill>
           <a:srgbClr val="FFFFFF"/>
         </a:solidFill>
-        <a:effectLst/>
-        <a:uFillTx/>
         <a:latin typeface="Helvetica Neue"/>
         <a:ea typeface="Helvetica Neue"/>
         <a:cs typeface="Helvetica Neue"/>
-        <a:sym typeface="Helvetica Neue"/>
       </a:defRPr>
     </a:lvl2pPr>
-    <a:lvl3pPr marL="0" marR="0" indent="0" algn="l" defTabSz="825500" rtl="0" fontAlgn="auto" latinLnBrk="0" hangingPunct="0">
+    <a:lvl3pPr marL="0" marR="0" indent="0" algn="l" defTabSz="825500" rtl="0">
       <a:lnSpc>
         <a:spcPct val="100000"/>
       </a:lnSpc>
@@ -113,23 +102,19 @@
       <a:buSzTx/>
       <a:buFontTx/>
       <a:buNone/>
-      <a:tabLst/>
-      <a:defRPr b="0" baseline="0" cap="none" i="0" spc="0" strike="noStrike" sz="4800" u="none" kumimoji="0" normalizeH="0">
+      <a:defRPr sz="4800" b="0" i="0" u="none" strike="noStrike" cap="none" spc="0">
         <a:ln>
           <a:noFill/>
         </a:ln>
         <a:solidFill>
           <a:srgbClr val="FFFFFF"/>
         </a:solidFill>
-        <a:effectLst/>
-        <a:uFillTx/>
         <a:latin typeface="Helvetica Neue"/>
         <a:ea typeface="Helvetica Neue"/>
         <a:cs typeface="Helvetica Neue"/>
-        <a:sym typeface="Helvetica Neue"/>
       </a:defRPr>
     </a:lvl3pPr>
-    <a:lvl4pPr marL="0" marR="0" indent="0" algn="l" defTabSz="825500" rtl="0" fontAlgn="auto" latinLnBrk="0" hangingPunct="0">
+    <a:lvl4pPr marL="0" marR="0" indent="0" algn="l" defTabSz="825500" rtl="0">
       <a:lnSpc>
         <a:spcPct val="100000"/>
       </a:lnSpc>
@@ -143,23 +128,19 @@
       <a:buSzTx/>
       <a:buFontTx/>
       <a:buNone/>
-      <a:tabLst/>
-      <a:defRPr b="0" baseline="0" cap="none" i="0" spc="0" strike="noStrike" sz="4800" u="none" kumimoji="0" normalizeH="0">
+      <a:defRPr sz="4800" b="0" i="0" u="none" strike="noStrike" cap="none" spc="0">
         <a:ln>
           <a:noFill/>
         </a:ln>
         <a:solidFill>
           <a:srgbClr val="FFFFFF"/>
         </a:solidFill>
-        <a:effectLst/>
-        <a:uFillTx/>
         <a:latin typeface="Helvetica Neue"/>
         <a:ea typeface="Helvetica Neue"/>
         <a:cs typeface="Helvetica Neue"/>
-        <a:sym typeface="Helvetica Neue"/>
       </a:defRPr>
     </a:lvl4pPr>
-    <a:lvl5pPr marL="0" marR="0" indent="0" algn="l" defTabSz="825500" rtl="0" fontAlgn="auto" latinLnBrk="0" hangingPunct="0">
+    <a:lvl5pPr marL="0" marR="0" indent="0" algn="l" defTabSz="825500" rtl="0">
       <a:lnSpc>
         <a:spcPct val="100000"/>
       </a:lnSpc>
@@ -173,23 +154,19 @@
       <a:buSzTx/>
       <a:buFontTx/>
       <a:buNone/>
-      <a:tabLst/>
-      <a:defRPr b="0" baseline="0" cap="none" i="0" spc="0" strike="noStrike" sz="4800" u="none" kumimoji="0" normalizeH="0">
+      <a:defRPr sz="4800" b="0" i="0" u="none" strike="noStrike" cap="none" spc="0">
         <a:ln>
           <a:noFill/>
         </a:ln>
         <a:solidFill>
           <a:srgbClr val="FFFFFF"/>
         </a:solidFill>
-        <a:effectLst/>
-        <a:uFillTx/>
         <a:latin typeface="Helvetica Neue"/>
         <a:ea typeface="Helvetica Neue"/>
         <a:cs typeface="Helvetica Neue"/>
-        <a:sym typeface="Helvetica Neue"/>
       </a:defRPr>
     </a:lvl5pPr>
-    <a:lvl6pPr marL="0" marR="0" indent="0" algn="l" defTabSz="825500" rtl="0" fontAlgn="auto" latinLnBrk="0" hangingPunct="0">
+    <a:lvl6pPr marL="0" marR="0" indent="0" algn="l" defTabSz="825500" rtl="0">
       <a:lnSpc>
         <a:spcPct val="100000"/>
       </a:lnSpc>
@@ -203,23 +180,19 @@
       <a:buSzTx/>
       <a:buFontTx/>
       <a:buNone/>
-      <a:tabLst/>
-      <a:defRPr b="0" baseline="0" cap="none" i="0" spc="0" strike="noStrike" sz="4800" u="none" kumimoji="0" normalizeH="0">
+      <a:defRPr sz="4800" b="0" i="0" u="none" strike="noStrike" cap="none" spc="0">
         <a:ln>
           <a:noFill/>
         </a:ln>
         <a:solidFill>
           <a:srgbClr val="FFFFFF"/>
         </a:solidFill>
-        <a:effectLst/>
-        <a:uFillTx/>
         <a:latin typeface="Helvetica Neue"/>
         <a:ea typeface="Helvetica Neue"/>
         <a:cs typeface="Helvetica Neue"/>
-        <a:sym typeface="Helvetica Neue"/>
       </a:defRPr>
     </a:lvl6pPr>
-    <a:lvl7pPr marL="0" marR="0" indent="0" algn="l" defTabSz="825500" rtl="0" fontAlgn="auto" latinLnBrk="0" hangingPunct="0">
+    <a:lvl7pPr marL="0" marR="0" indent="0" algn="l" defTabSz="825500" rtl="0">
       <a:lnSpc>
         <a:spcPct val="100000"/>
       </a:lnSpc>
@@ -233,23 +206,19 @@
       <a:buSzTx/>
       <a:buFontTx/>
       <a:buNone/>
-      <a:tabLst/>
-      <a:defRPr b="0" baseline="0" cap="none" i="0" spc="0" strike="noStrike" sz="4800" u="none" kumimoji="0" normalizeH="0">
+      <a:defRPr sz="4800" b="0" i="0" u="none" strike="noStrike" cap="none" spc="0">
         <a:ln>
           <a:noFill/>
         </a:ln>
         <a:solidFill>
           <a:srgbClr val="FFFFFF"/>
         </a:solidFill>
-        <a:effectLst/>
-        <a:uFillTx/>
         <a:latin typeface="Helvetica Neue"/>
         <a:ea typeface="Helvetica Neue"/>
         <a:cs typeface="Helvetica Neue"/>
-        <a:sym typeface="Helvetica Neue"/>
       </a:defRPr>
     </a:lvl7pPr>
-    <a:lvl8pPr marL="0" marR="0" indent="0" algn="l" defTabSz="825500" rtl="0" fontAlgn="auto" latinLnBrk="0" hangingPunct="0">
+    <a:lvl8pPr marL="0" marR="0" indent="0" algn="l" defTabSz="825500" rtl="0">
       <a:lnSpc>
         <a:spcPct val="100000"/>
       </a:lnSpc>
@@ -263,23 +232,19 @@
       <a:buSzTx/>
       <a:buFontTx/>
       <a:buNone/>
-      <a:tabLst/>
-      <a:defRPr b="0" baseline="0" cap="none" i="0" spc="0" strike="noStrike" sz="4800" u="none" kumimoji="0" normalizeH="0">
+      <a:defRPr sz="4800" b="0" i="0" u="none" strike="noStrike" cap="none" spc="0">
         <a:ln>
           <a:noFill/>
         </a:ln>
         <a:solidFill>
           <a:srgbClr val="FFFFFF"/>
         </a:solidFill>
-        <a:effectLst/>
-        <a:uFillTx/>
         <a:latin typeface="Helvetica Neue"/>
         <a:ea typeface="Helvetica Neue"/>
         <a:cs typeface="Helvetica Neue"/>
-        <a:sym typeface="Helvetica Neue"/>
       </a:defRPr>
     </a:lvl8pPr>
-    <a:lvl9pPr marL="0" marR="0" indent="0" algn="l" defTabSz="825500" rtl="0" fontAlgn="auto" latinLnBrk="0" hangingPunct="0">
+    <a:lvl9pPr marL="0" marR="0" indent="0" algn="l" defTabSz="825500" rtl="0">
       <a:lnSpc>
         <a:spcPct val="100000"/>
       </a:lnSpc>
@@ -293,40 +258,32 @@
       <a:buSzTx/>
       <a:buFontTx/>
       <a:buNone/>
-      <a:tabLst/>
-      <a:defRPr b="0" baseline="0" cap="none" i="0" spc="0" strike="noStrike" sz="4800" u="none" kumimoji="0" normalizeH="0">
+      <a:defRPr sz="4800" b="0" i="0" u="none" strike="noStrike" cap="none" spc="0">
         <a:ln>
           <a:noFill/>
         </a:ln>
         <a:solidFill>
           <a:srgbClr val="FFFFFF"/>
         </a:solidFill>
-        <a:effectLst/>
-        <a:uFillTx/>
         <a:latin typeface="Helvetica Neue"/>
         <a:ea typeface="Helvetica Neue"/>
         <a:cs typeface="Helvetica Neue"/>
-        <a:sym typeface="Helvetica Neue"/>
       </a:defRPr>
     </a:lvl9pPr>
   </p:defaultTextStyle>
 </p:presentation>
 </file>
 
-<file path=ppt/commentAuthors.xml><?xml version="1.0" encoding="utf-8"?>
-<p:cmAuthorLst xmlns:a="http://schemas.openxmlformats.org/drawingml/2006/main" xmlns:r="http://schemas.openxmlformats.org/officeDocument/2006/relationships" xmlns:p="http://schemas.openxmlformats.org/presentationml/2006/main" xmlns:m="http://schemas.openxmlformats.org/officeDocument/2006/math" xmlns:a14="http://schemas.microsoft.com/office/drawing/2010/main"/>
-</file>
-
 <file path=ppt/notesMasters/notesMaster1.xml><?xml version="1.0" encoding="utf-8"?>
-<p:notesMaster xmlns:a="http://schemas.openxmlformats.org/drawingml/2006/main" xmlns:r="http://schemas.openxmlformats.org/officeDocument/2006/relationships" xmlns:p="http://schemas.openxmlformats.org/presentationml/2006/main" xmlns:m="http://schemas.openxmlformats.org/officeDocument/2006/math" xmlns:a14="http://schemas.microsoft.com/office/drawing/2010/main">
-  <p:cSld>
+<p:notesMaster xmlns:a="http://schemas.openxmlformats.org/drawingml/2006/main" xmlns:r="http://schemas.openxmlformats.org/officeDocument/2006/relationships" xmlns:p="http://schemas.openxmlformats.org/presentationml/2006/main">
+  <p:cSld name="">
     <p:spTree>
       <p:nvGrpSpPr>
         <p:cNvPr id="1" name=""/>
         <p:cNvGrpSpPr/>
         <p:nvPr/>
       </p:nvGrpSpPr>
-      <p:grpSpPr>
+      <p:grpSpPr bwMode="auto">
         <a:xfrm>
           <a:off x="0" y="0"/>
           <a:ext cx="0" cy="0"/>
@@ -336,13 +293,13 @@
       </p:grpSpPr>
       <p:sp>
         <p:nvSpPr>
-          <p:cNvPr id="134" name="Shape 134"/>
+          <p:cNvPr id="620583952" name="Shape 134"/>
           <p:cNvSpPr/>
           <p:nvPr>
             <p:ph type="sldImg"/>
           </p:nvPr>
         </p:nvSpPr>
-        <p:spPr>
+        <p:spPr bwMode="auto">
           <a:xfrm>
             <a:off x="1143000" y="685800"/>
             <a:ext cx="4572000" cy="3429000"/>
@@ -355,19 +312,22 @@
           <a:bodyPr/>
           <a:lstStyle/>
           <a:p>
-            <a:pPr/>
-          </a:p>
-        </p:txBody>
-      </p:sp>
-      <p:sp>
-        <p:nvSpPr>
-          <p:cNvPr id="135" name="Shape 135"/>
+            <a:pPr>
+              <a:defRPr/>
+            </a:pPr>
+            <a:endParaRPr/>
+          </a:p>
+        </p:txBody>
+      </p:sp>
+      <p:sp>
+        <p:nvSpPr>
+          <p:cNvPr id="490607779" name="Shape 135"/>
           <p:cNvSpPr/>
           <p:nvPr>
             <p:ph type="body" sz="quarter" idx="1"/>
           </p:nvPr>
         </p:nvSpPr>
-        <p:spPr>
+        <p:spPr bwMode="auto">
           <a:xfrm>
             <a:off x="914400" y="4343400"/>
             <a:ext cx="5029200" cy="4114800"/>
@@ -380,7 +340,10 @@
           <a:bodyPr/>
           <a:lstStyle/>
           <a:p>
-            <a:pPr/>
+            <a:pPr>
+              <a:defRPr/>
+            </a:pPr>
+            <a:endParaRPr/>
           </a:p>
         </p:txBody>
       </p:sp>
@@ -388,7 +351,7 @@
   </p:cSld>
   <p:clrMap bg1="lt1" tx1="dk1" bg2="lt2" tx2="dk2" accent1="accent1" accent2="accent2" accent3="accent3" accent4="accent4" accent5="accent5" accent6="accent6" hlink="hlink" folHlink="folHlink"/>
   <p:notesStyle>
-    <a:lvl1pPr defTabSz="457200" latinLnBrk="0">
+    <a:lvl1pPr defTabSz="457200">
       <a:lnSpc>
         <a:spcPct val="117999"/>
       </a:lnSpc>
@@ -396,10 +359,9 @@
         <a:latin typeface="Helvetica Neue"/>
         <a:ea typeface="Helvetica Neue"/>
         <a:cs typeface="Helvetica Neue"/>
-        <a:sym typeface="Helvetica Neue"/>
       </a:defRPr>
     </a:lvl1pPr>
-    <a:lvl2pPr indent="228600" defTabSz="457200" latinLnBrk="0">
+    <a:lvl2pPr indent="228600" defTabSz="457200">
       <a:lnSpc>
         <a:spcPct val="117999"/>
       </a:lnSpc>
@@ -407,10 +369,9 @@
         <a:latin typeface="Helvetica Neue"/>
         <a:ea typeface="Helvetica Neue"/>
         <a:cs typeface="Helvetica Neue"/>
-        <a:sym typeface="Helvetica Neue"/>
       </a:defRPr>
     </a:lvl2pPr>
-    <a:lvl3pPr indent="457200" defTabSz="457200" latinLnBrk="0">
+    <a:lvl3pPr indent="457200" defTabSz="457200">
       <a:lnSpc>
         <a:spcPct val="117999"/>
       </a:lnSpc>
@@ -418,10 +379,9 @@
         <a:latin typeface="Helvetica Neue"/>
         <a:ea typeface="Helvetica Neue"/>
         <a:cs typeface="Helvetica Neue"/>
-        <a:sym typeface="Helvetica Neue"/>
       </a:defRPr>
     </a:lvl3pPr>
-    <a:lvl4pPr indent="685800" defTabSz="457200" latinLnBrk="0">
+    <a:lvl4pPr indent="685800" defTabSz="457200">
       <a:lnSpc>
         <a:spcPct val="117999"/>
       </a:lnSpc>
@@ -429,10 +389,9 @@
         <a:latin typeface="Helvetica Neue"/>
         <a:ea typeface="Helvetica Neue"/>
         <a:cs typeface="Helvetica Neue"/>
-        <a:sym typeface="Helvetica Neue"/>
       </a:defRPr>
     </a:lvl4pPr>
-    <a:lvl5pPr indent="914400" defTabSz="457200" latinLnBrk="0">
+    <a:lvl5pPr indent="914400" defTabSz="457200">
       <a:lnSpc>
         <a:spcPct val="117999"/>
       </a:lnSpc>
@@ -440,10 +399,9 @@
         <a:latin typeface="Helvetica Neue"/>
         <a:ea typeface="Helvetica Neue"/>
         <a:cs typeface="Helvetica Neue"/>
-        <a:sym typeface="Helvetica Neue"/>
       </a:defRPr>
     </a:lvl5pPr>
-    <a:lvl6pPr indent="1143000" defTabSz="457200" latinLnBrk="0">
+    <a:lvl6pPr indent="1143000" defTabSz="457200">
       <a:lnSpc>
         <a:spcPct val="117999"/>
       </a:lnSpc>
@@ -451,10 +409,9 @@
         <a:latin typeface="Helvetica Neue"/>
         <a:ea typeface="Helvetica Neue"/>
         <a:cs typeface="Helvetica Neue"/>
-        <a:sym typeface="Helvetica Neue"/>
       </a:defRPr>
     </a:lvl6pPr>
-    <a:lvl7pPr indent="1371600" defTabSz="457200" latinLnBrk="0">
+    <a:lvl7pPr indent="1371600" defTabSz="457200">
       <a:lnSpc>
         <a:spcPct val="117999"/>
       </a:lnSpc>
@@ -462,10 +419,9 @@
         <a:latin typeface="Helvetica Neue"/>
         <a:ea typeface="Helvetica Neue"/>
         <a:cs typeface="Helvetica Neue"/>
-        <a:sym typeface="Helvetica Neue"/>
       </a:defRPr>
     </a:lvl7pPr>
-    <a:lvl8pPr indent="1600200" defTabSz="457200" latinLnBrk="0">
+    <a:lvl8pPr indent="1600200" defTabSz="457200">
       <a:lnSpc>
         <a:spcPct val="117999"/>
       </a:lnSpc>
@@ -473,10 +429,9 @@
         <a:latin typeface="Helvetica Neue"/>
         <a:ea typeface="Helvetica Neue"/>
         <a:cs typeface="Helvetica Neue"/>
-        <a:sym typeface="Helvetica Neue"/>
       </a:defRPr>
     </a:lvl8pPr>
-    <a:lvl9pPr indent="1828800" defTabSz="457200" latinLnBrk="0">
+    <a:lvl9pPr indent="1828800" defTabSz="457200">
       <a:lnSpc>
         <a:spcPct val="117999"/>
       </a:lnSpc>
@@ -484,15 +439,99 @@
         <a:latin typeface="Helvetica Neue"/>
         <a:ea typeface="Helvetica Neue"/>
         <a:cs typeface="Helvetica Neue"/>
-        <a:sym typeface="Helvetica Neue"/>
       </a:defRPr>
     </a:lvl9pPr>
   </p:notesStyle>
 </p:notesMaster>
 </file>
 
+<file path=ppt/notesSlides/notesSlide1.xml><?xml version="1.0" encoding="utf-8"?>
+<p:notes xmlns:a="http://schemas.openxmlformats.org/drawingml/2006/main" xmlns:r="http://schemas.openxmlformats.org/officeDocument/2006/relationships" xmlns:p="http://schemas.openxmlformats.org/presentationml/2006/main" xmlns:m="http://schemas.openxmlformats.org/officeDocument/2006/math" xmlns:w="http://schemas.openxmlformats.org/wordprocessingml/2006/main">
+  <p:cSld name="">
+    <p:spTree>
+      <p:nvGrpSpPr>
+        <p:cNvPr id="1" name=""/>
+        <p:cNvGrpSpPr/>
+        <p:nvPr/>
+      </p:nvGrpSpPr>
+      <p:grpSpPr bwMode="auto">
+        <a:xfrm>
+          <a:off x="0" y="0"/>
+          <a:ext cx="0" cy="0"/>
+          <a:chOff x="0" y="0"/>
+          <a:chExt cx="0" cy="0"/>
+        </a:xfrm>
+      </p:grpSpPr>
+      <p:sp>
+        <p:nvSpPr>
+          <p:cNvPr id="2" name="Slide Image Placeholder 1"/>
+          <p:cNvSpPr>
+            <a:spLocks noChangeAspect="1" noGrp="1" noRot="1"/>
+          </p:cNvSpPr>
+          <p:nvPr>
+            <p:ph type="sldImg"/>
+          </p:nvPr>
+        </p:nvSpPr>
+        <p:spPr bwMode="auto"/>
+      </p:sp>
+      <p:sp>
+        <p:nvSpPr>
+          <p:cNvPr id="3" name="Notes Placeholder 2"/>
+          <p:cNvSpPr>
+            <a:spLocks noGrp="1"/>
+          </p:cNvSpPr>
+          <p:nvPr>
+            <p:ph type="body" idx="1"/>
+          </p:nvPr>
+        </p:nvSpPr>
+        <p:spPr bwMode="auto"/>
+        <p:txBody>
+          <a:bodyPr/>
+          <a:lstStyle/>
+          <a:p>
+            <a:pPr>
+              <a:defRPr/>
+            </a:pPr>
+            <a:endParaRPr/>
+          </a:p>
+        </p:txBody>
+      </p:sp>
+      <p:sp>
+        <p:nvSpPr>
+          <p:cNvPr id="4" name="Slide Number Placeholder 3"/>
+          <p:cNvSpPr>
+            <a:spLocks noGrp="1"/>
+          </p:cNvSpPr>
+          <p:nvPr>
+            <p:ph type="sldNum" sz="quarter" idx="10"/>
+          </p:nvPr>
+        </p:nvSpPr>
+        <p:spPr bwMode="auto"/>
+        <p:txBody>
+          <a:bodyPr/>
+          <a:lstStyle/>
+          <a:p>
+            <a:pPr>
+              <a:defRPr/>
+            </a:pPr>
+            <a:fld id="{B383CDFF-62B7-7AFF-2603-C45ADF15DD1C}" type="slidenum">
+              <a:rPr/>
+              <a:t/>
+            </a:fld>
+            <a:endParaRPr/>
+          </a:p>
+        </p:txBody>
+      </p:sp>
+    </p:spTree>
+  </p:cSld>
+  <p:clrMapOvr>
+    <a:masterClrMapping/>
+  </p:clrMapOvr>
+</p:notes>
+</file>
+
 <file path=ppt/slideLayouts/slideLayout1.xml><?xml version="1.0" encoding="utf-8"?>
-<p:sldLayout xmlns:a="http://schemas.openxmlformats.org/drawingml/2006/main" xmlns:r="http://schemas.openxmlformats.org/officeDocument/2006/relationships" xmlns:p="http://schemas.openxmlformats.org/presentationml/2006/main" xmlns:m="http://schemas.openxmlformats.org/officeDocument/2006/math" xmlns:a14="http://schemas.microsoft.com/office/drawing/2010/main" type="title" showMasterSp="1" showMasterPhAnim="1">
+<p:sldLayout xmlns:a="http://schemas.openxmlformats.org/drawingml/2006/main" xmlns:r="http://schemas.openxmlformats.org/officeDocument/2006/relationships" xmlns:p="http://schemas.openxmlformats.org/presentationml/2006/main" xmlns:m="http://schemas.openxmlformats.org/officeDocument/2006/math" xmlns:w="http://schemas.openxmlformats.org/wordprocessingml/2006/main" matchingName="" preserve="0" showMasterPhAnim="1" showMasterSp="1" type="title" userDrawn="1">
   <p:cSld name="Title">
     <p:spTree>
       <p:nvGrpSpPr>
@@ -500,7 +539,7 @@
         <p:cNvGrpSpPr/>
         <p:nvPr/>
       </p:nvGrpSpPr>
-      <p:grpSpPr>
+      <p:grpSpPr bwMode="auto">
         <a:xfrm>
           <a:off x="0" y="0"/>
           <a:ext cx="0" cy="0"/>
@@ -510,13 +549,13 @@
       </p:grpSpPr>
       <p:sp>
         <p:nvSpPr>
-          <p:cNvPr id="11" name="Title Text"/>
+          <p:cNvPr id="958986120" name="Title Text"/>
           <p:cNvSpPr txBox="1"/>
           <p:nvPr>
             <p:ph type="title"/>
           </p:nvPr>
         </p:nvSpPr>
-        <p:spPr>
+        <p:spPr bwMode="auto">
           <a:xfrm>
             <a:off x="1778000" y="2298700"/>
             <a:ext cx="20828000" cy="4648200"/>
@@ -529,22 +568,26 @@
           <a:bodyPr anchor="b"/>
           <a:lstStyle/>
           <a:p>
-            <a:pPr/>
-            <a:r>
+            <a:pPr>
+              <a:defRPr/>
+            </a:pPr>
+            <a:r>
+              <a:rPr/>
               <a:t>Title Text</a:t>
             </a:r>
-          </a:p>
-        </p:txBody>
-      </p:sp>
-      <p:sp>
-        <p:nvSpPr>
-          <p:cNvPr id="12" name="Body Level One…"/>
+            <a:endParaRPr/>
+          </a:p>
+        </p:txBody>
+      </p:sp>
+      <p:sp>
+        <p:nvSpPr>
+          <p:cNvPr id="1718990709" name="Body Level One…"/>
           <p:cNvSpPr txBox="1"/>
           <p:nvPr>
             <p:ph type="body" sz="quarter" idx="1"/>
           </p:nvPr>
         </p:nvSpPr>
-        <p:spPr>
+        <p:spPr bwMode="auto">
           <a:xfrm>
             <a:off x="1778000" y="7073900"/>
             <a:ext cx="20828000" cy="1587500"/>
@@ -608,46 +651,66 @@
             </a:lvl5pPr>
           </a:lstStyle>
           <a:p>
-            <a:pPr/>
-            <a:r>
+            <a:pPr>
+              <a:defRPr/>
+            </a:pPr>
+            <a:r>
+              <a:rPr/>
               <a:t>Body Level One</a:t>
             </a:r>
-          </a:p>
-          <a:p>
-            <a:pPr lvl="1"/>
-            <a:r>
+            <a:endParaRPr/>
+          </a:p>
+          <a:p>
+            <a:pPr lvl="1">
+              <a:defRPr/>
+            </a:pPr>
+            <a:r>
+              <a:rPr/>
               <a:t>Body Level Two</a:t>
             </a:r>
-          </a:p>
-          <a:p>
-            <a:pPr lvl="2"/>
-            <a:r>
+            <a:endParaRPr/>
+          </a:p>
+          <a:p>
+            <a:pPr lvl="2">
+              <a:defRPr/>
+            </a:pPr>
+            <a:r>
+              <a:rPr/>
               <a:t>Body Level Three</a:t>
             </a:r>
-          </a:p>
-          <a:p>
-            <a:pPr lvl="3"/>
-            <a:r>
+            <a:endParaRPr/>
+          </a:p>
+          <a:p>
+            <a:pPr lvl="3">
+              <a:defRPr/>
+            </a:pPr>
+            <a:r>
+              <a:rPr/>
               <a:t>Body Level Four</a:t>
             </a:r>
-          </a:p>
-          <a:p>
-            <a:pPr lvl="4"/>
-            <a:r>
+            <a:endParaRPr/>
+          </a:p>
+          <a:p>
+            <a:pPr lvl="4">
+              <a:defRPr/>
+            </a:pPr>
+            <a:r>
+              <a:rPr/>
               <a:t>Body Level Five</a:t>
             </a:r>
-          </a:p>
-        </p:txBody>
-      </p:sp>
-      <p:sp>
-        <p:nvSpPr>
-          <p:cNvPr id="13" name="Slide Number"/>
+            <a:endParaRPr/>
+          </a:p>
+        </p:txBody>
+      </p:sp>
+      <p:sp>
+        <p:nvSpPr>
+          <p:cNvPr id="1814026573" name="Slide Number"/>
           <p:cNvSpPr txBox="1"/>
           <p:nvPr>
             <p:ph type="sldNum" sz="quarter" idx="2"/>
           </p:nvPr>
         </p:nvSpPr>
-        <p:spPr>
+        <p:spPr bwMode="auto">
           <a:prstGeom prst="rect">
             <a:avLst/>
           </a:prstGeom>
@@ -656,8 +719,14 @@
           <a:bodyPr/>
           <a:lstStyle/>
           <a:p>
-            <a:pPr/>
-            <a:fld id="{86CB4B4D-7CA3-9044-876B-883B54F8677D}" type="slidenum"/>
+            <a:pPr>
+              <a:defRPr/>
+            </a:pPr>
+            <a:fld id="{86CB4B4D-7CA3-9044-876B-883B54F8677D}" type="slidenum">
+              <a:rPr/>
+              <a:t/>
+            </a:fld>
+            <a:endParaRPr/>
           </a:p>
         </p:txBody>
       </p:sp>
@@ -666,12 +735,11 @@
   <p:clrMapOvr>
     <a:masterClrMapping/>
   </p:clrMapOvr>
-  <p:transition xmlns:p14="http://schemas.microsoft.com/office/powerpoint/2010/main" spd="med" advClick="1"/>
 </p:sldLayout>
 </file>
 
 <file path=ppt/slideLayouts/slideLayout10.xml><?xml version="1.0" encoding="utf-8"?>
-<p:sldLayout xmlns:a="http://schemas.openxmlformats.org/drawingml/2006/main" xmlns:r="http://schemas.openxmlformats.org/officeDocument/2006/relationships" xmlns:p="http://schemas.openxmlformats.org/presentationml/2006/main" xmlns:m="http://schemas.openxmlformats.org/officeDocument/2006/math" xmlns:a14="http://schemas.microsoft.com/office/drawing/2010/main" type="tx" showMasterSp="1" showMasterPhAnim="1">
+<p:sldLayout xmlns:a="http://schemas.openxmlformats.org/drawingml/2006/main" xmlns:r="http://schemas.openxmlformats.org/officeDocument/2006/relationships" xmlns:p="http://schemas.openxmlformats.org/presentationml/2006/main" xmlns:m="http://schemas.openxmlformats.org/officeDocument/2006/math" xmlns:w="http://schemas.openxmlformats.org/wordprocessingml/2006/main" matchingName="" preserve="0" showMasterPhAnim="1" showMasterSp="1" type="tx" userDrawn="1">
   <p:cSld name="Bullets">
     <p:spTree>
       <p:nvGrpSpPr>
@@ -679,7 +747,7 @@
         <p:cNvGrpSpPr/>
         <p:nvPr/>
       </p:nvGrpSpPr>
-      <p:grpSpPr>
+      <p:grpSpPr bwMode="auto">
         <a:xfrm>
           <a:off x="0" y="0"/>
           <a:ext cx="0" cy="0"/>
@@ -689,13 +757,13 @@
       </p:grpSpPr>
       <p:sp>
         <p:nvSpPr>
-          <p:cNvPr id="93" name="Body Level One…"/>
+          <p:cNvPr id="215716306" name="Body Level One…"/>
           <p:cNvSpPr txBox="1"/>
           <p:nvPr>
             <p:ph type="body" idx="1"/>
           </p:nvPr>
         </p:nvSpPr>
-        <p:spPr>
+        <p:spPr bwMode="auto">
           <a:xfrm>
             <a:off x="1689100" y="1778000"/>
             <a:ext cx="21005800" cy="10160000"/>
@@ -729,46 +797,66 @@
             </a:lvl5pPr>
           </a:lstStyle>
           <a:p>
-            <a:pPr/>
-            <a:r>
+            <a:pPr>
+              <a:defRPr/>
+            </a:pPr>
+            <a:r>
+              <a:rPr/>
               <a:t>Body Level One</a:t>
             </a:r>
-          </a:p>
-          <a:p>
-            <a:pPr lvl="1"/>
-            <a:r>
+            <a:endParaRPr/>
+          </a:p>
+          <a:p>
+            <a:pPr lvl="1">
+              <a:defRPr/>
+            </a:pPr>
+            <a:r>
+              <a:rPr/>
               <a:t>Body Level Two</a:t>
             </a:r>
-          </a:p>
-          <a:p>
-            <a:pPr lvl="2"/>
-            <a:r>
+            <a:endParaRPr/>
+          </a:p>
+          <a:p>
+            <a:pPr lvl="2">
+              <a:defRPr/>
+            </a:pPr>
+            <a:r>
+              <a:rPr/>
               <a:t>Body Level Three</a:t>
             </a:r>
-          </a:p>
-          <a:p>
-            <a:pPr lvl="3"/>
-            <a:r>
+            <a:endParaRPr/>
+          </a:p>
+          <a:p>
+            <a:pPr lvl="3">
+              <a:defRPr/>
+            </a:pPr>
+            <a:r>
+              <a:rPr/>
               <a:t>Body Level Four</a:t>
             </a:r>
-          </a:p>
-          <a:p>
-            <a:pPr lvl="4"/>
-            <a:r>
+            <a:endParaRPr/>
+          </a:p>
+          <a:p>
+            <a:pPr lvl="4">
+              <a:defRPr/>
+            </a:pPr>
+            <a:r>
+              <a:rPr/>
               <a:t>Body Level Five</a:t>
             </a:r>
-          </a:p>
-        </p:txBody>
-      </p:sp>
-      <p:sp>
-        <p:nvSpPr>
-          <p:cNvPr id="94" name="Slide Number"/>
+            <a:endParaRPr/>
+          </a:p>
+        </p:txBody>
+      </p:sp>
+      <p:sp>
+        <p:nvSpPr>
+          <p:cNvPr id="211545165" name="Slide Number"/>
           <p:cNvSpPr txBox="1"/>
           <p:nvPr>
             <p:ph type="sldNum" sz="quarter" idx="2"/>
           </p:nvPr>
         </p:nvSpPr>
-        <p:spPr>
+        <p:spPr bwMode="auto">
           <a:prstGeom prst="rect">
             <a:avLst/>
           </a:prstGeom>
@@ -777,8 +865,14 @@
           <a:bodyPr/>
           <a:lstStyle/>
           <a:p>
-            <a:pPr/>
-            <a:fld id="{86CB4B4D-7CA3-9044-876B-883B54F8677D}" type="slidenum"/>
+            <a:pPr>
+              <a:defRPr/>
+            </a:pPr>
+            <a:fld id="{86CB4B4D-7CA3-9044-876B-883B54F8677D}" type="slidenum">
+              <a:rPr/>
+              <a:t/>
+            </a:fld>
+            <a:endParaRPr/>
           </a:p>
         </p:txBody>
       </p:sp>
@@ -787,12 +881,11 @@
   <p:clrMapOvr>
     <a:masterClrMapping/>
   </p:clrMapOvr>
-  <p:transition xmlns:p14="http://schemas.microsoft.com/office/powerpoint/2010/main" spd="med" advClick="1"/>
 </p:sldLayout>
 </file>
 
 <file path=ppt/slideLayouts/slideLayout11.xml><?xml version="1.0" encoding="utf-8"?>
-<p:sldLayout xmlns:a="http://schemas.openxmlformats.org/drawingml/2006/main" xmlns:r="http://schemas.openxmlformats.org/officeDocument/2006/relationships" xmlns:p="http://schemas.openxmlformats.org/presentationml/2006/main" xmlns:m="http://schemas.openxmlformats.org/officeDocument/2006/math" xmlns:a14="http://schemas.microsoft.com/office/drawing/2010/main" type="tx" showMasterSp="1" showMasterPhAnim="1">
+<p:sldLayout xmlns:a="http://schemas.openxmlformats.org/drawingml/2006/main" xmlns:r="http://schemas.openxmlformats.org/officeDocument/2006/relationships" xmlns:p="http://schemas.openxmlformats.org/presentationml/2006/main" xmlns:m="http://schemas.openxmlformats.org/officeDocument/2006/math" xmlns:w="http://schemas.openxmlformats.org/wordprocessingml/2006/main" matchingName="" preserve="0" showMasterPhAnim="1" showMasterSp="1" type="tx" userDrawn="1">
   <p:cSld name="Photo - 3 Up">
     <p:spTree>
       <p:nvGrpSpPr>
@@ -800,7 +893,7 @@
         <p:cNvGrpSpPr/>
         <p:nvPr/>
       </p:nvGrpSpPr>
-      <p:grpSpPr>
+      <p:grpSpPr bwMode="auto">
         <a:xfrm>
           <a:off x="0" y="0"/>
           <a:ext cx="0" cy="0"/>
@@ -810,13 +903,13 @@
       </p:grpSpPr>
       <p:sp>
         <p:nvSpPr>
-          <p:cNvPr id="101" name="Close-up of an orange flower surrounded by large tropical leaves"/>
+          <p:cNvPr id="1469861949" name="Close-up of an orange flower surrounded by large tropical leaves"/>
           <p:cNvSpPr/>
           <p:nvPr>
             <p:ph type="pic" sz="quarter" idx="21"/>
           </p:nvPr>
         </p:nvSpPr>
-        <p:spPr>
+        <p:spPr bwMode="auto">
           <a:xfrm>
             <a:off x="15292127" y="6870700"/>
             <a:ext cx="8341246" cy="5549900"/>
@@ -831,19 +924,22 @@
           </a:bodyPr>
           <a:lstStyle/>
           <a:p>
-            <a:pPr/>
-          </a:p>
-        </p:txBody>
-      </p:sp>
-      <p:sp>
-        <p:nvSpPr>
-          <p:cNvPr id="102" name="Close-up of a red-eyed tree frog perched on a leaf"/>
+            <a:pPr>
+              <a:defRPr/>
+            </a:pPr>
+            <a:endParaRPr/>
+          </a:p>
+        </p:txBody>
+      </p:sp>
+      <p:sp>
+        <p:nvSpPr>
+          <p:cNvPr id="1640187885" name="Close-up of a red-eyed tree frog perched on a leaf"/>
           <p:cNvSpPr/>
           <p:nvPr>
             <p:ph type="pic" sz="quarter" idx="22"/>
           </p:nvPr>
         </p:nvSpPr>
-        <p:spPr>
+        <p:spPr bwMode="auto">
           <a:xfrm>
             <a:off x="14859000" y="952500"/>
             <a:ext cx="8324850" cy="5549900"/>
@@ -858,19 +954,22 @@
           </a:bodyPr>
           <a:lstStyle/>
           <a:p>
-            <a:pPr/>
-          </a:p>
-        </p:txBody>
-      </p:sp>
-      <p:sp>
-        <p:nvSpPr>
-          <p:cNvPr id="103" name="River flowing through a tropical forest"/>
+            <a:pPr>
+              <a:defRPr/>
+            </a:pPr>
+            <a:endParaRPr/>
+          </a:p>
+        </p:txBody>
+      </p:sp>
+      <p:sp>
+        <p:nvSpPr>
+          <p:cNvPr id="951690275" name="River flowing through a tropical forest"/>
           <p:cNvSpPr/>
           <p:nvPr>
             <p:ph type="pic" idx="23"/>
           </p:nvPr>
         </p:nvSpPr>
-        <p:spPr>
+        <p:spPr bwMode="auto">
           <a:xfrm>
             <a:off x="651237" y="952500"/>
             <a:ext cx="15283726" cy="11468100"/>
@@ -885,19 +984,22 @@
           </a:bodyPr>
           <a:lstStyle/>
           <a:p>
-            <a:pPr/>
-          </a:p>
-        </p:txBody>
-      </p:sp>
-      <p:sp>
-        <p:nvSpPr>
-          <p:cNvPr id="104" name="Slide Number"/>
+            <a:pPr>
+              <a:defRPr/>
+            </a:pPr>
+            <a:endParaRPr/>
+          </a:p>
+        </p:txBody>
+      </p:sp>
+      <p:sp>
+        <p:nvSpPr>
+          <p:cNvPr id="1112717383" name="Slide Number"/>
           <p:cNvSpPr txBox="1"/>
           <p:nvPr>
             <p:ph type="sldNum" sz="quarter" idx="2"/>
           </p:nvPr>
         </p:nvSpPr>
-        <p:spPr>
+        <p:spPr bwMode="auto">
           <a:prstGeom prst="rect">
             <a:avLst/>
           </a:prstGeom>
@@ -906,8 +1008,14 @@
           <a:bodyPr/>
           <a:lstStyle/>
           <a:p>
-            <a:pPr/>
-            <a:fld id="{86CB4B4D-7CA3-9044-876B-883B54F8677D}" type="slidenum"/>
+            <a:pPr>
+              <a:defRPr/>
+            </a:pPr>
+            <a:fld id="{86CB4B4D-7CA3-9044-876B-883B54F8677D}" type="slidenum">
+              <a:rPr/>
+              <a:t/>
+            </a:fld>
+            <a:endParaRPr/>
           </a:p>
         </p:txBody>
       </p:sp>
@@ -916,12 +1024,11 @@
   <p:clrMapOvr>
     <a:masterClrMapping/>
   </p:clrMapOvr>
-  <p:transition xmlns:p14="http://schemas.microsoft.com/office/powerpoint/2010/main" spd="med" advClick="1"/>
 </p:sldLayout>
 </file>
 
 <file path=ppt/slideLayouts/slideLayout12.xml><?xml version="1.0" encoding="utf-8"?>
-<p:sldLayout xmlns:a="http://schemas.openxmlformats.org/drawingml/2006/main" xmlns:r="http://schemas.openxmlformats.org/officeDocument/2006/relationships" xmlns:p="http://schemas.openxmlformats.org/presentationml/2006/main" xmlns:m="http://schemas.openxmlformats.org/officeDocument/2006/math" xmlns:a14="http://schemas.microsoft.com/office/drawing/2010/main" type="tx" showMasterSp="1" showMasterPhAnim="1">
+<p:sldLayout xmlns:a="http://schemas.openxmlformats.org/drawingml/2006/main" xmlns:r="http://schemas.openxmlformats.org/officeDocument/2006/relationships" xmlns:p="http://schemas.openxmlformats.org/presentationml/2006/main" xmlns:m="http://schemas.openxmlformats.org/officeDocument/2006/math" xmlns:w="http://schemas.openxmlformats.org/wordprocessingml/2006/main" matchingName="" preserve="0" showMasterPhAnim="1" showMasterSp="1" type="tx" userDrawn="1">
   <p:cSld name="Quote">
     <p:spTree>
       <p:nvGrpSpPr>
@@ -929,7 +1036,7 @@
         <p:cNvGrpSpPr/>
         <p:nvPr/>
       </p:nvGrpSpPr>
-      <p:grpSpPr>
+      <p:grpSpPr bwMode="auto">
         <a:xfrm>
           <a:off x="0" y="0"/>
           <a:ext cx="0" cy="0"/>
@@ -939,13 +1046,13 @@
       </p:grpSpPr>
       <p:sp>
         <p:nvSpPr>
-          <p:cNvPr id="111" name="–Johnny Appleseed"/>
+          <p:cNvPr id="313718528" name="–Johnny Appleseed"/>
           <p:cNvSpPr txBox="1"/>
           <p:nvPr>
             <p:ph type="body" sz="quarter" idx="21"/>
           </p:nvPr>
         </p:nvSpPr>
-        <p:spPr>
+        <p:spPr bwMode="auto">
           <a:xfrm>
             <a:off x="2387600" y="8953500"/>
             <a:ext cx="19621500" cy="585521"/>
@@ -967,26 +1074,30 @@
               <a:buSzTx/>
               <a:buFontTx/>
               <a:buNone/>
-              <a:defRPr i="1" sz="3200"/>
+              <a:defRPr sz="3200" i="1"/>
             </a:lvl1pPr>
           </a:lstStyle>
           <a:p>
-            <a:pPr/>
-            <a:r>
+            <a:pPr>
+              <a:defRPr/>
+            </a:pPr>
+            <a:r>
+              <a:rPr/>
               <a:t>–Johnny Appleseed</a:t>
             </a:r>
-          </a:p>
-        </p:txBody>
-      </p:sp>
-      <p:sp>
-        <p:nvSpPr>
-          <p:cNvPr id="112" name="“Type a quote here.”"/>
+            <a:endParaRPr/>
+          </a:p>
+        </p:txBody>
+      </p:sp>
+      <p:sp>
+        <p:nvSpPr>
+          <p:cNvPr id="218511664" name="“Type a quote here.”"/>
           <p:cNvSpPr txBox="1"/>
           <p:nvPr>
             <p:ph type="body" sz="quarter" idx="22"/>
           </p:nvPr>
         </p:nvSpPr>
-        <p:spPr>
+        <p:spPr bwMode="auto">
           <a:xfrm>
             <a:off x="2387600" y="6076950"/>
             <a:ext cx="19621500" cy="825500"/>
@@ -1012,27 +1123,30 @@
                 <a:latin typeface="+mn-lt"/>
                 <a:ea typeface="+mn-ea"/>
                 <a:cs typeface="+mn-cs"/>
-                <a:sym typeface="Helvetica Neue Medium"/>
               </a:defRPr>
             </a:lvl1pPr>
           </a:lstStyle>
           <a:p>
-            <a:pPr/>
-            <a:r>
+            <a:pPr>
+              <a:defRPr/>
+            </a:pPr>
+            <a:r>
+              <a:rPr/>
               <a:t>“Type a quote here.” </a:t>
             </a:r>
-          </a:p>
-        </p:txBody>
-      </p:sp>
-      <p:sp>
-        <p:nvSpPr>
-          <p:cNvPr id="113" name="Slide Number"/>
+            <a:endParaRPr/>
+          </a:p>
+        </p:txBody>
+      </p:sp>
+      <p:sp>
+        <p:nvSpPr>
+          <p:cNvPr id="1230146830" name="Slide Number"/>
           <p:cNvSpPr txBox="1"/>
           <p:nvPr>
             <p:ph type="sldNum" sz="quarter" idx="2"/>
           </p:nvPr>
         </p:nvSpPr>
-        <p:spPr>
+        <p:spPr bwMode="auto">
           <a:prstGeom prst="rect">
             <a:avLst/>
           </a:prstGeom>
@@ -1041,8 +1155,14 @@
           <a:bodyPr/>
           <a:lstStyle/>
           <a:p>
-            <a:pPr/>
-            <a:fld id="{86CB4B4D-7CA3-9044-876B-883B54F8677D}" type="slidenum"/>
+            <a:pPr>
+              <a:defRPr/>
+            </a:pPr>
+            <a:fld id="{86CB4B4D-7CA3-9044-876B-883B54F8677D}" type="slidenum">
+              <a:rPr/>
+              <a:t/>
+            </a:fld>
+            <a:endParaRPr/>
           </a:p>
         </p:txBody>
       </p:sp>
@@ -1051,12 +1171,11 @@
   <p:clrMapOvr>
     <a:masterClrMapping/>
   </p:clrMapOvr>
-  <p:transition xmlns:p14="http://schemas.microsoft.com/office/powerpoint/2010/main" spd="med" advClick="1"/>
 </p:sldLayout>
 </file>
 
 <file path=ppt/slideLayouts/slideLayout13.xml><?xml version="1.0" encoding="utf-8"?>
-<p:sldLayout xmlns:a="http://schemas.openxmlformats.org/drawingml/2006/main" xmlns:r="http://schemas.openxmlformats.org/officeDocument/2006/relationships" xmlns:p="http://schemas.openxmlformats.org/presentationml/2006/main" xmlns:m="http://schemas.openxmlformats.org/officeDocument/2006/math" xmlns:a14="http://schemas.microsoft.com/office/drawing/2010/main" type="tx" showMasterSp="1" showMasterPhAnim="1">
+<p:sldLayout xmlns:a="http://schemas.openxmlformats.org/drawingml/2006/main" xmlns:r="http://schemas.openxmlformats.org/officeDocument/2006/relationships" xmlns:p="http://schemas.openxmlformats.org/presentationml/2006/main" xmlns:m="http://schemas.openxmlformats.org/officeDocument/2006/math" xmlns:w="http://schemas.openxmlformats.org/wordprocessingml/2006/main" matchingName="" preserve="0" showMasterPhAnim="1" showMasterSp="1" type="tx" userDrawn="1">
   <p:cSld name="Photo">
     <p:spTree>
       <p:nvGrpSpPr>
@@ -1064,7 +1183,7 @@
         <p:cNvGrpSpPr/>
         <p:nvPr/>
       </p:nvGrpSpPr>
-      <p:grpSpPr>
+      <p:grpSpPr bwMode="auto">
         <a:xfrm>
           <a:off x="0" y="0"/>
           <a:ext cx="0" cy="0"/>
@@ -1074,13 +1193,13 @@
       </p:grpSpPr>
       <p:sp>
         <p:nvSpPr>
-          <p:cNvPr id="120" name="river flowing through a tropical forest"/>
+          <p:cNvPr id="1251693123" name="river flowing through a tropical forest"/>
           <p:cNvSpPr/>
           <p:nvPr>
             <p:ph type="pic" idx="21"/>
           </p:nvPr>
         </p:nvSpPr>
-        <p:spPr>
+        <p:spPr bwMode="auto">
           <a:xfrm>
             <a:off x="0" y="-2290234"/>
             <a:ext cx="24384000" cy="18296468"/>
@@ -1095,19 +1214,22 @@
           </a:bodyPr>
           <a:lstStyle/>
           <a:p>
-            <a:pPr/>
-          </a:p>
-        </p:txBody>
-      </p:sp>
-      <p:sp>
-        <p:nvSpPr>
-          <p:cNvPr id="121" name="Slide Number"/>
+            <a:pPr>
+              <a:defRPr/>
+            </a:pPr>
+            <a:endParaRPr/>
+          </a:p>
+        </p:txBody>
+      </p:sp>
+      <p:sp>
+        <p:nvSpPr>
+          <p:cNvPr id="1349654308" name="Slide Number"/>
           <p:cNvSpPr txBox="1"/>
           <p:nvPr>
             <p:ph type="sldNum" sz="quarter" idx="2"/>
           </p:nvPr>
         </p:nvSpPr>
-        <p:spPr>
+        <p:spPr bwMode="auto">
           <a:prstGeom prst="rect">
             <a:avLst/>
           </a:prstGeom>
@@ -1116,8 +1238,14 @@
           <a:bodyPr/>
           <a:lstStyle/>
           <a:p>
-            <a:pPr/>
-            <a:fld id="{86CB4B4D-7CA3-9044-876B-883B54F8677D}" type="slidenum"/>
+            <a:pPr>
+              <a:defRPr/>
+            </a:pPr>
+            <a:fld id="{86CB4B4D-7CA3-9044-876B-883B54F8677D}" type="slidenum">
+              <a:rPr/>
+              <a:t/>
+            </a:fld>
+            <a:endParaRPr/>
           </a:p>
         </p:txBody>
       </p:sp>
@@ -1126,12 +1254,11 @@
   <p:clrMapOvr>
     <a:masterClrMapping/>
   </p:clrMapOvr>
-  <p:transition xmlns:p14="http://schemas.microsoft.com/office/powerpoint/2010/main" spd="med" advClick="1"/>
 </p:sldLayout>
 </file>
 
 <file path=ppt/slideLayouts/slideLayout14.xml><?xml version="1.0" encoding="utf-8"?>
-<p:sldLayout xmlns:a="http://schemas.openxmlformats.org/drawingml/2006/main" xmlns:r="http://schemas.openxmlformats.org/officeDocument/2006/relationships" xmlns:p="http://schemas.openxmlformats.org/presentationml/2006/main" xmlns:m="http://schemas.openxmlformats.org/officeDocument/2006/math" xmlns:a14="http://schemas.microsoft.com/office/drawing/2010/main" type="tx" showMasterSp="1" showMasterPhAnim="1">
+<p:sldLayout xmlns:a="http://schemas.openxmlformats.org/drawingml/2006/main" xmlns:r="http://schemas.openxmlformats.org/officeDocument/2006/relationships" xmlns:p="http://schemas.openxmlformats.org/presentationml/2006/main" xmlns:m="http://schemas.openxmlformats.org/officeDocument/2006/math" xmlns:w="http://schemas.openxmlformats.org/wordprocessingml/2006/main" matchingName="" preserve="0" showMasterPhAnim="1" showMasterSp="1" type="tx" userDrawn="1">
   <p:cSld name="Blank">
     <p:spTree>
       <p:nvGrpSpPr>
@@ -1139,7 +1266,7 @@
         <p:cNvGrpSpPr/>
         <p:nvPr/>
       </p:nvGrpSpPr>
-      <p:grpSpPr>
+      <p:grpSpPr bwMode="auto">
         <a:xfrm>
           <a:off x="0" y="0"/>
           <a:ext cx="0" cy="0"/>
@@ -1149,13 +1276,13 @@
       </p:grpSpPr>
       <p:sp>
         <p:nvSpPr>
-          <p:cNvPr id="128" name="Slide Number"/>
+          <p:cNvPr id="1447115745" name="Slide Number"/>
           <p:cNvSpPr txBox="1"/>
           <p:nvPr>
             <p:ph type="sldNum" sz="quarter" idx="2"/>
           </p:nvPr>
         </p:nvSpPr>
-        <p:spPr>
+        <p:spPr bwMode="auto">
           <a:prstGeom prst="rect">
             <a:avLst/>
           </a:prstGeom>
@@ -1164,8 +1291,14 @@
           <a:bodyPr/>
           <a:lstStyle/>
           <a:p>
-            <a:pPr/>
-            <a:fld id="{86CB4B4D-7CA3-9044-876B-883B54F8677D}" type="slidenum"/>
+            <a:pPr>
+              <a:defRPr/>
+            </a:pPr>
+            <a:fld id="{86CB4B4D-7CA3-9044-876B-883B54F8677D}" type="slidenum">
+              <a:rPr/>
+              <a:t/>
+            </a:fld>
+            <a:endParaRPr/>
           </a:p>
         </p:txBody>
       </p:sp>
@@ -1174,12 +1307,11 @@
   <p:clrMapOvr>
     <a:masterClrMapping/>
   </p:clrMapOvr>
-  <p:transition xmlns:p14="http://schemas.microsoft.com/office/powerpoint/2010/main" spd="med" advClick="1"/>
 </p:sldLayout>
 </file>
 
 <file path=ppt/slideLayouts/slideLayout2.xml><?xml version="1.0" encoding="utf-8"?>
-<p:sldLayout xmlns:a="http://schemas.openxmlformats.org/drawingml/2006/main" xmlns:r="http://schemas.openxmlformats.org/officeDocument/2006/relationships" xmlns:p="http://schemas.openxmlformats.org/presentationml/2006/main" xmlns:m="http://schemas.openxmlformats.org/officeDocument/2006/math" xmlns:a14="http://schemas.microsoft.com/office/drawing/2010/main" type="tx" showMasterSp="1" showMasterPhAnim="1">
+<p:sldLayout xmlns:a="http://schemas.openxmlformats.org/drawingml/2006/main" xmlns:r="http://schemas.openxmlformats.org/officeDocument/2006/relationships" xmlns:p="http://schemas.openxmlformats.org/presentationml/2006/main" xmlns:m="http://schemas.openxmlformats.org/officeDocument/2006/math" xmlns:w="http://schemas.openxmlformats.org/wordprocessingml/2006/main" matchingName="" preserve="0" showMasterPhAnim="1" showMasterSp="1" type="tx" userDrawn="1">
   <p:cSld name="Photo - Horizontal">
     <p:spTree>
       <p:nvGrpSpPr>
@@ -1187,7 +1319,7 @@
         <p:cNvGrpSpPr/>
         <p:nvPr/>
       </p:nvGrpSpPr>
-      <p:grpSpPr>
+      <p:grpSpPr bwMode="auto">
         <a:xfrm>
           <a:off x="0" y="0"/>
           <a:ext cx="0" cy="0"/>
@@ -1197,13 +1329,13 @@
       </p:grpSpPr>
       <p:sp>
         <p:nvSpPr>
-          <p:cNvPr id="20" name="River flowing through a tropical forest"/>
+          <p:cNvPr id="1747468626" name="River flowing through a tropical forest"/>
           <p:cNvSpPr/>
           <p:nvPr>
             <p:ph type="pic" idx="21"/>
           </p:nvPr>
         </p:nvSpPr>
-        <p:spPr>
+        <p:spPr bwMode="auto">
           <a:xfrm>
             <a:off x="3125968" y="-1762099"/>
             <a:ext cx="18135601" cy="13607998"/>
@@ -1218,19 +1350,22 @@
           </a:bodyPr>
           <a:lstStyle/>
           <a:p>
-            <a:pPr/>
-          </a:p>
-        </p:txBody>
-      </p:sp>
-      <p:sp>
-        <p:nvSpPr>
-          <p:cNvPr id="21" name="Title Text"/>
+            <a:pPr>
+              <a:defRPr/>
+            </a:pPr>
+            <a:endParaRPr/>
+          </a:p>
+        </p:txBody>
+      </p:sp>
+      <p:sp>
+        <p:nvSpPr>
+          <p:cNvPr id="821183091" name="Title Text"/>
           <p:cNvSpPr txBox="1"/>
           <p:nvPr>
             <p:ph type="title"/>
           </p:nvPr>
         </p:nvSpPr>
-        <p:spPr>
+        <p:spPr bwMode="auto">
           <a:xfrm>
             <a:off x="635000" y="9512300"/>
             <a:ext cx="23114000" cy="2006600"/>
@@ -1243,22 +1378,26 @@
           <a:bodyPr/>
           <a:lstStyle/>
           <a:p>
-            <a:pPr/>
-            <a:r>
+            <a:pPr>
+              <a:defRPr/>
+            </a:pPr>
+            <a:r>
+              <a:rPr/>
               <a:t>Title Text</a:t>
             </a:r>
-          </a:p>
-        </p:txBody>
-      </p:sp>
-      <p:sp>
-        <p:nvSpPr>
-          <p:cNvPr id="22" name="Body Level One…"/>
+            <a:endParaRPr/>
+          </a:p>
+        </p:txBody>
+      </p:sp>
+      <p:sp>
+        <p:nvSpPr>
+          <p:cNvPr id="508744095" name="Body Level One…"/>
           <p:cNvSpPr txBox="1"/>
           <p:nvPr>
             <p:ph type="body" sz="quarter" idx="1"/>
           </p:nvPr>
         </p:nvSpPr>
-        <p:spPr>
+        <p:spPr bwMode="auto">
           <a:xfrm>
             <a:off x="635000" y="11442700"/>
             <a:ext cx="23114000" cy="1587500"/>
@@ -1322,46 +1461,66 @@
             </a:lvl5pPr>
           </a:lstStyle>
           <a:p>
-            <a:pPr/>
-            <a:r>
+            <a:pPr>
+              <a:defRPr/>
+            </a:pPr>
+            <a:r>
+              <a:rPr/>
               <a:t>Body Level One</a:t>
             </a:r>
-          </a:p>
-          <a:p>
-            <a:pPr lvl="1"/>
-            <a:r>
+            <a:endParaRPr/>
+          </a:p>
+          <a:p>
+            <a:pPr lvl="1">
+              <a:defRPr/>
+            </a:pPr>
+            <a:r>
+              <a:rPr/>
               <a:t>Body Level Two</a:t>
             </a:r>
-          </a:p>
-          <a:p>
-            <a:pPr lvl="2"/>
-            <a:r>
+            <a:endParaRPr/>
+          </a:p>
+          <a:p>
+            <a:pPr lvl="2">
+              <a:defRPr/>
+            </a:pPr>
+            <a:r>
+              <a:rPr/>
               <a:t>Body Level Three</a:t>
             </a:r>
-          </a:p>
-          <a:p>
-            <a:pPr lvl="3"/>
-            <a:r>
+            <a:endParaRPr/>
+          </a:p>
+          <a:p>
+            <a:pPr lvl="3">
+              <a:defRPr/>
+            </a:pPr>
+            <a:r>
+              <a:rPr/>
               <a:t>Body Level Four</a:t>
             </a:r>
-          </a:p>
-          <a:p>
-            <a:pPr lvl="4"/>
-            <a:r>
+            <a:endParaRPr/>
+          </a:p>
+          <a:p>
+            <a:pPr lvl="4">
+              <a:defRPr/>
+            </a:pPr>
+            <a:r>
+              <a:rPr/>
               <a:t>Body Level Five</a:t>
             </a:r>
-          </a:p>
-        </p:txBody>
-      </p:sp>
-      <p:sp>
-        <p:nvSpPr>
-          <p:cNvPr id="23" name="Slide Number"/>
+            <a:endParaRPr/>
+          </a:p>
+        </p:txBody>
+      </p:sp>
+      <p:sp>
+        <p:nvSpPr>
+          <p:cNvPr id="1528677633" name="Slide Number"/>
           <p:cNvSpPr txBox="1"/>
           <p:nvPr>
             <p:ph type="sldNum" sz="quarter" idx="2"/>
           </p:nvPr>
         </p:nvSpPr>
-        <p:spPr>
+        <p:spPr bwMode="auto">
           <a:prstGeom prst="rect">
             <a:avLst/>
           </a:prstGeom>
@@ -1370,8 +1529,14 @@
           <a:bodyPr/>
           <a:lstStyle/>
           <a:p>
-            <a:pPr/>
-            <a:fld id="{86CB4B4D-7CA3-9044-876B-883B54F8677D}" type="slidenum"/>
+            <a:pPr>
+              <a:defRPr/>
+            </a:pPr>
+            <a:fld id="{86CB4B4D-7CA3-9044-876B-883B54F8677D}" type="slidenum">
+              <a:rPr/>
+              <a:t/>
+            </a:fld>
+            <a:endParaRPr/>
           </a:p>
         </p:txBody>
       </p:sp>
@@ -1380,12 +1545,11 @@
   <p:clrMapOvr>
     <a:masterClrMapping/>
   </p:clrMapOvr>
-  <p:transition xmlns:p14="http://schemas.microsoft.com/office/powerpoint/2010/main" spd="med" advClick="1"/>
 </p:sldLayout>
 </file>
 
 <file path=ppt/slideLayouts/slideLayout3.xml><?xml version="1.0" encoding="utf-8"?>
-<p:sldLayout xmlns:a="http://schemas.openxmlformats.org/drawingml/2006/main" xmlns:r="http://schemas.openxmlformats.org/officeDocument/2006/relationships" xmlns:p="http://schemas.openxmlformats.org/presentationml/2006/main" xmlns:m="http://schemas.openxmlformats.org/officeDocument/2006/math" xmlns:a14="http://schemas.microsoft.com/office/drawing/2010/main" type="tx" showMasterSp="1" showMasterPhAnim="1">
+<p:sldLayout xmlns:a="http://schemas.openxmlformats.org/drawingml/2006/main" xmlns:r="http://schemas.openxmlformats.org/officeDocument/2006/relationships" xmlns:p="http://schemas.openxmlformats.org/presentationml/2006/main" xmlns:m="http://schemas.openxmlformats.org/officeDocument/2006/math" xmlns:w="http://schemas.openxmlformats.org/wordprocessingml/2006/main" matchingName="" preserve="0" showMasterPhAnim="1" showMasterSp="1" type="tx" userDrawn="1">
   <p:cSld name="Title - Centre">
     <p:spTree>
       <p:nvGrpSpPr>
@@ -1393,7 +1557,7 @@
         <p:cNvGrpSpPr/>
         <p:nvPr/>
       </p:nvGrpSpPr>
-      <p:grpSpPr>
+      <p:grpSpPr bwMode="auto">
         <a:xfrm>
           <a:off x="0" y="0"/>
           <a:ext cx="0" cy="0"/>
@@ -1403,13 +1567,13 @@
       </p:grpSpPr>
       <p:sp>
         <p:nvSpPr>
-          <p:cNvPr id="30" name="Title Text"/>
+          <p:cNvPr id="1452750617" name="Title Text"/>
           <p:cNvSpPr txBox="1"/>
           <p:nvPr>
             <p:ph type="title"/>
           </p:nvPr>
         </p:nvSpPr>
-        <p:spPr>
+        <p:spPr bwMode="auto">
           <a:xfrm>
             <a:off x="1778000" y="4533900"/>
             <a:ext cx="20828000" cy="4648200"/>
@@ -1422,22 +1586,26 @@
           <a:bodyPr/>
           <a:lstStyle/>
           <a:p>
-            <a:pPr/>
-            <a:r>
+            <a:pPr>
+              <a:defRPr/>
+            </a:pPr>
+            <a:r>
+              <a:rPr/>
               <a:t>Title Text</a:t>
             </a:r>
-          </a:p>
-        </p:txBody>
-      </p:sp>
-      <p:sp>
-        <p:nvSpPr>
-          <p:cNvPr id="31" name="Slide Number"/>
+            <a:endParaRPr/>
+          </a:p>
+        </p:txBody>
+      </p:sp>
+      <p:sp>
+        <p:nvSpPr>
+          <p:cNvPr id="1753058353" name="Slide Number"/>
           <p:cNvSpPr txBox="1"/>
           <p:nvPr>
             <p:ph type="sldNum" sz="quarter" idx="2"/>
           </p:nvPr>
         </p:nvSpPr>
-        <p:spPr>
+        <p:spPr bwMode="auto">
           <a:prstGeom prst="rect">
             <a:avLst/>
           </a:prstGeom>
@@ -1446,8 +1614,14 @@
           <a:bodyPr/>
           <a:lstStyle/>
           <a:p>
-            <a:pPr/>
-            <a:fld id="{86CB4B4D-7CA3-9044-876B-883B54F8677D}" type="slidenum"/>
+            <a:pPr>
+              <a:defRPr/>
+            </a:pPr>
+            <a:fld id="{86CB4B4D-7CA3-9044-876B-883B54F8677D}" type="slidenum">
+              <a:rPr/>
+              <a:t/>
+            </a:fld>
+            <a:endParaRPr/>
           </a:p>
         </p:txBody>
       </p:sp>
@@ -1456,12 +1630,11 @@
   <p:clrMapOvr>
     <a:masterClrMapping/>
   </p:clrMapOvr>
-  <p:transition xmlns:p14="http://schemas.microsoft.com/office/powerpoint/2010/main" spd="med" advClick="1"/>
 </p:sldLayout>
 </file>
 
 <file path=ppt/slideLayouts/slideLayout4.xml><?xml version="1.0" encoding="utf-8"?>
-<p:sldLayout xmlns:a="http://schemas.openxmlformats.org/drawingml/2006/main" xmlns:r="http://schemas.openxmlformats.org/officeDocument/2006/relationships" xmlns:p="http://schemas.openxmlformats.org/presentationml/2006/main" xmlns:m="http://schemas.openxmlformats.org/officeDocument/2006/math" xmlns:a14="http://schemas.microsoft.com/office/drawing/2010/main" type="tx" showMasterSp="1" showMasterPhAnim="1">
+<p:sldLayout xmlns:a="http://schemas.openxmlformats.org/drawingml/2006/main" xmlns:r="http://schemas.openxmlformats.org/officeDocument/2006/relationships" xmlns:p="http://schemas.openxmlformats.org/presentationml/2006/main" xmlns:m="http://schemas.openxmlformats.org/officeDocument/2006/math" xmlns:w="http://schemas.openxmlformats.org/wordprocessingml/2006/main" matchingName="" preserve="0" showMasterPhAnim="1" showMasterSp="1" type="tx" userDrawn="1">
   <p:cSld name="Photo - Vertical">
     <p:spTree>
       <p:nvGrpSpPr>
@@ -1469,7 +1642,7 @@
         <p:cNvGrpSpPr/>
         <p:nvPr/>
       </p:nvGrpSpPr>
-      <p:grpSpPr>
+      <p:grpSpPr bwMode="auto">
         <a:xfrm>
           <a:off x="0" y="0"/>
           <a:ext cx="0" cy="0"/>
@@ -1479,13 +1652,13 @@
       </p:grpSpPr>
       <p:sp>
         <p:nvSpPr>
-          <p:cNvPr id="38" name="Close-up of an orange flower surrounded by large tropical leaves"/>
+          <p:cNvPr id="1415054560" name="Close-up of an orange flower surrounded by large tropical leaves"/>
           <p:cNvSpPr/>
           <p:nvPr>
             <p:ph type="pic" idx="21"/>
           </p:nvPr>
         </p:nvSpPr>
-        <p:spPr>
+        <p:spPr bwMode="auto">
           <a:xfrm>
             <a:off x="5803900" y="952500"/>
             <a:ext cx="17236029" cy="11468100"/>
@@ -1500,19 +1673,22 @@
           </a:bodyPr>
           <a:lstStyle/>
           <a:p>
-            <a:pPr/>
-          </a:p>
-        </p:txBody>
-      </p:sp>
-      <p:sp>
-        <p:nvSpPr>
-          <p:cNvPr id="39" name="Title Text"/>
+            <a:pPr>
+              <a:defRPr/>
+            </a:pPr>
+            <a:endParaRPr/>
+          </a:p>
+        </p:txBody>
+      </p:sp>
+      <p:sp>
+        <p:nvSpPr>
+          <p:cNvPr id="1733009731" name="Title Text"/>
           <p:cNvSpPr txBox="1"/>
           <p:nvPr>
             <p:ph type="title"/>
           </p:nvPr>
         </p:nvSpPr>
-        <p:spPr>
+        <p:spPr bwMode="auto">
           <a:xfrm>
             <a:off x="1651000" y="952500"/>
             <a:ext cx="10223500" cy="5549900"/>
@@ -1529,22 +1705,26 @@
             </a:lvl1pPr>
           </a:lstStyle>
           <a:p>
-            <a:pPr/>
-            <a:r>
+            <a:pPr>
+              <a:defRPr/>
+            </a:pPr>
+            <a:r>
+              <a:rPr/>
               <a:t>Title Text</a:t>
             </a:r>
-          </a:p>
-        </p:txBody>
-      </p:sp>
-      <p:sp>
-        <p:nvSpPr>
-          <p:cNvPr id="40" name="Body Level One…"/>
+            <a:endParaRPr/>
+          </a:p>
+        </p:txBody>
+      </p:sp>
+      <p:sp>
+        <p:nvSpPr>
+          <p:cNvPr id="1386951147" name="Body Level One…"/>
           <p:cNvSpPr txBox="1"/>
           <p:nvPr>
             <p:ph type="body" sz="quarter" idx="1"/>
           </p:nvPr>
         </p:nvSpPr>
-        <p:spPr>
+        <p:spPr bwMode="auto">
           <a:xfrm>
             <a:off x="1651000" y="6527800"/>
             <a:ext cx="10223500" cy="5727700"/>
@@ -1608,46 +1788,66 @@
             </a:lvl5pPr>
           </a:lstStyle>
           <a:p>
-            <a:pPr/>
-            <a:r>
+            <a:pPr>
+              <a:defRPr/>
+            </a:pPr>
+            <a:r>
+              <a:rPr/>
               <a:t>Body Level One</a:t>
             </a:r>
-          </a:p>
-          <a:p>
-            <a:pPr lvl="1"/>
-            <a:r>
+            <a:endParaRPr/>
+          </a:p>
+          <a:p>
+            <a:pPr lvl="1">
+              <a:defRPr/>
+            </a:pPr>
+            <a:r>
+              <a:rPr/>
               <a:t>Body Level Two</a:t>
             </a:r>
-          </a:p>
-          <a:p>
-            <a:pPr lvl="2"/>
-            <a:r>
+            <a:endParaRPr/>
+          </a:p>
+          <a:p>
+            <a:pPr lvl="2">
+              <a:defRPr/>
+            </a:pPr>
+            <a:r>
+              <a:rPr/>
               <a:t>Body Level Three</a:t>
             </a:r>
-          </a:p>
-          <a:p>
-            <a:pPr lvl="3"/>
-            <a:r>
+            <a:endParaRPr/>
+          </a:p>
+          <a:p>
+            <a:pPr lvl="3">
+              <a:defRPr/>
+            </a:pPr>
+            <a:r>
+              <a:rPr/>
               <a:t>Body Level Four</a:t>
             </a:r>
-          </a:p>
-          <a:p>
-            <a:pPr lvl="4"/>
-            <a:r>
+            <a:endParaRPr/>
+          </a:p>
+          <a:p>
+            <a:pPr lvl="4">
+              <a:defRPr/>
+            </a:pPr>
+            <a:r>
+              <a:rPr/>
               <a:t>Body Level Five</a:t>
             </a:r>
-          </a:p>
-        </p:txBody>
-      </p:sp>
-      <p:sp>
-        <p:nvSpPr>
-          <p:cNvPr id="41" name="Slide Number"/>
+            <a:endParaRPr/>
+          </a:p>
+        </p:txBody>
+      </p:sp>
+      <p:sp>
+        <p:nvSpPr>
+          <p:cNvPr id="1415861216" name="Slide Number"/>
           <p:cNvSpPr txBox="1"/>
           <p:nvPr>
             <p:ph type="sldNum" sz="quarter" idx="2"/>
           </p:nvPr>
         </p:nvSpPr>
-        <p:spPr>
+        <p:spPr bwMode="auto">
           <a:prstGeom prst="rect">
             <a:avLst/>
           </a:prstGeom>
@@ -1656,8 +1856,14 @@
           <a:bodyPr/>
           <a:lstStyle/>
           <a:p>
-            <a:pPr/>
-            <a:fld id="{86CB4B4D-7CA3-9044-876B-883B54F8677D}" type="slidenum"/>
+            <a:pPr>
+              <a:defRPr/>
+            </a:pPr>
+            <a:fld id="{86CB4B4D-7CA3-9044-876B-883B54F8677D}" type="slidenum">
+              <a:rPr/>
+              <a:t/>
+            </a:fld>
+            <a:endParaRPr/>
           </a:p>
         </p:txBody>
       </p:sp>
@@ -1666,12 +1872,11 @@
   <p:clrMapOvr>
     <a:masterClrMapping/>
   </p:clrMapOvr>
-  <p:transition xmlns:p14="http://schemas.microsoft.com/office/powerpoint/2010/main" spd="med" advClick="1"/>
 </p:sldLayout>
 </file>
 
 <file path=ppt/slideLayouts/slideLayout5.xml><?xml version="1.0" encoding="utf-8"?>
-<p:sldLayout xmlns:a="http://schemas.openxmlformats.org/drawingml/2006/main" xmlns:r="http://schemas.openxmlformats.org/officeDocument/2006/relationships" xmlns:p="http://schemas.openxmlformats.org/presentationml/2006/main" xmlns:m="http://schemas.openxmlformats.org/officeDocument/2006/math" xmlns:a14="http://schemas.microsoft.com/office/drawing/2010/main" type="tx" showMasterSp="1" showMasterPhAnim="1">
+<p:sldLayout xmlns:a="http://schemas.openxmlformats.org/drawingml/2006/main" xmlns:r="http://schemas.openxmlformats.org/officeDocument/2006/relationships" xmlns:p="http://schemas.openxmlformats.org/presentationml/2006/main" xmlns:m="http://schemas.openxmlformats.org/officeDocument/2006/math" xmlns:w="http://schemas.openxmlformats.org/wordprocessingml/2006/main" matchingName="" preserve="0" showMasterPhAnim="1" showMasterSp="1" type="tx" userDrawn="1">
   <p:cSld name="Title - Top">
     <p:spTree>
       <p:nvGrpSpPr>
@@ -1679,7 +1884,7 @@
         <p:cNvGrpSpPr/>
         <p:nvPr/>
       </p:nvGrpSpPr>
-      <p:grpSpPr>
+      <p:grpSpPr bwMode="auto">
         <a:xfrm>
           <a:off x="0" y="0"/>
           <a:ext cx="0" cy="0"/>
@@ -1689,13 +1894,13 @@
       </p:grpSpPr>
       <p:sp>
         <p:nvSpPr>
-          <p:cNvPr id="48" name="Title Text"/>
+          <p:cNvPr id="923551078" name="Title Text"/>
           <p:cNvSpPr txBox="1"/>
           <p:nvPr>
             <p:ph type="title"/>
           </p:nvPr>
         </p:nvSpPr>
-        <p:spPr>
+        <p:spPr bwMode="auto">
           <a:prstGeom prst="rect">
             <a:avLst/>
           </a:prstGeom>
@@ -1704,22 +1909,26 @@
           <a:bodyPr/>
           <a:lstStyle/>
           <a:p>
-            <a:pPr/>
-            <a:r>
+            <a:pPr>
+              <a:defRPr/>
+            </a:pPr>
+            <a:r>
+              <a:rPr/>
               <a:t>Title Text</a:t>
             </a:r>
-          </a:p>
-        </p:txBody>
-      </p:sp>
-      <p:sp>
-        <p:nvSpPr>
-          <p:cNvPr id="49" name="Slide Number"/>
+            <a:endParaRPr/>
+          </a:p>
+        </p:txBody>
+      </p:sp>
+      <p:sp>
+        <p:nvSpPr>
+          <p:cNvPr id="1816153035" name="Slide Number"/>
           <p:cNvSpPr txBox="1"/>
           <p:nvPr>
             <p:ph type="sldNum" sz="quarter" idx="2"/>
           </p:nvPr>
         </p:nvSpPr>
-        <p:spPr>
+        <p:spPr bwMode="auto">
           <a:prstGeom prst="rect">
             <a:avLst/>
           </a:prstGeom>
@@ -1728,8 +1937,14 @@
           <a:bodyPr/>
           <a:lstStyle/>
           <a:p>
-            <a:pPr/>
-            <a:fld id="{86CB4B4D-7CA3-9044-876B-883B54F8677D}" type="slidenum"/>
+            <a:pPr>
+              <a:defRPr/>
+            </a:pPr>
+            <a:fld id="{86CB4B4D-7CA3-9044-876B-883B54F8677D}" type="slidenum">
+              <a:rPr/>
+              <a:t/>
+            </a:fld>
+            <a:endParaRPr/>
           </a:p>
         </p:txBody>
       </p:sp>
@@ -1738,12 +1953,11 @@
   <p:clrMapOvr>
     <a:masterClrMapping/>
   </p:clrMapOvr>
-  <p:transition xmlns:p14="http://schemas.microsoft.com/office/powerpoint/2010/main" spd="med" advClick="1"/>
 </p:sldLayout>
 </file>
 
 <file path=ppt/slideLayouts/slideLayout6.xml><?xml version="1.0" encoding="utf-8"?>
-<p:sldLayout xmlns:a="http://schemas.openxmlformats.org/drawingml/2006/main" xmlns:r="http://schemas.openxmlformats.org/officeDocument/2006/relationships" xmlns:p="http://schemas.openxmlformats.org/presentationml/2006/main" xmlns:m="http://schemas.openxmlformats.org/officeDocument/2006/math" xmlns:a14="http://schemas.microsoft.com/office/drawing/2010/main" type="tx" showMasterSp="1" showMasterPhAnim="1">
+<p:sldLayout xmlns:a="http://schemas.openxmlformats.org/drawingml/2006/main" xmlns:r="http://schemas.openxmlformats.org/officeDocument/2006/relationships" xmlns:p="http://schemas.openxmlformats.org/presentationml/2006/main" xmlns:m="http://schemas.openxmlformats.org/officeDocument/2006/math" xmlns:w="http://schemas.openxmlformats.org/wordprocessingml/2006/main" matchingName="" preserve="0" showMasterPhAnim="1" showMasterSp="1" type="tx" userDrawn="1">
   <p:cSld name="Title &amp; Bullets">
     <p:spTree>
       <p:nvGrpSpPr>
@@ -1751,7 +1965,7 @@
         <p:cNvGrpSpPr/>
         <p:nvPr/>
       </p:nvGrpSpPr>
-      <p:grpSpPr>
+      <p:grpSpPr bwMode="auto">
         <a:xfrm>
           <a:off x="0" y="0"/>
           <a:ext cx="0" cy="0"/>
@@ -1761,13 +1975,13 @@
       </p:grpSpPr>
       <p:sp>
         <p:nvSpPr>
-          <p:cNvPr id="56" name="Title Text"/>
+          <p:cNvPr id="1648667203" name="Title Text"/>
           <p:cNvSpPr txBox="1"/>
           <p:nvPr>
             <p:ph type="title"/>
           </p:nvPr>
         </p:nvSpPr>
-        <p:spPr>
+        <p:spPr bwMode="auto">
           <a:prstGeom prst="rect">
             <a:avLst/>
           </a:prstGeom>
@@ -1776,22 +1990,26 @@
           <a:bodyPr/>
           <a:lstStyle/>
           <a:p>
-            <a:pPr/>
-            <a:r>
+            <a:pPr>
+              <a:defRPr/>
+            </a:pPr>
+            <a:r>
+              <a:rPr/>
               <a:t>Title Text</a:t>
             </a:r>
-          </a:p>
-        </p:txBody>
-      </p:sp>
-      <p:sp>
-        <p:nvSpPr>
-          <p:cNvPr id="57" name="Body Level One…"/>
+            <a:endParaRPr/>
+          </a:p>
+        </p:txBody>
+      </p:sp>
+      <p:sp>
+        <p:nvSpPr>
+          <p:cNvPr id="1152746493" name="Body Level One…"/>
           <p:cNvSpPr txBox="1"/>
           <p:nvPr>
             <p:ph type="body" idx="1"/>
           </p:nvPr>
         </p:nvSpPr>
-        <p:spPr>
+        <p:spPr bwMode="auto">
           <a:prstGeom prst="rect">
             <a:avLst/>
           </a:prstGeom>
@@ -1821,46 +2039,66 @@
             </a:lvl5pPr>
           </a:lstStyle>
           <a:p>
-            <a:pPr/>
-            <a:r>
+            <a:pPr>
+              <a:defRPr/>
+            </a:pPr>
+            <a:r>
+              <a:rPr/>
               <a:t>Body Level One</a:t>
             </a:r>
-          </a:p>
-          <a:p>
-            <a:pPr lvl="1"/>
-            <a:r>
+            <a:endParaRPr/>
+          </a:p>
+          <a:p>
+            <a:pPr lvl="1">
+              <a:defRPr/>
+            </a:pPr>
+            <a:r>
+              <a:rPr/>
               <a:t>Body Level Two</a:t>
             </a:r>
-          </a:p>
-          <a:p>
-            <a:pPr lvl="2"/>
-            <a:r>
+            <a:endParaRPr/>
+          </a:p>
+          <a:p>
+            <a:pPr lvl="2">
+              <a:defRPr/>
+            </a:pPr>
+            <a:r>
+              <a:rPr/>
               <a:t>Body Level Three</a:t>
             </a:r>
-          </a:p>
-          <a:p>
-            <a:pPr lvl="3"/>
-            <a:r>
+            <a:endParaRPr/>
+          </a:p>
+          <a:p>
+            <a:pPr lvl="3">
+              <a:defRPr/>
+            </a:pPr>
+            <a:r>
+              <a:rPr/>
               <a:t>Body Level Four</a:t>
             </a:r>
-          </a:p>
-          <a:p>
-            <a:pPr lvl="4"/>
-            <a:r>
+            <a:endParaRPr/>
+          </a:p>
+          <a:p>
+            <a:pPr lvl="4">
+              <a:defRPr/>
+            </a:pPr>
+            <a:r>
+              <a:rPr/>
               <a:t>Body Level Five</a:t>
             </a:r>
-          </a:p>
-        </p:txBody>
-      </p:sp>
-      <p:sp>
-        <p:nvSpPr>
-          <p:cNvPr id="58" name="Slide Number"/>
+            <a:endParaRPr/>
+          </a:p>
+        </p:txBody>
+      </p:sp>
+      <p:sp>
+        <p:nvSpPr>
+          <p:cNvPr id="795061034" name="Slide Number"/>
           <p:cNvSpPr txBox="1"/>
           <p:nvPr>
             <p:ph type="sldNum" sz="quarter" idx="2"/>
           </p:nvPr>
         </p:nvSpPr>
-        <p:spPr>
+        <p:spPr bwMode="auto">
           <a:prstGeom prst="rect">
             <a:avLst/>
           </a:prstGeom>
@@ -1869,8 +2107,14 @@
           <a:bodyPr/>
           <a:lstStyle/>
           <a:p>
-            <a:pPr/>
-            <a:fld id="{86CB4B4D-7CA3-9044-876B-883B54F8677D}" type="slidenum"/>
+            <a:pPr>
+              <a:defRPr/>
+            </a:pPr>
+            <a:fld id="{86CB4B4D-7CA3-9044-876B-883B54F8677D}" type="slidenum">
+              <a:rPr/>
+              <a:t/>
+            </a:fld>
+            <a:endParaRPr/>
           </a:p>
         </p:txBody>
       </p:sp>
@@ -1879,12 +2123,11 @@
   <p:clrMapOvr>
     <a:masterClrMapping/>
   </p:clrMapOvr>
-  <p:transition xmlns:p14="http://schemas.microsoft.com/office/powerpoint/2010/main" spd="med" advClick="1"/>
 </p:sldLayout>
 </file>
 
 <file path=ppt/slideLayouts/slideLayout7.xml><?xml version="1.0" encoding="utf-8"?>
-<p:sldLayout xmlns:a="http://schemas.openxmlformats.org/drawingml/2006/main" xmlns:r="http://schemas.openxmlformats.org/officeDocument/2006/relationships" xmlns:p="http://schemas.openxmlformats.org/presentationml/2006/main" xmlns:m="http://schemas.openxmlformats.org/officeDocument/2006/math" xmlns:a14="http://schemas.microsoft.com/office/drawing/2010/main" type="tx" showMasterSp="1" showMasterPhAnim="1">
+<p:sldLayout xmlns:a="http://schemas.openxmlformats.org/drawingml/2006/main" xmlns:r="http://schemas.openxmlformats.org/officeDocument/2006/relationships" xmlns:p="http://schemas.openxmlformats.org/presentationml/2006/main" xmlns:m="http://schemas.openxmlformats.org/officeDocument/2006/math" xmlns:w="http://schemas.openxmlformats.org/wordprocessingml/2006/main" matchingName="" preserve="0" showMasterPhAnim="1" showMasterSp="1" type="tx" userDrawn="1">
   <p:cSld name="Title, Bullets &amp; Photo">
     <p:spTree>
       <p:nvGrpSpPr>
@@ -1892,7 +2135,7 @@
         <p:cNvGrpSpPr/>
         <p:nvPr/>
       </p:nvGrpSpPr>
-      <p:grpSpPr>
+      <p:grpSpPr bwMode="auto">
         <a:xfrm>
           <a:off x="0" y="0"/>
           <a:ext cx="0" cy="0"/>
@@ -1902,13 +2145,13 @@
       </p:grpSpPr>
       <p:sp>
         <p:nvSpPr>
-          <p:cNvPr id="65" name="Close-up of a red-eyed tree frog perched on a leaf"/>
+          <p:cNvPr id="1531402662" name="Close-up of a red-eyed tree frog perched on a leaf"/>
           <p:cNvSpPr/>
           <p:nvPr>
             <p:ph type="pic" sz="half" idx="21"/>
           </p:nvPr>
         </p:nvSpPr>
-        <p:spPr>
+        <p:spPr bwMode="auto">
           <a:xfrm>
             <a:off x="8750300" y="3149600"/>
             <a:ext cx="13944600" cy="9296400"/>
@@ -1923,19 +2166,22 @@
           </a:bodyPr>
           <a:lstStyle/>
           <a:p>
-            <a:pPr/>
-          </a:p>
-        </p:txBody>
-      </p:sp>
-      <p:sp>
-        <p:nvSpPr>
-          <p:cNvPr id="66" name="Title Text"/>
+            <a:pPr>
+              <a:defRPr/>
+            </a:pPr>
+            <a:endParaRPr/>
+          </a:p>
+        </p:txBody>
+      </p:sp>
+      <p:sp>
+        <p:nvSpPr>
+          <p:cNvPr id="91459855" name="Title Text"/>
           <p:cNvSpPr txBox="1"/>
           <p:nvPr>
             <p:ph type="title"/>
           </p:nvPr>
         </p:nvSpPr>
-        <p:spPr>
+        <p:spPr bwMode="auto">
           <a:prstGeom prst="rect">
             <a:avLst/>
           </a:prstGeom>
@@ -1944,22 +2190,26 @@
           <a:bodyPr/>
           <a:lstStyle/>
           <a:p>
-            <a:pPr/>
-            <a:r>
+            <a:pPr>
+              <a:defRPr/>
+            </a:pPr>
+            <a:r>
+              <a:rPr/>
               <a:t>Title Text</a:t>
             </a:r>
-          </a:p>
-        </p:txBody>
-      </p:sp>
-      <p:sp>
-        <p:nvSpPr>
-          <p:cNvPr id="67" name="Body Level One…"/>
+            <a:endParaRPr/>
+          </a:p>
+        </p:txBody>
+      </p:sp>
+      <p:sp>
+        <p:nvSpPr>
+          <p:cNvPr id="1935781153" name="Body Level One…"/>
           <p:cNvSpPr txBox="1"/>
           <p:nvPr>
             <p:ph type="body" sz="half" idx="1"/>
           </p:nvPr>
         </p:nvSpPr>
-        <p:spPr>
+        <p:spPr bwMode="auto">
           <a:xfrm>
             <a:off x="1689100" y="3149600"/>
             <a:ext cx="10223500" cy="9296400"/>
@@ -2013,46 +2263,66 @@
             </a:lvl5pPr>
           </a:lstStyle>
           <a:p>
-            <a:pPr/>
-            <a:r>
+            <a:pPr>
+              <a:defRPr/>
+            </a:pPr>
+            <a:r>
+              <a:rPr/>
               <a:t>Body Level One</a:t>
             </a:r>
-          </a:p>
-          <a:p>
-            <a:pPr lvl="1"/>
-            <a:r>
+            <a:endParaRPr/>
+          </a:p>
+          <a:p>
+            <a:pPr lvl="1">
+              <a:defRPr/>
+            </a:pPr>
+            <a:r>
+              <a:rPr/>
               <a:t>Body Level Two</a:t>
             </a:r>
-          </a:p>
-          <a:p>
-            <a:pPr lvl="2"/>
-            <a:r>
+            <a:endParaRPr/>
+          </a:p>
+          <a:p>
+            <a:pPr lvl="2">
+              <a:defRPr/>
+            </a:pPr>
+            <a:r>
+              <a:rPr/>
               <a:t>Body Level Three</a:t>
             </a:r>
-          </a:p>
-          <a:p>
-            <a:pPr lvl="3"/>
-            <a:r>
+            <a:endParaRPr/>
+          </a:p>
+          <a:p>
+            <a:pPr lvl="3">
+              <a:defRPr/>
+            </a:pPr>
+            <a:r>
+              <a:rPr/>
               <a:t>Body Level Four</a:t>
             </a:r>
-          </a:p>
-          <a:p>
-            <a:pPr lvl="4"/>
-            <a:r>
+            <a:endParaRPr/>
+          </a:p>
+          <a:p>
+            <a:pPr lvl="4">
+              <a:defRPr/>
+            </a:pPr>
+            <a:r>
+              <a:rPr/>
               <a:t>Body Level Five</a:t>
             </a:r>
-          </a:p>
-        </p:txBody>
-      </p:sp>
-      <p:sp>
-        <p:nvSpPr>
-          <p:cNvPr id="68" name="Slide Number"/>
+            <a:endParaRPr/>
+          </a:p>
+        </p:txBody>
+      </p:sp>
+      <p:sp>
+        <p:nvSpPr>
+          <p:cNvPr id="1039098071" name="Slide Number"/>
           <p:cNvSpPr txBox="1"/>
           <p:nvPr>
             <p:ph type="sldNum" sz="quarter" idx="2"/>
           </p:nvPr>
         </p:nvSpPr>
-        <p:spPr>
+        <p:spPr bwMode="auto">
           <a:prstGeom prst="rect">
             <a:avLst/>
           </a:prstGeom>
@@ -2061,8 +2331,14 @@
           <a:bodyPr/>
           <a:lstStyle/>
           <a:p>
-            <a:pPr/>
-            <a:fld id="{86CB4B4D-7CA3-9044-876B-883B54F8677D}" type="slidenum"/>
+            <a:pPr>
+              <a:defRPr/>
+            </a:pPr>
+            <a:fld id="{86CB4B4D-7CA3-9044-876B-883B54F8677D}" type="slidenum">
+              <a:rPr/>
+              <a:t/>
+            </a:fld>
+            <a:endParaRPr/>
           </a:p>
         </p:txBody>
       </p:sp>
@@ -2071,12 +2347,11 @@
   <p:clrMapOvr>
     <a:masterClrMapping/>
   </p:clrMapOvr>
-  <p:transition xmlns:p14="http://schemas.microsoft.com/office/powerpoint/2010/main" spd="med" advClick="1"/>
 </p:sldLayout>
 </file>
 
 <file path=ppt/slideLayouts/slideLayout8.xml><?xml version="1.0" encoding="utf-8"?>
-<p:sldLayout xmlns:a="http://schemas.openxmlformats.org/drawingml/2006/main" xmlns:r="http://schemas.openxmlformats.org/officeDocument/2006/relationships" xmlns:p="http://schemas.openxmlformats.org/presentationml/2006/main" xmlns:m="http://schemas.openxmlformats.org/officeDocument/2006/math" xmlns:a14="http://schemas.microsoft.com/office/drawing/2010/main" type="tx" showMasterSp="1" showMasterPhAnim="1">
+<p:sldLayout xmlns:a="http://schemas.openxmlformats.org/drawingml/2006/main" xmlns:r="http://schemas.openxmlformats.org/officeDocument/2006/relationships" xmlns:p="http://schemas.openxmlformats.org/presentationml/2006/main" xmlns:m="http://schemas.openxmlformats.org/officeDocument/2006/math" xmlns:w="http://schemas.openxmlformats.org/wordprocessingml/2006/main" matchingName="" preserve="0" showMasterPhAnim="1" showMasterSp="1" type="tx" userDrawn="1">
   <p:cSld name="Title, Bullets &amp; Live Video Small">
     <p:spTree>
       <p:nvGrpSpPr>
@@ -2084,7 +2359,7 @@
         <p:cNvGrpSpPr/>
         <p:nvPr/>
       </p:nvGrpSpPr>
-      <p:grpSpPr>
+      <p:grpSpPr bwMode="auto">
         <a:xfrm>
           <a:off x="0" y="0"/>
           <a:ext cx="0" cy="0"/>
@@ -2094,13 +2369,13 @@
       </p:grpSpPr>
       <p:sp>
         <p:nvSpPr>
-          <p:cNvPr id="75" name="Title Text"/>
+          <p:cNvPr id="1109842687" name="Title Text"/>
           <p:cNvSpPr txBox="1"/>
           <p:nvPr>
             <p:ph type="title"/>
           </p:nvPr>
         </p:nvSpPr>
-        <p:spPr>
+        <p:spPr bwMode="auto">
           <a:prstGeom prst="rect">
             <a:avLst/>
           </a:prstGeom>
@@ -2109,22 +2384,26 @@
           <a:bodyPr/>
           <a:lstStyle/>
           <a:p>
-            <a:pPr/>
-            <a:r>
+            <a:pPr>
+              <a:defRPr/>
+            </a:pPr>
+            <a:r>
+              <a:rPr/>
               <a:t>Title Text</a:t>
             </a:r>
-          </a:p>
-        </p:txBody>
-      </p:sp>
-      <p:sp>
-        <p:nvSpPr>
-          <p:cNvPr id="76" name="Body Level One…"/>
+            <a:endParaRPr/>
+          </a:p>
+        </p:txBody>
+      </p:sp>
+      <p:sp>
+        <p:nvSpPr>
+          <p:cNvPr id="943152248" name="Body Level One…"/>
           <p:cNvSpPr txBox="1"/>
           <p:nvPr>
             <p:ph type="body" sz="half" idx="1"/>
           </p:nvPr>
         </p:nvSpPr>
-        <p:spPr>
+        <p:spPr bwMode="auto">
           <a:xfrm>
             <a:off x="1689100" y="3149600"/>
             <a:ext cx="10223500" cy="9296400"/>
@@ -2178,46 +2457,66 @@
             </a:lvl5pPr>
           </a:lstStyle>
           <a:p>
-            <a:pPr/>
-            <a:r>
+            <a:pPr>
+              <a:defRPr/>
+            </a:pPr>
+            <a:r>
+              <a:rPr/>
               <a:t>Body Level One</a:t>
             </a:r>
-          </a:p>
-          <a:p>
-            <a:pPr lvl="1"/>
-            <a:r>
+            <a:endParaRPr/>
+          </a:p>
+          <a:p>
+            <a:pPr lvl="1">
+              <a:defRPr/>
+            </a:pPr>
+            <a:r>
+              <a:rPr/>
               <a:t>Body Level Two</a:t>
             </a:r>
-          </a:p>
-          <a:p>
-            <a:pPr lvl="2"/>
-            <a:r>
+            <a:endParaRPr/>
+          </a:p>
+          <a:p>
+            <a:pPr lvl="2">
+              <a:defRPr/>
+            </a:pPr>
+            <a:r>
+              <a:rPr/>
               <a:t>Body Level Three</a:t>
             </a:r>
-          </a:p>
-          <a:p>
-            <a:pPr lvl="3"/>
-            <a:r>
+            <a:endParaRPr/>
+          </a:p>
+          <a:p>
+            <a:pPr lvl="3">
+              <a:defRPr/>
+            </a:pPr>
+            <a:r>
+              <a:rPr/>
               <a:t>Body Level Four</a:t>
             </a:r>
-          </a:p>
-          <a:p>
-            <a:pPr lvl="4"/>
-            <a:r>
+            <a:endParaRPr/>
+          </a:p>
+          <a:p>
+            <a:pPr lvl="4">
+              <a:defRPr/>
+            </a:pPr>
+            <a:r>
+              <a:rPr/>
               <a:t>Body Level Five</a:t>
             </a:r>
-          </a:p>
-        </p:txBody>
-      </p:sp>
-      <p:sp>
-        <p:nvSpPr>
-          <p:cNvPr id="77" name="Slide Number"/>
+            <a:endParaRPr/>
+          </a:p>
+        </p:txBody>
+      </p:sp>
+      <p:sp>
+        <p:nvSpPr>
+          <p:cNvPr id="163739041" name="Slide Number"/>
           <p:cNvSpPr txBox="1"/>
           <p:nvPr>
             <p:ph type="sldNum" sz="quarter" idx="2"/>
           </p:nvPr>
         </p:nvSpPr>
-        <p:spPr>
+        <p:spPr bwMode="auto">
           <a:prstGeom prst="rect">
             <a:avLst/>
           </a:prstGeom>
@@ -2226,8 +2525,14 @@
           <a:bodyPr/>
           <a:lstStyle/>
           <a:p>
-            <a:pPr/>
-            <a:fld id="{86CB4B4D-7CA3-9044-876B-883B54F8677D}" type="slidenum"/>
+            <a:pPr>
+              <a:defRPr/>
+            </a:pPr>
+            <a:fld id="{86CB4B4D-7CA3-9044-876B-883B54F8677D}" type="slidenum">
+              <a:rPr/>
+              <a:t/>
+            </a:fld>
+            <a:endParaRPr/>
           </a:p>
         </p:txBody>
       </p:sp>
@@ -2236,12 +2541,11 @@
   <p:clrMapOvr>
     <a:masterClrMapping/>
   </p:clrMapOvr>
-  <p:transition xmlns:p14="http://schemas.microsoft.com/office/powerpoint/2010/main" spd="med" advClick="1"/>
 </p:sldLayout>
 </file>
 
 <file path=ppt/slideLayouts/slideLayout9.xml><?xml version="1.0" encoding="utf-8"?>
-<p:sldLayout xmlns:a="http://schemas.openxmlformats.org/drawingml/2006/main" xmlns:r="http://schemas.openxmlformats.org/officeDocument/2006/relationships" xmlns:p="http://schemas.openxmlformats.org/presentationml/2006/main" xmlns:m="http://schemas.openxmlformats.org/officeDocument/2006/math" xmlns:a14="http://schemas.microsoft.com/office/drawing/2010/main" type="tx" showMasterSp="1" showMasterPhAnim="1">
+<p:sldLayout xmlns:a="http://schemas.openxmlformats.org/drawingml/2006/main" xmlns:r="http://schemas.openxmlformats.org/officeDocument/2006/relationships" xmlns:p="http://schemas.openxmlformats.org/presentationml/2006/main" xmlns:m="http://schemas.openxmlformats.org/officeDocument/2006/math" xmlns:w="http://schemas.openxmlformats.org/wordprocessingml/2006/main" matchingName="" preserve="0" showMasterPhAnim="1" showMasterSp="1" type="tx" userDrawn="1">
   <p:cSld name="Title, Bullets &amp; Live Video Large">
     <p:spTree>
       <p:nvGrpSpPr>
@@ -2249,7 +2553,7 @@
         <p:cNvGrpSpPr/>
         <p:nvPr/>
       </p:nvGrpSpPr>
-      <p:grpSpPr>
+      <p:grpSpPr bwMode="auto">
         <a:xfrm>
           <a:off x="0" y="0"/>
           <a:ext cx="0" cy="0"/>
@@ -2259,13 +2563,13 @@
       </p:grpSpPr>
       <p:sp>
         <p:nvSpPr>
-          <p:cNvPr id="84" name="Title Text"/>
+          <p:cNvPr id="1824773800" name="Title Text"/>
           <p:cNvSpPr txBox="1"/>
           <p:nvPr>
             <p:ph type="title"/>
           </p:nvPr>
         </p:nvSpPr>
-        <p:spPr>
+        <p:spPr bwMode="auto">
           <a:prstGeom prst="rect">
             <a:avLst/>
           </a:prstGeom>
@@ -2274,22 +2578,26 @@
           <a:bodyPr/>
           <a:lstStyle/>
           <a:p>
-            <a:pPr/>
-            <a:r>
+            <a:pPr>
+              <a:defRPr/>
+            </a:pPr>
+            <a:r>
+              <a:rPr/>
               <a:t>Title Text</a:t>
             </a:r>
-          </a:p>
-        </p:txBody>
-      </p:sp>
-      <p:sp>
-        <p:nvSpPr>
-          <p:cNvPr id="85" name="Body Level One…"/>
+            <a:endParaRPr/>
+          </a:p>
+        </p:txBody>
+      </p:sp>
+      <p:sp>
+        <p:nvSpPr>
+          <p:cNvPr id="1839135980" name="Body Level One…"/>
           <p:cNvSpPr txBox="1"/>
           <p:nvPr>
             <p:ph type="body" sz="half" idx="1"/>
           </p:nvPr>
         </p:nvSpPr>
-        <p:spPr>
+        <p:spPr bwMode="auto">
           <a:xfrm>
             <a:off x="1689100" y="3149600"/>
             <a:ext cx="10223500" cy="9296400"/>
@@ -2343,46 +2651,66 @@
             </a:lvl5pPr>
           </a:lstStyle>
           <a:p>
-            <a:pPr/>
-            <a:r>
+            <a:pPr>
+              <a:defRPr/>
+            </a:pPr>
+            <a:r>
+              <a:rPr/>
               <a:t>Body Level One</a:t>
             </a:r>
-          </a:p>
-          <a:p>
-            <a:pPr lvl="1"/>
-            <a:r>
+            <a:endParaRPr/>
+          </a:p>
+          <a:p>
+            <a:pPr lvl="1">
+              <a:defRPr/>
+            </a:pPr>
+            <a:r>
+              <a:rPr/>
               <a:t>Body Level Two</a:t>
             </a:r>
-          </a:p>
-          <a:p>
-            <a:pPr lvl="2"/>
-            <a:r>
+            <a:endParaRPr/>
+          </a:p>
+          <a:p>
+            <a:pPr lvl="2">
+              <a:defRPr/>
+            </a:pPr>
+            <a:r>
+              <a:rPr/>
               <a:t>Body Level Three</a:t>
             </a:r>
-          </a:p>
-          <a:p>
-            <a:pPr lvl="3"/>
-            <a:r>
+            <a:endParaRPr/>
+          </a:p>
+          <a:p>
+            <a:pPr lvl="3">
+              <a:defRPr/>
+            </a:pPr>
+            <a:r>
+              <a:rPr/>
               <a:t>Body Level Four</a:t>
             </a:r>
-          </a:p>
-          <a:p>
-            <a:pPr lvl="4"/>
-            <a:r>
+            <a:endParaRPr/>
+          </a:p>
+          <a:p>
+            <a:pPr lvl="4">
+              <a:defRPr/>
+            </a:pPr>
+            <a:r>
+              <a:rPr/>
               <a:t>Body Level Five</a:t>
             </a:r>
-          </a:p>
-        </p:txBody>
-      </p:sp>
-      <p:sp>
-        <p:nvSpPr>
-          <p:cNvPr id="86" name="Slide Number"/>
+            <a:endParaRPr/>
+          </a:p>
+        </p:txBody>
+      </p:sp>
+      <p:sp>
+        <p:nvSpPr>
+          <p:cNvPr id="1361005062" name="Slide Number"/>
           <p:cNvSpPr txBox="1"/>
           <p:nvPr>
             <p:ph type="sldNum" sz="quarter" idx="2"/>
           </p:nvPr>
         </p:nvSpPr>
-        <p:spPr>
+        <p:spPr bwMode="auto">
           <a:prstGeom prst="rect">
             <a:avLst/>
           </a:prstGeom>
@@ -2391,8 +2719,14 @@
           <a:bodyPr/>
           <a:lstStyle/>
           <a:p>
-            <a:pPr/>
-            <a:fld id="{86CB4B4D-7CA3-9044-876B-883B54F8677D}" type="slidenum"/>
+            <a:pPr>
+              <a:defRPr/>
+            </a:pPr>
+            <a:fld id="{86CB4B4D-7CA3-9044-876B-883B54F8677D}" type="slidenum">
+              <a:rPr/>
+              <a:t/>
+            </a:fld>
+            <a:endParaRPr/>
           </a:p>
         </p:txBody>
       </p:sp>
@@ -2401,15 +2735,14 @@
   <p:clrMapOvr>
     <a:masterClrMapping/>
   </p:clrMapOvr>
-  <p:transition xmlns:p14="http://schemas.microsoft.com/office/powerpoint/2010/main" spd="med" advClick="1"/>
 </p:sldLayout>
 </file>
 
 <file path=ppt/slideMasters/slideMaster1.xml><?xml version="1.0" encoding="utf-8"?>
-<p:sldMaster xmlns:a="http://schemas.openxmlformats.org/drawingml/2006/main" xmlns:r="http://schemas.openxmlformats.org/officeDocument/2006/relationships" xmlns:p="http://schemas.openxmlformats.org/presentationml/2006/main" xmlns:m="http://schemas.openxmlformats.org/officeDocument/2006/math" xmlns:a14="http://schemas.microsoft.com/office/drawing/2010/main">
-  <p:cSld>
+<p:sldMaster xmlns:a="http://schemas.openxmlformats.org/drawingml/2006/main" xmlns:r="http://schemas.openxmlformats.org/officeDocument/2006/relationships" xmlns:p="http://schemas.openxmlformats.org/presentationml/2006/main" xmlns:m="http://schemas.openxmlformats.org/officeDocument/2006/math" xmlns:w="http://schemas.openxmlformats.org/wordprocessingml/2006/main" preserve="0">
+  <p:cSld name="">
     <p:bg>
-      <p:bgPr>
+      <p:bgPr shadeToTitle="0">
         <a:solidFill>
           <a:srgbClr val="000000"/>
         </a:solidFill>
@@ -2421,7 +2754,7 @@
         <p:cNvGrpSpPr/>
         <p:nvPr/>
       </p:nvGrpSpPr>
-      <p:grpSpPr>
+      <p:grpSpPr bwMode="auto">
         <a:xfrm>
           <a:off x="0" y="0"/>
           <a:ext cx="0" cy="0"/>
@@ -2431,13 +2764,13 @@
       </p:grpSpPr>
       <p:sp>
         <p:nvSpPr>
-          <p:cNvPr id="2" name="Title Text"/>
+          <p:cNvPr id="130732852" name="Title Text"/>
           <p:cNvSpPr txBox="1"/>
           <p:nvPr>
             <p:ph type="title"/>
           </p:nvPr>
         </p:nvSpPr>
-        <p:spPr>
+        <p:spPr bwMode="auto">
           <a:xfrm>
             <a:off x="1689100" y="355600"/>
             <a:ext cx="21005800" cy="2286000"/>
@@ -2448,11 +2781,6 @@
           <a:ln w="12700">
             <a:miter lim="400000"/>
           </a:ln>
-          <a:extLst>
-            <a:ext uri="{C572A759-6A51-4108-AA02-DFA0A04FC94B}">
-              <ma14:wrappingTextBoxFlag xmlns:ma14="http://schemas.microsoft.com/office/mac/drawingml/2011/main" val="1"/>
-            </a:ext>
-          </a:extLst>
         </p:spPr>
         <p:txBody>
           <a:bodyPr lIns="50800" tIns="50800" rIns="50800" bIns="50800" anchor="ctr">
@@ -2460,22 +2788,26 @@
           </a:bodyPr>
           <a:lstStyle/>
           <a:p>
-            <a:pPr/>
-            <a:r>
+            <a:pPr>
+              <a:defRPr/>
+            </a:pPr>
+            <a:r>
+              <a:rPr/>
               <a:t>Title Text</a:t>
             </a:r>
-          </a:p>
-        </p:txBody>
-      </p:sp>
-      <p:sp>
-        <p:nvSpPr>
-          <p:cNvPr id="3" name="Body Level One…"/>
+            <a:endParaRPr/>
+          </a:p>
+        </p:txBody>
+      </p:sp>
+      <p:sp>
+        <p:nvSpPr>
+          <p:cNvPr id="1132041117" name="Body Level One…"/>
           <p:cNvSpPr txBox="1"/>
           <p:nvPr>
             <p:ph type="body" idx="1"/>
           </p:nvPr>
         </p:nvSpPr>
-        <p:spPr>
+        <p:spPr bwMode="auto">
           <a:xfrm>
             <a:off x="1689100" y="3149600"/>
             <a:ext cx="21005800" cy="9296400"/>
@@ -2486,11 +2818,6 @@
           <a:ln w="12700">
             <a:miter lim="400000"/>
           </a:ln>
-          <a:extLst>
-            <a:ext uri="{C572A759-6A51-4108-AA02-DFA0A04FC94B}">
-              <ma14:wrappingTextBoxFlag xmlns:ma14="http://schemas.microsoft.com/office/mac/drawingml/2011/main" val="1"/>
-            </a:ext>
-          </a:extLst>
         </p:spPr>
         <p:txBody>
           <a:bodyPr lIns="50800" tIns="50800" rIns="50800" bIns="50800" anchor="ctr">
@@ -2498,46 +2825,66 @@
           </a:bodyPr>
           <a:lstStyle/>
           <a:p>
-            <a:pPr/>
-            <a:r>
+            <a:pPr>
+              <a:defRPr/>
+            </a:pPr>
+            <a:r>
+              <a:rPr/>
               <a:t>Body Level One</a:t>
             </a:r>
-          </a:p>
-          <a:p>
-            <a:pPr lvl="1"/>
-            <a:r>
+            <a:endParaRPr/>
+          </a:p>
+          <a:p>
+            <a:pPr lvl="1">
+              <a:defRPr/>
+            </a:pPr>
+            <a:r>
+              <a:rPr/>
               <a:t>Body Level Two</a:t>
             </a:r>
-          </a:p>
-          <a:p>
-            <a:pPr lvl="2"/>
-            <a:r>
+            <a:endParaRPr/>
+          </a:p>
+          <a:p>
+            <a:pPr lvl="2">
+              <a:defRPr/>
+            </a:pPr>
+            <a:r>
+              <a:rPr/>
               <a:t>Body Level Three</a:t>
             </a:r>
-          </a:p>
-          <a:p>
-            <a:pPr lvl="3"/>
-            <a:r>
+            <a:endParaRPr/>
+          </a:p>
+          <a:p>
+            <a:pPr lvl="3">
+              <a:defRPr/>
+            </a:pPr>
+            <a:r>
+              <a:rPr/>
               <a:t>Body Level Four</a:t>
             </a:r>
-          </a:p>
-          <a:p>
-            <a:pPr lvl="4"/>
-            <a:r>
+            <a:endParaRPr/>
+          </a:p>
+          <a:p>
+            <a:pPr lvl="4">
+              <a:defRPr/>
+            </a:pPr>
+            <a:r>
+              <a:rPr/>
               <a:t>Body Level Five</a:t>
             </a:r>
-          </a:p>
-        </p:txBody>
-      </p:sp>
-      <p:sp>
-        <p:nvSpPr>
-          <p:cNvPr id="4" name="Slide Number"/>
+            <a:endParaRPr/>
+          </a:p>
+        </p:txBody>
+      </p:sp>
+      <p:sp>
+        <p:nvSpPr>
+          <p:cNvPr id="1005232112" name="Slide Number"/>
           <p:cNvSpPr txBox="1"/>
           <p:nvPr>
             <p:ph type="sldNum" sz="quarter" idx="2"/>
           </p:nvPr>
         </p:nvSpPr>
-        <p:spPr>
+        <p:spPr bwMode="auto">
           <a:xfrm>
             <a:off x="11959031" y="13081000"/>
             <a:ext cx="453238" cy="461059"/>
@@ -2562,13 +2909,18 @@
                 <a:latin typeface="Helvetica Neue Light"/>
                 <a:ea typeface="Helvetica Neue Light"/>
                 <a:cs typeface="Helvetica Neue Light"/>
-                <a:sym typeface="Helvetica Neue Light"/>
               </a:defRPr>
             </a:lvl1pPr>
           </a:lstStyle>
           <a:p>
-            <a:pPr/>
-            <a:fld id="{86CB4B4D-7CA3-9044-876B-883B54F8677D}" type="slidenum"/>
+            <a:pPr>
+              <a:defRPr/>
+            </a:pPr>
+            <a:fld id="{86CB4B4D-7CA3-9044-876B-883B54F8677D}" type="slidenum">
+              <a:rPr/>
+              <a:t/>
+            </a:fld>
+            <a:endParaRPr/>
           </a:p>
         </p:txBody>
       </p:sp>
@@ -2576,25 +2928,24 @@
   </p:cSld>
   <p:clrMap bg1="dk1" tx1="lt1" bg2="dk2" tx2="lt2" accent1="accent1" accent2="accent2" accent3="accent3" accent4="accent4" accent5="accent5" accent6="accent6" hlink="hlink" folHlink="folHlink"/>
   <p:sldLayoutIdLst>
-    <p:sldLayoutId id="2147483649" r:id="rId2"/>
-    <p:sldLayoutId id="2147483650" r:id="rId3"/>
-    <p:sldLayoutId id="2147483651" r:id="rId4"/>
-    <p:sldLayoutId id="2147483652" r:id="rId5"/>
-    <p:sldLayoutId id="2147483653" r:id="rId6"/>
-    <p:sldLayoutId id="2147483654" r:id="rId7"/>
-    <p:sldLayoutId id="2147483655" r:id="rId8"/>
-    <p:sldLayoutId id="2147483656" r:id="rId9"/>
-    <p:sldLayoutId id="2147483657" r:id="rId10"/>
-    <p:sldLayoutId id="2147483658" r:id="rId11"/>
-    <p:sldLayoutId id="2147483659" r:id="rId12"/>
-    <p:sldLayoutId id="2147483660" r:id="rId13"/>
-    <p:sldLayoutId id="2147483661" r:id="rId14"/>
-    <p:sldLayoutId id="2147483662" r:id="rId15"/>
+    <p:sldLayoutId id="2147483649" r:id="rId1"/>
+    <p:sldLayoutId id="2147483650" r:id="rId2"/>
+    <p:sldLayoutId id="2147483651" r:id="rId3"/>
+    <p:sldLayoutId id="2147483652" r:id="rId4"/>
+    <p:sldLayoutId id="2147483653" r:id="rId5"/>
+    <p:sldLayoutId id="2147483654" r:id="rId6"/>
+    <p:sldLayoutId id="2147483655" r:id="rId7"/>
+    <p:sldLayoutId id="2147483656" r:id="rId8"/>
+    <p:sldLayoutId id="2147483657" r:id="rId9"/>
+    <p:sldLayoutId id="2147483658" r:id="rId10"/>
+    <p:sldLayoutId id="2147483659" r:id="rId11"/>
+    <p:sldLayoutId id="2147483660" r:id="rId12"/>
+    <p:sldLayoutId id="2147483661" r:id="rId13"/>
+    <p:sldLayoutId id="2147483662" r:id="rId14"/>
   </p:sldLayoutIdLst>
-  <p:transition xmlns:p14="http://schemas.microsoft.com/office/powerpoint/2010/main" spd="med" advClick="1"/>
   <p:txStyles>
     <p:titleStyle>
-      <a:lvl1pPr marL="0" marR="0" indent="0" algn="ctr" defTabSz="825500" rtl="0" latinLnBrk="0">
+      <a:lvl1pPr marL="0" marR="0" indent="0" algn="ctr" defTabSz="825500" rtl="0">
         <a:lnSpc>
           <a:spcPct val="100000"/>
         </a:lnSpc>
@@ -2608,19 +2959,16 @@
         <a:buSzTx/>
         <a:buFontTx/>
         <a:buNone/>
-        <a:tabLst/>
-        <a:defRPr b="0" baseline="0" cap="none" i="0" spc="0" strike="noStrike" sz="11200" u="none">
+        <a:defRPr sz="11200" b="0" i="0" u="none" strike="noStrike" cap="none" spc="0">
           <a:solidFill>
             <a:srgbClr val="FFFFFF"/>
           </a:solidFill>
-          <a:uFillTx/>
           <a:latin typeface="+mn-lt"/>
           <a:ea typeface="+mn-ea"/>
           <a:cs typeface="+mn-cs"/>
-          <a:sym typeface="Helvetica Neue Medium"/>
         </a:defRPr>
       </a:lvl1pPr>
-      <a:lvl2pPr marL="0" marR="0" indent="0" algn="ctr" defTabSz="825500" rtl="0" latinLnBrk="0">
+      <a:lvl2pPr marL="0" marR="0" indent="0" algn="ctr" defTabSz="825500" rtl="0">
         <a:lnSpc>
           <a:spcPct val="100000"/>
         </a:lnSpc>
@@ -2634,19 +2982,16 @@
         <a:buSzTx/>
         <a:buFontTx/>
         <a:buNone/>
-        <a:tabLst/>
-        <a:defRPr b="0" baseline="0" cap="none" i="0" spc="0" strike="noStrike" sz="11200" u="none">
+        <a:defRPr sz="11200" b="0" i="0" u="none" strike="noStrike" cap="none" spc="0">
           <a:solidFill>
             <a:srgbClr val="FFFFFF"/>
           </a:solidFill>
-          <a:uFillTx/>
           <a:latin typeface="+mn-lt"/>
           <a:ea typeface="+mn-ea"/>
           <a:cs typeface="+mn-cs"/>
-          <a:sym typeface="Helvetica Neue Medium"/>
         </a:defRPr>
       </a:lvl2pPr>
-      <a:lvl3pPr marL="0" marR="0" indent="0" algn="ctr" defTabSz="825500" rtl="0" latinLnBrk="0">
+      <a:lvl3pPr marL="0" marR="0" indent="0" algn="ctr" defTabSz="825500" rtl="0">
         <a:lnSpc>
           <a:spcPct val="100000"/>
         </a:lnSpc>
@@ -2660,19 +3005,16 @@
         <a:buSzTx/>
         <a:buFontTx/>
         <a:buNone/>
-        <a:tabLst/>
-        <a:defRPr b="0" baseline="0" cap="none" i="0" spc="0" strike="noStrike" sz="11200" u="none">
+        <a:defRPr sz="11200" b="0" i="0" u="none" strike="noStrike" cap="none" spc="0">
           <a:solidFill>
             <a:srgbClr val="FFFFFF"/>
           </a:solidFill>
-          <a:uFillTx/>
           <a:latin typeface="+mn-lt"/>
           <a:ea typeface="+mn-ea"/>
           <a:cs typeface="+mn-cs"/>
-          <a:sym typeface="Helvetica Neue Medium"/>
         </a:defRPr>
       </a:lvl3pPr>
-      <a:lvl4pPr marL="0" marR="0" indent="0" algn="ctr" defTabSz="825500" rtl="0" latinLnBrk="0">
+      <a:lvl4pPr marL="0" marR="0" indent="0" algn="ctr" defTabSz="825500" rtl="0">
         <a:lnSpc>
           <a:spcPct val="100000"/>
         </a:lnSpc>
@@ -2686,19 +3028,16 @@
         <a:buSzTx/>
         <a:buFontTx/>
         <a:buNone/>
-        <a:tabLst/>
-        <a:defRPr b="0" baseline="0" cap="none" i="0" spc="0" strike="noStrike" sz="11200" u="none">
+        <a:defRPr sz="11200" b="0" i="0" u="none" strike="noStrike" cap="none" spc="0">
           <a:solidFill>
             <a:srgbClr val="FFFFFF"/>
           </a:solidFill>
-          <a:uFillTx/>
           <a:latin typeface="+mn-lt"/>
           <a:ea typeface="+mn-ea"/>
           <a:cs typeface="+mn-cs"/>
-          <a:sym typeface="Helvetica Neue Medium"/>
         </a:defRPr>
       </a:lvl4pPr>
-      <a:lvl5pPr marL="0" marR="0" indent="0" algn="ctr" defTabSz="825500" rtl="0" latinLnBrk="0">
+      <a:lvl5pPr marL="0" marR="0" indent="0" algn="ctr" defTabSz="825500" rtl="0">
         <a:lnSpc>
           <a:spcPct val="100000"/>
         </a:lnSpc>
@@ -2712,19 +3051,16 @@
         <a:buSzTx/>
         <a:buFontTx/>
         <a:buNone/>
-        <a:tabLst/>
-        <a:defRPr b="0" baseline="0" cap="none" i="0" spc="0" strike="noStrike" sz="11200" u="none">
+        <a:defRPr sz="11200" b="0" i="0" u="none" strike="noStrike" cap="none" spc="0">
           <a:solidFill>
             <a:srgbClr val="FFFFFF"/>
           </a:solidFill>
-          <a:uFillTx/>
           <a:latin typeface="+mn-lt"/>
           <a:ea typeface="+mn-ea"/>
           <a:cs typeface="+mn-cs"/>
-          <a:sym typeface="Helvetica Neue Medium"/>
         </a:defRPr>
       </a:lvl5pPr>
-      <a:lvl6pPr marL="0" marR="0" indent="0" algn="ctr" defTabSz="825500" rtl="0" latinLnBrk="0">
+      <a:lvl6pPr marL="0" marR="0" indent="0" algn="ctr" defTabSz="825500" rtl="0">
         <a:lnSpc>
           <a:spcPct val="100000"/>
         </a:lnSpc>
@@ -2738,19 +3074,16 @@
         <a:buSzTx/>
         <a:buFontTx/>
         <a:buNone/>
-        <a:tabLst/>
-        <a:defRPr b="0" baseline="0" cap="none" i="0" spc="0" strike="noStrike" sz="11200" u="none">
+        <a:defRPr sz="11200" b="0" i="0" u="none" strike="noStrike" cap="none" spc="0">
           <a:solidFill>
             <a:srgbClr val="FFFFFF"/>
           </a:solidFill>
-          <a:uFillTx/>
           <a:latin typeface="+mn-lt"/>
           <a:ea typeface="+mn-ea"/>
           <a:cs typeface="+mn-cs"/>
-          <a:sym typeface="Helvetica Neue Medium"/>
         </a:defRPr>
       </a:lvl6pPr>
-      <a:lvl7pPr marL="0" marR="0" indent="0" algn="ctr" defTabSz="825500" rtl="0" latinLnBrk="0">
+      <a:lvl7pPr marL="0" marR="0" indent="0" algn="ctr" defTabSz="825500" rtl="0">
         <a:lnSpc>
           <a:spcPct val="100000"/>
         </a:lnSpc>
@@ -2764,19 +3097,16 @@
         <a:buSzTx/>
         <a:buFontTx/>
         <a:buNone/>
-        <a:tabLst/>
-        <a:defRPr b="0" baseline="0" cap="none" i="0" spc="0" strike="noStrike" sz="11200" u="none">
+        <a:defRPr sz="11200" b="0" i="0" u="none" strike="noStrike" cap="none" spc="0">
           <a:solidFill>
             <a:srgbClr val="FFFFFF"/>
           </a:solidFill>
-          <a:uFillTx/>
           <a:latin typeface="+mn-lt"/>
           <a:ea typeface="+mn-ea"/>
           <a:cs typeface="+mn-cs"/>
-          <a:sym typeface="Helvetica Neue Medium"/>
         </a:defRPr>
       </a:lvl7pPr>
-      <a:lvl8pPr marL="0" marR="0" indent="0" algn="ctr" defTabSz="825500" rtl="0" latinLnBrk="0">
+      <a:lvl8pPr marL="0" marR="0" indent="0" algn="ctr" defTabSz="825500" rtl="0">
         <a:lnSpc>
           <a:spcPct val="100000"/>
         </a:lnSpc>
@@ -2790,19 +3120,16 @@
         <a:buSzTx/>
         <a:buFontTx/>
         <a:buNone/>
-        <a:tabLst/>
-        <a:defRPr b="0" baseline="0" cap="none" i="0" spc="0" strike="noStrike" sz="11200" u="none">
+        <a:defRPr sz="11200" b="0" i="0" u="none" strike="noStrike" cap="none" spc="0">
           <a:solidFill>
             <a:srgbClr val="FFFFFF"/>
           </a:solidFill>
-          <a:uFillTx/>
           <a:latin typeface="+mn-lt"/>
           <a:ea typeface="+mn-ea"/>
           <a:cs typeface="+mn-cs"/>
-          <a:sym typeface="Helvetica Neue Medium"/>
         </a:defRPr>
       </a:lvl8pPr>
-      <a:lvl9pPr marL="0" marR="0" indent="0" algn="ctr" defTabSz="825500" rtl="0" latinLnBrk="0">
+      <a:lvl9pPr marL="0" marR="0" indent="0" algn="ctr" defTabSz="825500" rtl="0">
         <a:lnSpc>
           <a:spcPct val="100000"/>
         </a:lnSpc>
@@ -2816,21 +3143,18 @@
         <a:buSzTx/>
         <a:buFontTx/>
         <a:buNone/>
-        <a:tabLst/>
-        <a:defRPr b="0" baseline="0" cap="none" i="0" spc="0" strike="noStrike" sz="11200" u="none">
+        <a:defRPr sz="11200" b="0" i="0" u="none" strike="noStrike" cap="none" spc="0">
           <a:solidFill>
             <a:srgbClr val="FFFFFF"/>
           </a:solidFill>
-          <a:uFillTx/>
           <a:latin typeface="+mn-lt"/>
           <a:ea typeface="+mn-ea"/>
           <a:cs typeface="+mn-cs"/>
-          <a:sym typeface="Helvetica Neue Medium"/>
         </a:defRPr>
       </a:lvl9pPr>
     </p:titleStyle>
     <p:bodyStyle>
-      <a:lvl1pPr marL="635000" marR="0" indent="-635000" algn="l" defTabSz="825500" rtl="0" latinLnBrk="0">
+      <a:lvl1pPr marL="635000" marR="0" indent="-635000" algn="l" defTabSz="825500" rtl="0">
         <a:lnSpc>
           <a:spcPct val="100000"/>
         </a:lnSpc>
@@ -2846,19 +3170,16 @@
         <a:buSzPct val="125000"/>
         <a:buFont typeface="Helvetica Light"/>
         <a:buChar char="•"/>
-        <a:tabLst/>
-        <a:defRPr b="0" baseline="0" cap="none" i="0" spc="0" strike="noStrike" sz="4800" u="none">
+        <a:defRPr sz="4800" b="0" i="0" u="none" strike="noStrike" cap="none" spc="0">
           <a:solidFill>
             <a:srgbClr val="FFFFFF"/>
           </a:solidFill>
-          <a:uFillTx/>
           <a:latin typeface="Helvetica Neue"/>
           <a:ea typeface="Helvetica Neue"/>
           <a:cs typeface="Helvetica Neue"/>
-          <a:sym typeface="Helvetica Neue"/>
         </a:defRPr>
       </a:lvl1pPr>
-      <a:lvl2pPr marL="1270000" marR="0" indent="-635000" algn="l" defTabSz="825500" rtl="0" latinLnBrk="0">
+      <a:lvl2pPr marL="1270000" marR="0" indent="-635000" algn="l" defTabSz="825500" rtl="0">
         <a:lnSpc>
           <a:spcPct val="100000"/>
         </a:lnSpc>
@@ -2874,19 +3195,16 @@
         <a:buSzPct val="125000"/>
         <a:buFont typeface="Helvetica Light"/>
         <a:buChar char="•"/>
-        <a:tabLst/>
-        <a:defRPr b="0" baseline="0" cap="none" i="0" spc="0" strike="noStrike" sz="4800" u="none">
+        <a:defRPr sz="4800" b="0" i="0" u="none" strike="noStrike" cap="none" spc="0">
           <a:solidFill>
             <a:srgbClr val="FFFFFF"/>
           </a:solidFill>
-          <a:uFillTx/>
           <a:latin typeface="Helvetica Neue"/>
           <a:ea typeface="Helvetica Neue"/>
           <a:cs typeface="Helvetica Neue"/>
-          <a:sym typeface="Helvetica Neue"/>
         </a:defRPr>
       </a:lvl2pPr>
-      <a:lvl3pPr marL="1905000" marR="0" indent="-635000" algn="l" defTabSz="825500" rtl="0" latinLnBrk="0">
+      <a:lvl3pPr marL="1905000" marR="0" indent="-635000" algn="l" defTabSz="825500" rtl="0">
         <a:lnSpc>
           <a:spcPct val="100000"/>
         </a:lnSpc>
@@ -2902,19 +3220,16 @@
         <a:buSzPct val="125000"/>
         <a:buFont typeface="Helvetica Light"/>
         <a:buChar char="•"/>
-        <a:tabLst/>
-        <a:defRPr b="0" baseline="0" cap="none" i="0" spc="0" strike="noStrike" sz="4800" u="none">
+        <a:defRPr sz="4800" b="0" i="0" u="none" strike="noStrike" cap="none" spc="0">
           <a:solidFill>
             <a:srgbClr val="FFFFFF"/>
           </a:solidFill>
-          <a:uFillTx/>
           <a:latin typeface="Helvetica Neue"/>
           <a:ea typeface="Helvetica Neue"/>
           <a:cs typeface="Helvetica Neue"/>
-          <a:sym typeface="Helvetica Neue"/>
         </a:defRPr>
       </a:lvl3pPr>
-      <a:lvl4pPr marL="2540000" marR="0" indent="-635000" algn="l" defTabSz="825500" rtl="0" latinLnBrk="0">
+      <a:lvl4pPr marL="2540000" marR="0" indent="-635000" algn="l" defTabSz="825500" rtl="0">
         <a:lnSpc>
           <a:spcPct val="100000"/>
         </a:lnSpc>
@@ -2930,19 +3245,16 @@
         <a:buSzPct val="125000"/>
         <a:buFont typeface="Helvetica Light"/>
         <a:buChar char="•"/>
-        <a:tabLst/>
-        <a:defRPr b="0" baseline="0" cap="none" i="0" spc="0" strike="noStrike" sz="4800" u="none">
+        <a:defRPr sz="4800" b="0" i="0" u="none" strike="noStrike" cap="none" spc="0">
           <a:solidFill>
             <a:srgbClr val="FFFFFF"/>
           </a:solidFill>
-          <a:uFillTx/>
           <a:latin typeface="Helvetica Neue"/>
           <a:ea typeface="Helvetica Neue"/>
           <a:cs typeface="Helvetica Neue"/>
-          <a:sym typeface="Helvetica Neue"/>
         </a:defRPr>
       </a:lvl4pPr>
-      <a:lvl5pPr marL="3175000" marR="0" indent="-635000" algn="l" defTabSz="825500" rtl="0" latinLnBrk="0">
+      <a:lvl5pPr marL="3175000" marR="0" indent="-635000" algn="l" defTabSz="825500" rtl="0">
         <a:lnSpc>
           <a:spcPct val="100000"/>
         </a:lnSpc>
@@ -2958,19 +3270,16 @@
         <a:buSzPct val="125000"/>
         <a:buFont typeface="Helvetica Light"/>
         <a:buChar char="•"/>
-        <a:tabLst/>
-        <a:defRPr b="0" baseline="0" cap="none" i="0" spc="0" strike="noStrike" sz="4800" u="none">
+        <a:defRPr sz="4800" b="0" i="0" u="none" strike="noStrike" cap="none" spc="0">
           <a:solidFill>
             <a:srgbClr val="FFFFFF"/>
           </a:solidFill>
-          <a:uFillTx/>
           <a:latin typeface="Helvetica Neue"/>
           <a:ea typeface="Helvetica Neue"/>
           <a:cs typeface="Helvetica Neue"/>
-          <a:sym typeface="Helvetica Neue"/>
         </a:defRPr>
       </a:lvl5pPr>
-      <a:lvl6pPr marL="3810000" marR="0" indent="-635000" algn="l" defTabSz="825500" rtl="0" latinLnBrk="0">
+      <a:lvl6pPr marL="3810000" marR="0" indent="-635000" algn="l" defTabSz="825500" rtl="0">
         <a:lnSpc>
           <a:spcPct val="100000"/>
         </a:lnSpc>
@@ -2986,19 +3295,16 @@
         <a:buSzPct val="125000"/>
         <a:buFont typeface="Helvetica Light"/>
         <a:buChar char="•"/>
-        <a:tabLst/>
-        <a:defRPr b="0" baseline="0" cap="none" i="0" spc="0" strike="noStrike" sz="4800" u="none">
+        <a:defRPr sz="4800" b="0" i="0" u="none" strike="noStrike" cap="none" spc="0">
           <a:solidFill>
             <a:srgbClr val="FFFFFF"/>
           </a:solidFill>
-          <a:uFillTx/>
           <a:latin typeface="Helvetica Neue"/>
           <a:ea typeface="Helvetica Neue"/>
           <a:cs typeface="Helvetica Neue"/>
-          <a:sym typeface="Helvetica Neue"/>
         </a:defRPr>
       </a:lvl6pPr>
-      <a:lvl7pPr marL="4445000" marR="0" indent="-635000" algn="l" defTabSz="825500" rtl="0" latinLnBrk="0">
+      <a:lvl7pPr marL="4445000" marR="0" indent="-635000" algn="l" defTabSz="825500" rtl="0">
         <a:lnSpc>
           <a:spcPct val="100000"/>
         </a:lnSpc>
@@ -3014,19 +3320,16 @@
         <a:buSzPct val="125000"/>
         <a:buFont typeface="Helvetica Light"/>
         <a:buChar char="•"/>
-        <a:tabLst/>
-        <a:defRPr b="0" baseline="0" cap="none" i="0" spc="0" strike="noStrike" sz="4800" u="none">
+        <a:defRPr sz="4800" b="0" i="0" u="none" strike="noStrike" cap="none" spc="0">
           <a:solidFill>
             <a:srgbClr val="FFFFFF"/>
           </a:solidFill>
-          <a:uFillTx/>
           <a:latin typeface="Helvetica Neue"/>
           <a:ea typeface="Helvetica Neue"/>
           <a:cs typeface="Helvetica Neue"/>
-          <a:sym typeface="Helvetica Neue"/>
         </a:defRPr>
       </a:lvl7pPr>
-      <a:lvl8pPr marL="5080000" marR="0" indent="-635000" algn="l" defTabSz="825500" rtl="0" latinLnBrk="0">
+      <a:lvl8pPr marL="5080000" marR="0" indent="-635000" algn="l" defTabSz="825500" rtl="0">
         <a:lnSpc>
           <a:spcPct val="100000"/>
         </a:lnSpc>
@@ -3042,19 +3345,16 @@
         <a:buSzPct val="125000"/>
         <a:buFont typeface="Helvetica Light"/>
         <a:buChar char="•"/>
-        <a:tabLst/>
-        <a:defRPr b="0" baseline="0" cap="none" i="0" spc="0" strike="noStrike" sz="4800" u="none">
+        <a:defRPr sz="4800" b="0" i="0" u="none" strike="noStrike" cap="none" spc="0">
           <a:solidFill>
             <a:srgbClr val="FFFFFF"/>
           </a:solidFill>
-          <a:uFillTx/>
           <a:latin typeface="Helvetica Neue"/>
           <a:ea typeface="Helvetica Neue"/>
           <a:cs typeface="Helvetica Neue"/>
-          <a:sym typeface="Helvetica Neue"/>
         </a:defRPr>
       </a:lvl8pPr>
-      <a:lvl9pPr marL="5715000" marR="0" indent="-635000" algn="l" defTabSz="825500" rtl="0" latinLnBrk="0">
+      <a:lvl9pPr marL="5715000" marR="0" indent="-635000" algn="l" defTabSz="825500" rtl="0">
         <a:lnSpc>
           <a:spcPct val="100000"/>
         </a:lnSpc>
@@ -3070,21 +3370,18 @@
         <a:buSzPct val="125000"/>
         <a:buFont typeface="Helvetica Light"/>
         <a:buChar char="•"/>
-        <a:tabLst/>
-        <a:defRPr b="0" baseline="0" cap="none" i="0" spc="0" strike="noStrike" sz="4800" u="none">
+        <a:defRPr sz="4800" b="0" i="0" u="none" strike="noStrike" cap="none" spc="0">
           <a:solidFill>
             <a:srgbClr val="FFFFFF"/>
           </a:solidFill>
-          <a:uFillTx/>
           <a:latin typeface="Helvetica Neue"/>
           <a:ea typeface="Helvetica Neue"/>
           <a:cs typeface="Helvetica Neue"/>
-          <a:sym typeface="Helvetica Neue"/>
         </a:defRPr>
       </a:lvl9pPr>
     </p:bodyStyle>
     <p:otherStyle>
-      <a:lvl1pPr marL="0" marR="0" indent="0" algn="ctr" defTabSz="825500" latinLnBrk="0">
+      <a:lvl1pPr marL="0" marR="0" indent="0" algn="ctr" defTabSz="825500">
         <a:lnSpc>
           <a:spcPct val="100000"/>
         </a:lnSpc>
@@ -3098,19 +3395,16 @@
         <a:buSzTx/>
         <a:buFontTx/>
         <a:buNone/>
-        <a:tabLst/>
-        <a:defRPr b="0" baseline="0" cap="none" i="0" spc="0" strike="noStrike" sz="2400" u="none">
+        <a:defRPr sz="2400" b="0" i="0" u="none" strike="noStrike" cap="none" spc="0">
           <a:solidFill>
             <a:schemeClr val="tx1"/>
           </a:solidFill>
-          <a:uFillTx/>
           <a:latin typeface="+mn-lt"/>
           <a:ea typeface="+mn-ea"/>
           <a:cs typeface="+mn-cs"/>
-          <a:sym typeface="Helvetica Neue Light"/>
         </a:defRPr>
       </a:lvl1pPr>
-      <a:lvl2pPr marL="0" marR="0" indent="228600" algn="ctr" defTabSz="825500" latinLnBrk="0">
+      <a:lvl2pPr marL="0" marR="0" indent="228600" algn="ctr" defTabSz="825500">
         <a:lnSpc>
           <a:spcPct val="100000"/>
         </a:lnSpc>
@@ -3124,19 +3418,16 @@
         <a:buSzTx/>
         <a:buFontTx/>
         <a:buNone/>
-        <a:tabLst/>
-        <a:defRPr b="0" baseline="0" cap="none" i="0" spc="0" strike="noStrike" sz="2400" u="none">
+        <a:defRPr sz="2400" b="0" i="0" u="none" strike="noStrike" cap="none" spc="0">
           <a:solidFill>
             <a:schemeClr val="tx1"/>
           </a:solidFill>
-          <a:uFillTx/>
           <a:latin typeface="+mn-lt"/>
           <a:ea typeface="+mn-ea"/>
           <a:cs typeface="+mn-cs"/>
-          <a:sym typeface="Helvetica Neue Light"/>
         </a:defRPr>
       </a:lvl2pPr>
-      <a:lvl3pPr marL="0" marR="0" indent="457200" algn="ctr" defTabSz="825500" latinLnBrk="0">
+      <a:lvl3pPr marL="0" marR="0" indent="457200" algn="ctr" defTabSz="825500">
         <a:lnSpc>
           <a:spcPct val="100000"/>
         </a:lnSpc>
@@ -3150,19 +3441,16 @@
         <a:buSzTx/>
         <a:buFontTx/>
         <a:buNone/>
-        <a:tabLst/>
-        <a:defRPr b="0" baseline="0" cap="none" i="0" spc="0" strike="noStrike" sz="2400" u="none">
+        <a:defRPr sz="2400" b="0" i="0" u="none" strike="noStrike" cap="none" spc="0">
           <a:solidFill>
             <a:schemeClr val="tx1"/>
           </a:solidFill>
-          <a:uFillTx/>
           <a:latin typeface="+mn-lt"/>
           <a:ea typeface="+mn-ea"/>
           <a:cs typeface="+mn-cs"/>
-          <a:sym typeface="Helvetica Neue Light"/>
         </a:defRPr>
       </a:lvl3pPr>
-      <a:lvl4pPr marL="0" marR="0" indent="685800" algn="ctr" defTabSz="825500" latinLnBrk="0">
+      <a:lvl4pPr marL="0" marR="0" indent="685800" algn="ctr" defTabSz="825500">
         <a:lnSpc>
           <a:spcPct val="100000"/>
         </a:lnSpc>
@@ -3176,19 +3464,16 @@
         <a:buSzTx/>
         <a:buFontTx/>
         <a:buNone/>
-        <a:tabLst/>
-        <a:defRPr b="0" baseline="0" cap="none" i="0" spc="0" strike="noStrike" sz="2400" u="none">
+        <a:defRPr sz="2400" b="0" i="0" u="none" strike="noStrike" cap="none" spc="0">
           <a:solidFill>
             <a:schemeClr val="tx1"/>
           </a:solidFill>
-          <a:uFillTx/>
           <a:latin typeface="+mn-lt"/>
           <a:ea typeface="+mn-ea"/>
           <a:cs typeface="+mn-cs"/>
-          <a:sym typeface="Helvetica Neue Light"/>
         </a:defRPr>
       </a:lvl4pPr>
-      <a:lvl5pPr marL="0" marR="0" indent="914400" algn="ctr" defTabSz="825500" latinLnBrk="0">
+      <a:lvl5pPr marL="0" marR="0" indent="914400" algn="ctr" defTabSz="825500">
         <a:lnSpc>
           <a:spcPct val="100000"/>
         </a:lnSpc>
@@ -3202,19 +3487,16 @@
         <a:buSzTx/>
         <a:buFontTx/>
         <a:buNone/>
-        <a:tabLst/>
-        <a:defRPr b="0" baseline="0" cap="none" i="0" spc="0" strike="noStrike" sz="2400" u="none">
+        <a:defRPr sz="2400" b="0" i="0" u="none" strike="noStrike" cap="none" spc="0">
           <a:solidFill>
             <a:schemeClr val="tx1"/>
           </a:solidFill>
-          <a:uFillTx/>
           <a:latin typeface="+mn-lt"/>
           <a:ea typeface="+mn-ea"/>
           <a:cs typeface="+mn-cs"/>
-          <a:sym typeface="Helvetica Neue Light"/>
         </a:defRPr>
       </a:lvl5pPr>
-      <a:lvl6pPr marL="0" marR="0" indent="1143000" algn="ctr" defTabSz="825500" latinLnBrk="0">
+      <a:lvl6pPr marL="0" marR="0" indent="1143000" algn="ctr" defTabSz="825500">
         <a:lnSpc>
           <a:spcPct val="100000"/>
         </a:lnSpc>
@@ -3228,19 +3510,16 @@
         <a:buSzTx/>
         <a:buFontTx/>
         <a:buNone/>
-        <a:tabLst/>
-        <a:defRPr b="0" baseline="0" cap="none" i="0" spc="0" strike="noStrike" sz="2400" u="none">
+        <a:defRPr sz="2400" b="0" i="0" u="none" strike="noStrike" cap="none" spc="0">
           <a:solidFill>
             <a:schemeClr val="tx1"/>
           </a:solidFill>
-          <a:uFillTx/>
           <a:latin typeface="+mn-lt"/>
           <a:ea typeface="+mn-ea"/>
           <a:cs typeface="+mn-cs"/>
-          <a:sym typeface="Helvetica Neue Light"/>
         </a:defRPr>
       </a:lvl6pPr>
-      <a:lvl7pPr marL="0" marR="0" indent="1371600" algn="ctr" defTabSz="825500" latinLnBrk="0">
+      <a:lvl7pPr marL="0" marR="0" indent="1371600" algn="ctr" defTabSz="825500">
         <a:lnSpc>
           <a:spcPct val="100000"/>
         </a:lnSpc>
@@ -3254,19 +3533,16 @@
         <a:buSzTx/>
         <a:buFontTx/>
         <a:buNone/>
-        <a:tabLst/>
-        <a:defRPr b="0" baseline="0" cap="none" i="0" spc="0" strike="noStrike" sz="2400" u="none">
+        <a:defRPr sz="2400" b="0" i="0" u="none" strike="noStrike" cap="none" spc="0">
           <a:solidFill>
             <a:schemeClr val="tx1"/>
           </a:solidFill>
-          <a:uFillTx/>
           <a:latin typeface="+mn-lt"/>
           <a:ea typeface="+mn-ea"/>
           <a:cs typeface="+mn-cs"/>
-          <a:sym typeface="Helvetica Neue Light"/>
         </a:defRPr>
       </a:lvl7pPr>
-      <a:lvl8pPr marL="0" marR="0" indent="1600200" algn="ctr" defTabSz="825500" latinLnBrk="0">
+      <a:lvl8pPr marL="0" marR="0" indent="1600200" algn="ctr" defTabSz="825500">
         <a:lnSpc>
           <a:spcPct val="100000"/>
         </a:lnSpc>
@@ -3280,19 +3556,16 @@
         <a:buSzTx/>
         <a:buFontTx/>
         <a:buNone/>
-        <a:tabLst/>
-        <a:defRPr b="0" baseline="0" cap="none" i="0" spc="0" strike="noStrike" sz="2400" u="none">
+        <a:defRPr sz="2400" b="0" i="0" u="none" strike="noStrike" cap="none" spc="0">
           <a:solidFill>
             <a:schemeClr val="tx1"/>
           </a:solidFill>
-          <a:uFillTx/>
           <a:latin typeface="+mn-lt"/>
           <a:ea typeface="+mn-ea"/>
           <a:cs typeface="+mn-cs"/>
-          <a:sym typeface="Helvetica Neue Light"/>
         </a:defRPr>
       </a:lvl8pPr>
-      <a:lvl9pPr marL="0" marR="0" indent="1828800" algn="ctr" defTabSz="825500" latinLnBrk="0">
+      <a:lvl9pPr marL="0" marR="0" indent="1828800" algn="ctr" defTabSz="825500">
         <a:lnSpc>
           <a:spcPct val="100000"/>
         </a:lnSpc>
@@ -3306,16 +3579,13 @@
         <a:buSzTx/>
         <a:buFontTx/>
         <a:buNone/>
-        <a:tabLst/>
-        <a:defRPr b="0" baseline="0" cap="none" i="0" spc="0" strike="noStrike" sz="2400" u="none">
+        <a:defRPr sz="2400" b="0" i="0" u="none" strike="noStrike" cap="none" spc="0">
           <a:solidFill>
             <a:schemeClr val="tx1"/>
           </a:solidFill>
-          <a:uFillTx/>
           <a:latin typeface="+mn-lt"/>
           <a:ea typeface="+mn-ea"/>
           <a:cs typeface="+mn-cs"/>
-          <a:sym typeface="Helvetica Neue Light"/>
         </a:defRPr>
       </a:lvl9pPr>
     </p:otherStyle>
@@ -3324,15 +3594,15 @@
 </file>
 
 <file path=ppt/slides/slide1.xml><?xml version="1.0" encoding="utf-8"?>
-<p:sld xmlns:a="http://schemas.openxmlformats.org/drawingml/2006/main" xmlns:r="http://schemas.openxmlformats.org/officeDocument/2006/relationships" xmlns:p="http://schemas.openxmlformats.org/presentationml/2006/main" xmlns:m="http://schemas.openxmlformats.org/officeDocument/2006/math" xmlns:a14="http://schemas.microsoft.com/office/drawing/2010/main" showMasterSp="1" showMasterPhAnim="1">
-  <p:cSld>
+<p:sld xmlns:a="http://schemas.openxmlformats.org/drawingml/2006/main" xmlns:r="http://schemas.openxmlformats.org/officeDocument/2006/relationships" xmlns:p="http://schemas.openxmlformats.org/presentationml/2006/main" xmlns:m="http://schemas.openxmlformats.org/officeDocument/2006/math" xmlns:w="http://schemas.openxmlformats.org/wordprocessingml/2006/main" xmlns:mc="http://schemas.openxmlformats.org/markup-compatibility/2006" showMasterPhAnim="1" showMasterSp="1" show="1">
+  <p:cSld name="">
     <p:spTree>
       <p:nvGrpSpPr>
         <p:cNvPr id="1" name=""/>
         <p:cNvGrpSpPr/>
         <p:nvPr/>
       </p:nvGrpSpPr>
-      <p:grpSpPr>
+      <p:grpSpPr bwMode="auto">
         <a:xfrm>
           <a:off x="0" y="0"/>
           <a:ext cx="0" cy="0"/>
@@ -3342,13 +3612,13 @@
       </p:grpSpPr>
       <p:sp>
         <p:nvSpPr>
-          <p:cNvPr id="137" name="My Presentation"/>
+          <p:cNvPr id="20963923" name="My Presentation"/>
           <p:cNvSpPr txBox="1"/>
           <p:nvPr>
             <p:ph type="ctrTitle"/>
           </p:nvPr>
         </p:nvSpPr>
-        <p:spPr>
+        <p:spPr bwMode="auto">
           <a:prstGeom prst="rect">
             <a:avLst/>
           </a:prstGeom>
@@ -3357,22 +3627,26 @@
           <a:bodyPr/>
           <a:lstStyle/>
           <a:p>
-            <a:pPr/>
-            <a:r>
+            <a:pPr>
+              <a:defRPr/>
+            </a:pPr>
+            <a:r>
+              <a:rPr/>
               <a:t>My Presentation</a:t>
             </a:r>
-          </a:p>
-        </p:txBody>
-      </p:sp>
-      <p:sp>
-        <p:nvSpPr>
-          <p:cNvPr id="138" name="Muhammad Zeeshan"/>
+            <a:endParaRPr/>
+          </a:p>
+        </p:txBody>
+      </p:sp>
+      <p:sp>
+        <p:nvSpPr>
+          <p:cNvPr id="1583487635" name="Muhammad Zeeshan"/>
           <p:cNvSpPr txBox="1"/>
           <p:nvPr>
             <p:ph type="subTitle" sz="quarter" idx="1"/>
           </p:nvPr>
         </p:nvSpPr>
-        <p:spPr>
+        <p:spPr bwMode="auto">
           <a:prstGeom prst="rect">
             <a:avLst/>
           </a:prstGeom>
@@ -3381,10 +3655,14 @@
           <a:bodyPr/>
           <a:lstStyle/>
           <a:p>
-            <a:pPr/>
-            <a:r>
+            <a:pPr>
+              <a:defRPr/>
+            </a:pPr>
+            <a:r>
+              <a:rPr/>
               <a:t>Muhammad Zeeshan</a:t>
             </a:r>
+            <a:endParaRPr/>
           </a:p>
         </p:txBody>
       </p:sp>
@@ -3393,12 +3671,19 @@
   <p:clrMapOvr>
     <a:masterClrMapping/>
   </p:clrMapOvr>
-  <p:transition xmlns:p14="http://schemas.microsoft.com/office/powerpoint/2010/main" spd="med" advClick="1"/>
+  <mc:AlternateContent xmlns:mc="http://schemas.openxmlformats.org/markup-compatibility/2006">
+    <mc:Choice xmlns:p159="http://schemas.microsoft.com/office/powerpoint/2015/09/main" xmlns:p14="http://schemas.microsoft.com/office/powerpoint/2010/main" Requires="p159">
+      <p:transition p14:dur="750" advClick="1"/>
+    </mc:Choice>
+    <mc:Fallback>
+      <p:transition advClick="1"/>
+    </mc:Fallback>
+  </mc:AlternateContent>
 </p:sld>
 </file>
 
 <file path=ppt/theme/theme1.xml><?xml version="1.0" encoding="utf-8"?>
-<a:theme xmlns:a="http://schemas.openxmlformats.org/drawingml/2006/main" xmlns:r="http://schemas.openxmlformats.org/officeDocument/2006/relationships" name="Black">
+<a:theme xmlns:a="http://schemas.openxmlformats.org/drawingml/2006/main" xmlns:r="http://schemas.openxmlformats.org/officeDocument/2006/relationships" xmlns:p="http://schemas.openxmlformats.org/presentationml/2006/main" name="Black">
   <a:themeElements>
     <a:clrScheme name="Black">
       <a:dk1>
@@ -3455,7 +3740,7 @@
         <a:solidFill>
           <a:schemeClr val="phClr"/>
         </a:solidFill>
-        <a:gradFill rotWithShape="1">
+        <a:gradFill>
           <a:gsLst>
             <a:gs pos="0">
               <a:schemeClr val="phClr">
@@ -3478,7 +3763,7 @@
           </a:gsLst>
           <a:lin ang="16200000" scaled="1"/>
         </a:gradFill>
-        <a:gradFill rotWithShape="1">
+        <a:gradFill>
           <a:gsLst>
             <a:gs pos="0">
               <a:schemeClr val="phClr">
@@ -3536,7 +3821,7 @@
         <a:solidFill>
           <a:schemeClr val="phClr"/>
         </a:solidFill>
-        <a:gradFill rotWithShape="1">
+        <a:gradFill>
           <a:gsLst>
             <a:gs pos="0">
               <a:schemeClr val="phClr">
@@ -3558,11 +3843,9 @@
               </a:schemeClr>
             </a:gs>
           </a:gsLst>
-          <a:path path="circle">
-            <a:fillToRect l="50000" t="-80000" r="50000" b="180000"/>
-          </a:path>
+          <a:path path="circle"/>
         </a:gradFill>
-        <a:gradFill rotWithShape="1">
+        <a:gradFill>
           <a:gsLst>
             <a:gs pos="0">
               <a:schemeClr val="phClr">
@@ -3577,16 +3860,17 @@
               </a:schemeClr>
             </a:gs>
           </a:gsLst>
-          <a:path path="circle">
-            <a:fillToRect l="50000" t="50000" r="50000" b="50000"/>
-          </a:path>
+          <a:path path="circle"/>
         </a:gradFill>
       </a:bgFillStyleLst>
     </a:fmtScheme>
   </a:themeElements>
   <a:objectDefaults>
     <a:spDef>
-      <a:spPr>
+      <a:spPr bwMode="auto">
+        <a:prstGeom prst="rect">
+          <a:avLst/>
+        </a:prstGeom>
         <a:solidFill>
           <a:schemeClr val="accent1">
             <a:lumOff val="13529"/>
@@ -3597,277 +3881,9 @@
           <a:miter lim="400000"/>
         </a:ln>
         <a:effectLst/>
-        <a:sp3d/>
       </a:spPr>
-      <a:bodyPr rot="0" spcFirstLastPara="1" vertOverflow="overflow" horzOverflow="overflow" vert="horz" wrap="square" lIns="50800" tIns="50800" rIns="50800" bIns="50800" numCol="1" spcCol="38100" rtlCol="0" anchor="ctr" upright="0">
-        <a:spAutoFit/>
-      </a:bodyPr>
-      <a:lstStyle>
-        <a:defPPr marL="0" marR="0" indent="0" algn="ctr" defTabSz="825500" rtl="0" fontAlgn="auto" latinLnBrk="0" hangingPunct="0">
-          <a:lnSpc>
-            <a:spcPct val="100000"/>
-          </a:lnSpc>
-          <a:spcBef>
-            <a:spcPts val="0"/>
-          </a:spcBef>
-          <a:spcAft>
-            <a:spcPts val="0"/>
-          </a:spcAft>
-          <a:buClrTx/>
-          <a:buSzTx/>
-          <a:buFontTx/>
-          <a:buNone/>
-          <a:tabLst/>
-          <a:defRPr b="0" baseline="0" cap="none" i="0" spc="0" strike="noStrike" sz="3200" u="none" kumimoji="0" normalizeH="0">
-            <a:ln>
-              <a:noFill/>
-            </a:ln>
-            <a:solidFill>
-              <a:srgbClr val="FFFFFF"/>
-            </a:solidFill>
-            <a:effectLst/>
-            <a:uFillTx/>
-            <a:latin typeface="+mn-lt"/>
-            <a:ea typeface="+mn-ea"/>
-            <a:cs typeface="+mn-cs"/>
-            <a:sym typeface="Helvetica Neue Medium"/>
-          </a:defRPr>
-        </a:defPPr>
-        <a:lvl1pPr marL="0" marR="0" indent="0" algn="l" defTabSz="914400" rtl="0" fontAlgn="auto" latinLnBrk="1" hangingPunct="0">
-          <a:lnSpc>
-            <a:spcPct val="100000"/>
-          </a:lnSpc>
-          <a:spcBef>
-            <a:spcPts val="0"/>
-          </a:spcBef>
-          <a:spcAft>
-            <a:spcPts val="0"/>
-          </a:spcAft>
-          <a:buClrTx/>
-          <a:buSzTx/>
-          <a:buFontTx/>
-          <a:buNone/>
-          <a:tabLst/>
-          <a:defRPr b="0" baseline="0" cap="none" i="0" spc="0" strike="noStrike" sz="1800" u="none" kumimoji="0" normalizeH="0">
-            <a:ln>
-              <a:noFill/>
-            </a:ln>
-            <a:solidFill>
-              <a:srgbClr val="000000"/>
-            </a:solidFill>
-            <a:effectLst/>
-            <a:uFillTx/>
-          </a:defRPr>
-        </a:lvl1pPr>
-        <a:lvl2pPr marL="0" marR="0" indent="0" algn="l" defTabSz="914400" rtl="0" fontAlgn="auto" latinLnBrk="1" hangingPunct="0">
-          <a:lnSpc>
-            <a:spcPct val="100000"/>
-          </a:lnSpc>
-          <a:spcBef>
-            <a:spcPts val="0"/>
-          </a:spcBef>
-          <a:spcAft>
-            <a:spcPts val="0"/>
-          </a:spcAft>
-          <a:buClrTx/>
-          <a:buSzTx/>
-          <a:buFontTx/>
-          <a:buNone/>
-          <a:tabLst/>
-          <a:defRPr b="0" baseline="0" cap="none" i="0" spc="0" strike="noStrike" sz="1800" u="none" kumimoji="0" normalizeH="0">
-            <a:ln>
-              <a:noFill/>
-            </a:ln>
-            <a:solidFill>
-              <a:srgbClr val="000000"/>
-            </a:solidFill>
-            <a:effectLst/>
-            <a:uFillTx/>
-          </a:defRPr>
-        </a:lvl2pPr>
-        <a:lvl3pPr marL="0" marR="0" indent="0" algn="l" defTabSz="914400" rtl="0" fontAlgn="auto" latinLnBrk="1" hangingPunct="0">
-          <a:lnSpc>
-            <a:spcPct val="100000"/>
-          </a:lnSpc>
-          <a:spcBef>
-            <a:spcPts val="0"/>
-          </a:spcBef>
-          <a:spcAft>
-            <a:spcPts val="0"/>
-          </a:spcAft>
-          <a:buClrTx/>
-          <a:buSzTx/>
-          <a:buFontTx/>
-          <a:buNone/>
-          <a:tabLst/>
-          <a:defRPr b="0" baseline="0" cap="none" i="0" spc="0" strike="noStrike" sz="1800" u="none" kumimoji="0" normalizeH="0">
-            <a:ln>
-              <a:noFill/>
-            </a:ln>
-            <a:solidFill>
-              <a:srgbClr val="000000"/>
-            </a:solidFill>
-            <a:effectLst/>
-            <a:uFillTx/>
-          </a:defRPr>
-        </a:lvl3pPr>
-        <a:lvl4pPr marL="0" marR="0" indent="0" algn="l" defTabSz="914400" rtl="0" fontAlgn="auto" latinLnBrk="1" hangingPunct="0">
-          <a:lnSpc>
-            <a:spcPct val="100000"/>
-          </a:lnSpc>
-          <a:spcBef>
-            <a:spcPts val="0"/>
-          </a:spcBef>
-          <a:spcAft>
-            <a:spcPts val="0"/>
-          </a:spcAft>
-          <a:buClrTx/>
-          <a:buSzTx/>
-          <a:buFontTx/>
-          <a:buNone/>
-          <a:tabLst/>
-          <a:defRPr b="0" baseline="0" cap="none" i="0" spc="0" strike="noStrike" sz="1800" u="none" kumimoji="0" normalizeH="0">
-            <a:ln>
-              <a:noFill/>
-            </a:ln>
-            <a:solidFill>
-              <a:srgbClr val="000000"/>
-            </a:solidFill>
-            <a:effectLst/>
-            <a:uFillTx/>
-          </a:defRPr>
-        </a:lvl4pPr>
-        <a:lvl5pPr marL="0" marR="0" indent="0" algn="l" defTabSz="914400" rtl="0" fontAlgn="auto" latinLnBrk="1" hangingPunct="0">
-          <a:lnSpc>
-            <a:spcPct val="100000"/>
-          </a:lnSpc>
-          <a:spcBef>
-            <a:spcPts val="0"/>
-          </a:spcBef>
-          <a:spcAft>
-            <a:spcPts val="0"/>
-          </a:spcAft>
-          <a:buClrTx/>
-          <a:buSzTx/>
-          <a:buFontTx/>
-          <a:buNone/>
-          <a:tabLst/>
-          <a:defRPr b="0" baseline="0" cap="none" i="0" spc="0" strike="noStrike" sz="1800" u="none" kumimoji="0" normalizeH="0">
-            <a:ln>
-              <a:noFill/>
-            </a:ln>
-            <a:solidFill>
-              <a:srgbClr val="000000"/>
-            </a:solidFill>
-            <a:effectLst/>
-            <a:uFillTx/>
-          </a:defRPr>
-        </a:lvl5pPr>
-        <a:lvl6pPr marL="0" marR="0" indent="0" algn="l" defTabSz="914400" rtl="0" fontAlgn="auto" latinLnBrk="1" hangingPunct="0">
-          <a:lnSpc>
-            <a:spcPct val="100000"/>
-          </a:lnSpc>
-          <a:spcBef>
-            <a:spcPts val="0"/>
-          </a:spcBef>
-          <a:spcAft>
-            <a:spcPts val="0"/>
-          </a:spcAft>
-          <a:buClrTx/>
-          <a:buSzTx/>
-          <a:buFontTx/>
-          <a:buNone/>
-          <a:tabLst/>
-          <a:defRPr b="0" baseline="0" cap="none" i="0" spc="0" strike="noStrike" sz="1800" u="none" kumimoji="0" normalizeH="0">
-            <a:ln>
-              <a:noFill/>
-            </a:ln>
-            <a:solidFill>
-              <a:srgbClr val="000000"/>
-            </a:solidFill>
-            <a:effectLst/>
-            <a:uFillTx/>
-          </a:defRPr>
-        </a:lvl6pPr>
-        <a:lvl7pPr marL="0" marR="0" indent="0" algn="l" defTabSz="914400" rtl="0" fontAlgn="auto" latinLnBrk="1" hangingPunct="0">
-          <a:lnSpc>
-            <a:spcPct val="100000"/>
-          </a:lnSpc>
-          <a:spcBef>
-            <a:spcPts val="0"/>
-          </a:spcBef>
-          <a:spcAft>
-            <a:spcPts val="0"/>
-          </a:spcAft>
-          <a:buClrTx/>
-          <a:buSzTx/>
-          <a:buFontTx/>
-          <a:buNone/>
-          <a:tabLst/>
-          <a:defRPr b="0" baseline="0" cap="none" i="0" spc="0" strike="noStrike" sz="1800" u="none" kumimoji="0" normalizeH="0">
-            <a:ln>
-              <a:noFill/>
-            </a:ln>
-            <a:solidFill>
-              <a:srgbClr val="000000"/>
-            </a:solidFill>
-            <a:effectLst/>
-            <a:uFillTx/>
-          </a:defRPr>
-        </a:lvl7pPr>
-        <a:lvl8pPr marL="0" marR="0" indent="0" algn="l" defTabSz="914400" rtl="0" fontAlgn="auto" latinLnBrk="1" hangingPunct="0">
-          <a:lnSpc>
-            <a:spcPct val="100000"/>
-          </a:lnSpc>
-          <a:spcBef>
-            <a:spcPts val="0"/>
-          </a:spcBef>
-          <a:spcAft>
-            <a:spcPts val="0"/>
-          </a:spcAft>
-          <a:buClrTx/>
-          <a:buSzTx/>
-          <a:buFontTx/>
-          <a:buNone/>
-          <a:tabLst/>
-          <a:defRPr b="0" baseline="0" cap="none" i="0" spc="0" strike="noStrike" sz="1800" u="none" kumimoji="0" normalizeH="0">
-            <a:ln>
-              <a:noFill/>
-            </a:ln>
-            <a:solidFill>
-              <a:srgbClr val="000000"/>
-            </a:solidFill>
-            <a:effectLst/>
-            <a:uFillTx/>
-          </a:defRPr>
-        </a:lvl8pPr>
-        <a:lvl9pPr marL="0" marR="0" indent="0" algn="l" defTabSz="914400" rtl="0" fontAlgn="auto" latinLnBrk="1" hangingPunct="0">
-          <a:lnSpc>
-            <a:spcPct val="100000"/>
-          </a:lnSpc>
-          <a:spcBef>
-            <a:spcPts val="0"/>
-          </a:spcBef>
-          <a:spcAft>
-            <a:spcPts val="0"/>
-          </a:spcAft>
-          <a:buClrTx/>
-          <a:buSzTx/>
-          <a:buFontTx/>
-          <a:buNone/>
-          <a:tabLst/>
-          <a:defRPr b="0" baseline="0" cap="none" i="0" spc="0" strike="noStrike" sz="1800" u="none" kumimoji="0" normalizeH="0">
-            <a:ln>
-              <a:noFill/>
-            </a:ln>
-            <a:solidFill>
-              <a:srgbClr val="000000"/>
-            </a:solidFill>
-            <a:effectLst/>
-            <a:uFillTx/>
-          </a:defRPr>
-        </a:lvl9pPr>
-      </a:lstStyle>
+      <a:bodyPr/>
+      <a:lstStyle/>
       <a:style>
         <a:lnRef idx="0"/>
         <a:fillRef idx="0"/>
@@ -3876,7 +3892,10 @@
       </a:style>
     </a:spDef>
     <a:lnDef>
-      <a:spPr>
+      <a:spPr bwMode="auto">
+        <a:prstGeom prst="rect">
+          <a:avLst/>
+        </a:prstGeom>
         <a:noFill/>
         <a:ln w="25400" cap="flat">
           <a:solidFill>
@@ -3886,273 +3905,9 @@
           <a:miter lim="400000"/>
         </a:ln>
         <a:effectLst/>
-        <a:sp3d/>
       </a:spPr>
-      <a:bodyPr rot="0" spcFirstLastPara="1" vertOverflow="overflow" horzOverflow="overflow" vert="horz" wrap="square" lIns="91439" tIns="45719" rIns="91439" bIns="45719" numCol="1" spcCol="38100" rtlCol="0" anchor="t" upright="0">
-        <a:noAutofit/>
-      </a:bodyPr>
-      <a:lstStyle>
-        <a:defPPr marL="0" marR="0" indent="0" algn="l" defTabSz="914400" rtl="0" fontAlgn="auto" latinLnBrk="1" hangingPunct="0">
-          <a:lnSpc>
-            <a:spcPct val="100000"/>
-          </a:lnSpc>
-          <a:spcBef>
-            <a:spcPts val="0"/>
-          </a:spcBef>
-          <a:spcAft>
-            <a:spcPts val="0"/>
-          </a:spcAft>
-          <a:buClrTx/>
-          <a:buSzTx/>
-          <a:buFontTx/>
-          <a:buNone/>
-          <a:tabLst/>
-          <a:defRPr b="0" baseline="0" cap="none" i="0" spc="0" strike="noStrike" sz="1800" u="none" kumimoji="0" normalizeH="0">
-            <a:ln>
-              <a:noFill/>
-            </a:ln>
-            <a:solidFill>
-              <a:srgbClr val="000000"/>
-            </a:solidFill>
-            <a:effectLst/>
-            <a:uFillTx/>
-          </a:defRPr>
-        </a:defPPr>
-        <a:lvl1pPr marL="0" marR="0" indent="0" algn="l" defTabSz="914400" rtl="0" fontAlgn="auto" latinLnBrk="1" hangingPunct="0">
-          <a:lnSpc>
-            <a:spcPct val="100000"/>
-          </a:lnSpc>
-          <a:spcBef>
-            <a:spcPts val="0"/>
-          </a:spcBef>
-          <a:spcAft>
-            <a:spcPts val="0"/>
-          </a:spcAft>
-          <a:buClrTx/>
-          <a:buSzTx/>
-          <a:buFontTx/>
-          <a:buNone/>
-          <a:tabLst/>
-          <a:defRPr b="0" baseline="0" cap="none" i="0" spc="0" strike="noStrike" sz="1800" u="none" kumimoji="0" normalizeH="0">
-            <a:ln>
-              <a:noFill/>
-            </a:ln>
-            <a:solidFill>
-              <a:srgbClr val="000000"/>
-            </a:solidFill>
-            <a:effectLst/>
-            <a:uFillTx/>
-          </a:defRPr>
-        </a:lvl1pPr>
-        <a:lvl2pPr marL="0" marR="0" indent="0" algn="l" defTabSz="914400" rtl="0" fontAlgn="auto" latinLnBrk="1" hangingPunct="0">
-          <a:lnSpc>
-            <a:spcPct val="100000"/>
-          </a:lnSpc>
-          <a:spcBef>
-            <a:spcPts val="0"/>
-          </a:spcBef>
-          <a:spcAft>
-            <a:spcPts val="0"/>
-          </a:spcAft>
-          <a:buClrTx/>
-          <a:buSzTx/>
-          <a:buFontTx/>
-          <a:buNone/>
-          <a:tabLst/>
-          <a:defRPr b="0" baseline="0" cap="none" i="0" spc="0" strike="noStrike" sz="1800" u="none" kumimoji="0" normalizeH="0">
-            <a:ln>
-              <a:noFill/>
-            </a:ln>
-            <a:solidFill>
-              <a:srgbClr val="000000"/>
-            </a:solidFill>
-            <a:effectLst/>
-            <a:uFillTx/>
-          </a:defRPr>
-        </a:lvl2pPr>
-        <a:lvl3pPr marL="0" marR="0" indent="0" algn="l" defTabSz="914400" rtl="0" fontAlgn="auto" latinLnBrk="1" hangingPunct="0">
-          <a:lnSpc>
-            <a:spcPct val="100000"/>
-          </a:lnSpc>
-          <a:spcBef>
-            <a:spcPts val="0"/>
-          </a:spcBef>
-          <a:spcAft>
-            <a:spcPts val="0"/>
-          </a:spcAft>
-          <a:buClrTx/>
-          <a:buSzTx/>
-          <a:buFontTx/>
-          <a:buNone/>
-          <a:tabLst/>
-          <a:defRPr b="0" baseline="0" cap="none" i="0" spc="0" strike="noStrike" sz="1800" u="none" kumimoji="0" normalizeH="0">
-            <a:ln>
-              <a:noFill/>
-            </a:ln>
-            <a:solidFill>
-              <a:srgbClr val="000000"/>
-            </a:solidFill>
-            <a:effectLst/>
-            <a:uFillTx/>
-          </a:defRPr>
-        </a:lvl3pPr>
-        <a:lvl4pPr marL="0" marR="0" indent="0" algn="l" defTabSz="914400" rtl="0" fontAlgn="auto" latinLnBrk="1" hangingPunct="0">
-          <a:lnSpc>
-            <a:spcPct val="100000"/>
-          </a:lnSpc>
-          <a:spcBef>
-            <a:spcPts val="0"/>
-          </a:spcBef>
-          <a:spcAft>
-            <a:spcPts val="0"/>
-          </a:spcAft>
-          <a:buClrTx/>
-          <a:buSzTx/>
-          <a:buFontTx/>
-          <a:buNone/>
-          <a:tabLst/>
-          <a:defRPr b="0" baseline="0" cap="none" i="0" spc="0" strike="noStrike" sz="1800" u="none" kumimoji="0" normalizeH="0">
-            <a:ln>
-              <a:noFill/>
-            </a:ln>
-            <a:solidFill>
-              <a:srgbClr val="000000"/>
-            </a:solidFill>
-            <a:effectLst/>
-            <a:uFillTx/>
-          </a:defRPr>
-        </a:lvl4pPr>
-        <a:lvl5pPr marL="0" marR="0" indent="0" algn="l" defTabSz="914400" rtl="0" fontAlgn="auto" latinLnBrk="1" hangingPunct="0">
-          <a:lnSpc>
-            <a:spcPct val="100000"/>
-          </a:lnSpc>
-          <a:spcBef>
-            <a:spcPts val="0"/>
-          </a:spcBef>
-          <a:spcAft>
-            <a:spcPts val="0"/>
-          </a:spcAft>
-          <a:buClrTx/>
-          <a:buSzTx/>
-          <a:buFontTx/>
-          <a:buNone/>
-          <a:tabLst/>
-          <a:defRPr b="0" baseline="0" cap="none" i="0" spc="0" strike="noStrike" sz="1800" u="none" kumimoji="0" normalizeH="0">
-            <a:ln>
-              <a:noFill/>
-            </a:ln>
-            <a:solidFill>
-              <a:srgbClr val="000000"/>
-            </a:solidFill>
-            <a:effectLst/>
-            <a:uFillTx/>
-          </a:defRPr>
-        </a:lvl5pPr>
-        <a:lvl6pPr marL="0" marR="0" indent="0" algn="l" defTabSz="914400" rtl="0" fontAlgn="auto" latinLnBrk="1" hangingPunct="0">
-          <a:lnSpc>
-            <a:spcPct val="100000"/>
-          </a:lnSpc>
-          <a:spcBef>
-            <a:spcPts val="0"/>
-          </a:spcBef>
-          <a:spcAft>
-            <a:spcPts val="0"/>
-          </a:spcAft>
-          <a:buClrTx/>
-          <a:buSzTx/>
-          <a:buFontTx/>
-          <a:buNone/>
-          <a:tabLst/>
-          <a:defRPr b="0" baseline="0" cap="none" i="0" spc="0" strike="noStrike" sz="1800" u="none" kumimoji="0" normalizeH="0">
-            <a:ln>
-              <a:noFill/>
-            </a:ln>
-            <a:solidFill>
-              <a:srgbClr val="000000"/>
-            </a:solidFill>
-            <a:effectLst/>
-            <a:uFillTx/>
-          </a:defRPr>
-        </a:lvl6pPr>
-        <a:lvl7pPr marL="0" marR="0" indent="0" algn="l" defTabSz="914400" rtl="0" fontAlgn="auto" latinLnBrk="1" hangingPunct="0">
-          <a:lnSpc>
-            <a:spcPct val="100000"/>
-          </a:lnSpc>
-          <a:spcBef>
-            <a:spcPts val="0"/>
-          </a:spcBef>
-          <a:spcAft>
-            <a:spcPts val="0"/>
-          </a:spcAft>
-          <a:buClrTx/>
-          <a:buSzTx/>
-          <a:buFontTx/>
-          <a:buNone/>
-          <a:tabLst/>
-          <a:defRPr b="0" baseline="0" cap="none" i="0" spc="0" strike="noStrike" sz="1800" u="none" kumimoji="0" normalizeH="0">
-            <a:ln>
-              <a:noFill/>
-            </a:ln>
-            <a:solidFill>
-              <a:srgbClr val="000000"/>
-            </a:solidFill>
-            <a:effectLst/>
-            <a:uFillTx/>
-          </a:defRPr>
-        </a:lvl7pPr>
-        <a:lvl8pPr marL="0" marR="0" indent="0" algn="l" defTabSz="914400" rtl="0" fontAlgn="auto" latinLnBrk="1" hangingPunct="0">
-          <a:lnSpc>
-            <a:spcPct val="100000"/>
-          </a:lnSpc>
-          <a:spcBef>
-            <a:spcPts val="0"/>
-          </a:spcBef>
-          <a:spcAft>
-            <a:spcPts val="0"/>
-          </a:spcAft>
-          <a:buClrTx/>
-          <a:buSzTx/>
-          <a:buFontTx/>
-          <a:buNone/>
-          <a:tabLst/>
-          <a:defRPr b="0" baseline="0" cap="none" i="0" spc="0" strike="noStrike" sz="1800" u="none" kumimoji="0" normalizeH="0">
-            <a:ln>
-              <a:noFill/>
-            </a:ln>
-            <a:solidFill>
-              <a:srgbClr val="000000"/>
-            </a:solidFill>
-            <a:effectLst/>
-            <a:uFillTx/>
-          </a:defRPr>
-        </a:lvl8pPr>
-        <a:lvl9pPr marL="0" marR="0" indent="0" algn="l" defTabSz="914400" rtl="0" fontAlgn="auto" latinLnBrk="1" hangingPunct="0">
-          <a:lnSpc>
-            <a:spcPct val="100000"/>
-          </a:lnSpc>
-          <a:spcBef>
-            <a:spcPts val="0"/>
-          </a:spcBef>
-          <a:spcAft>
-            <a:spcPts val="0"/>
-          </a:spcAft>
-          <a:buClrTx/>
-          <a:buSzTx/>
-          <a:buFontTx/>
-          <a:buNone/>
-          <a:tabLst/>
-          <a:defRPr b="0" baseline="0" cap="none" i="0" spc="0" strike="noStrike" sz="1800" u="none" kumimoji="0" normalizeH="0">
-            <a:ln>
-              <a:noFill/>
-            </a:ln>
-            <a:solidFill>
-              <a:srgbClr val="000000"/>
-            </a:solidFill>
-            <a:effectLst/>
-            <a:uFillTx/>
-          </a:defRPr>
-        </a:lvl9pPr>
-      </a:lstStyle>
+      <a:bodyPr/>
+      <a:lstStyle/>
       <a:style>
         <a:lnRef idx="0"/>
         <a:fillRef idx="0"/>
@@ -4161,284 +3916,19 @@
       </a:style>
     </a:lnDef>
     <a:txDef>
-      <a:spPr>
+      <a:spPr bwMode="auto">
+        <a:prstGeom prst="rect">
+          <a:avLst/>
+        </a:prstGeom>
         <a:noFill/>
         <a:ln w="12700" cap="flat">
           <a:noFill/>
           <a:miter lim="400000"/>
         </a:ln>
         <a:effectLst/>
-        <a:sp3d/>
       </a:spPr>
-      <a:bodyPr rot="0" spcFirstLastPara="1" vertOverflow="overflow" horzOverflow="overflow" vert="horz" wrap="square" lIns="50800" tIns="50800" rIns="50800" bIns="50800" numCol="1" spcCol="38100" rtlCol="0" anchor="ctr" upright="0">
-        <a:spAutoFit/>
-      </a:bodyPr>
-      <a:lstStyle>
-        <a:defPPr marL="0" marR="0" indent="0" algn="l" defTabSz="825500" rtl="0" fontAlgn="auto" latinLnBrk="0" hangingPunct="0">
-          <a:lnSpc>
-            <a:spcPct val="100000"/>
-          </a:lnSpc>
-          <a:spcBef>
-            <a:spcPts val="5900"/>
-          </a:spcBef>
-          <a:spcAft>
-            <a:spcPts val="0"/>
-          </a:spcAft>
-          <a:buClrTx/>
-          <a:buSzTx/>
-          <a:buFontTx/>
-          <a:buNone/>
-          <a:tabLst/>
-          <a:defRPr b="0" baseline="0" cap="none" i="0" spc="0" strike="noStrike" sz="4800" u="none" kumimoji="0" normalizeH="0">
-            <a:ln>
-              <a:noFill/>
-            </a:ln>
-            <a:solidFill>
-              <a:srgbClr val="FFFFFF"/>
-            </a:solidFill>
-            <a:effectLst/>
-            <a:uFillTx/>
-            <a:latin typeface="Helvetica Neue"/>
-            <a:ea typeface="Helvetica Neue"/>
-            <a:cs typeface="Helvetica Neue"/>
-            <a:sym typeface="Helvetica Neue"/>
-          </a:defRPr>
-        </a:defPPr>
-        <a:lvl1pPr marL="0" marR="0" indent="0" algn="l" defTabSz="914400" rtl="0" fontAlgn="auto" latinLnBrk="1" hangingPunct="0">
-          <a:lnSpc>
-            <a:spcPct val="100000"/>
-          </a:lnSpc>
-          <a:spcBef>
-            <a:spcPts val="0"/>
-          </a:spcBef>
-          <a:spcAft>
-            <a:spcPts val="0"/>
-          </a:spcAft>
-          <a:buClrTx/>
-          <a:buSzTx/>
-          <a:buFontTx/>
-          <a:buNone/>
-          <a:tabLst/>
-          <a:defRPr b="0" baseline="0" cap="none" i="0" spc="0" strike="noStrike" sz="1800" u="none" kumimoji="0" normalizeH="0">
-            <a:ln>
-              <a:noFill/>
-            </a:ln>
-            <a:solidFill>
-              <a:srgbClr val="000000"/>
-            </a:solidFill>
-            <a:effectLst/>
-            <a:uFillTx/>
-          </a:defRPr>
-        </a:lvl1pPr>
-        <a:lvl2pPr marL="0" marR="0" indent="0" algn="l" defTabSz="914400" rtl="0" fontAlgn="auto" latinLnBrk="1" hangingPunct="0">
-          <a:lnSpc>
-            <a:spcPct val="100000"/>
-          </a:lnSpc>
-          <a:spcBef>
-            <a:spcPts val="0"/>
-          </a:spcBef>
-          <a:spcAft>
-            <a:spcPts val="0"/>
-          </a:spcAft>
-          <a:buClrTx/>
-          <a:buSzTx/>
-          <a:buFontTx/>
-          <a:buNone/>
-          <a:tabLst/>
-          <a:defRPr b="0" baseline="0" cap="none" i="0" spc="0" strike="noStrike" sz="1800" u="none" kumimoji="0" normalizeH="0">
-            <a:ln>
-              <a:noFill/>
-            </a:ln>
-            <a:solidFill>
-              <a:srgbClr val="000000"/>
-            </a:solidFill>
-            <a:effectLst/>
-            <a:uFillTx/>
-          </a:defRPr>
-        </a:lvl2pPr>
-        <a:lvl3pPr marL="0" marR="0" indent="0" algn="l" defTabSz="914400" rtl="0" fontAlgn="auto" latinLnBrk="1" hangingPunct="0">
-          <a:lnSpc>
-            <a:spcPct val="100000"/>
-          </a:lnSpc>
-          <a:spcBef>
-            <a:spcPts val="0"/>
-          </a:spcBef>
-          <a:spcAft>
-            <a:spcPts val="0"/>
-          </a:spcAft>
-          <a:buClrTx/>
-          <a:buSzTx/>
-          <a:buFontTx/>
-          <a:buNone/>
-          <a:tabLst/>
-          <a:defRPr b="0" baseline="0" cap="none" i="0" spc="0" strike="noStrike" sz="1800" u="none" kumimoji="0" normalizeH="0">
-            <a:ln>
-              <a:noFill/>
-            </a:ln>
-            <a:solidFill>
-              <a:srgbClr val="000000"/>
-            </a:solidFill>
-            <a:effectLst/>
-            <a:uFillTx/>
-          </a:defRPr>
-        </a:lvl3pPr>
-        <a:lvl4pPr marL="0" marR="0" indent="0" algn="l" defTabSz="914400" rtl="0" fontAlgn="auto" latinLnBrk="1" hangingPunct="0">
-          <a:lnSpc>
-            <a:spcPct val="100000"/>
-          </a:lnSpc>
-          <a:spcBef>
-            <a:spcPts val="0"/>
-          </a:spcBef>
-          <a:spcAft>
-            <a:spcPts val="0"/>
-          </a:spcAft>
-          <a:buClrTx/>
-          <a:buSzTx/>
-          <a:buFontTx/>
-          <a:buNone/>
-          <a:tabLst/>
-          <a:defRPr b="0" baseline="0" cap="none" i="0" spc="0" strike="noStrike" sz="1800" u="none" kumimoji="0" normalizeH="0">
-            <a:ln>
-              <a:noFill/>
-            </a:ln>
-            <a:solidFill>
-              <a:srgbClr val="000000"/>
-            </a:solidFill>
-            <a:effectLst/>
-            <a:uFillTx/>
-          </a:defRPr>
-        </a:lvl4pPr>
-        <a:lvl5pPr marL="0" marR="0" indent="0" algn="l" defTabSz="914400" rtl="0" fontAlgn="auto" latinLnBrk="1" hangingPunct="0">
-          <a:lnSpc>
-            <a:spcPct val="100000"/>
-          </a:lnSpc>
-          <a:spcBef>
-            <a:spcPts val="0"/>
-          </a:spcBef>
-          <a:spcAft>
-            <a:spcPts val="0"/>
-          </a:spcAft>
-          <a:buClrTx/>
-          <a:buSzTx/>
-          <a:buFontTx/>
-          <a:buNone/>
-          <a:tabLst/>
-          <a:defRPr b="0" baseline="0" cap="none" i="0" spc="0" strike="noStrike" sz="1800" u="none" kumimoji="0" normalizeH="0">
-            <a:ln>
-              <a:noFill/>
-            </a:ln>
-            <a:solidFill>
-              <a:srgbClr val="000000"/>
-            </a:solidFill>
-            <a:effectLst/>
-            <a:uFillTx/>
-          </a:defRPr>
-        </a:lvl5pPr>
-        <a:lvl6pPr marL="0" marR="0" indent="0" algn="l" defTabSz="914400" rtl="0" fontAlgn="auto" latinLnBrk="1" hangingPunct="0">
-          <a:lnSpc>
-            <a:spcPct val="100000"/>
-          </a:lnSpc>
-          <a:spcBef>
-            <a:spcPts val="0"/>
-          </a:spcBef>
-          <a:spcAft>
-            <a:spcPts val="0"/>
-          </a:spcAft>
-          <a:buClrTx/>
-          <a:buSzTx/>
-          <a:buFontTx/>
-          <a:buNone/>
-          <a:tabLst/>
-          <a:defRPr b="0" baseline="0" cap="none" i="0" spc="0" strike="noStrike" sz="1800" u="none" kumimoji="0" normalizeH="0">
-            <a:ln>
-              <a:noFill/>
-            </a:ln>
-            <a:solidFill>
-              <a:srgbClr val="000000"/>
-            </a:solidFill>
-            <a:effectLst/>
-            <a:uFillTx/>
-          </a:defRPr>
-        </a:lvl6pPr>
-        <a:lvl7pPr marL="0" marR="0" indent="0" algn="l" defTabSz="914400" rtl="0" fontAlgn="auto" latinLnBrk="1" hangingPunct="0">
-          <a:lnSpc>
-            <a:spcPct val="100000"/>
-          </a:lnSpc>
-          <a:spcBef>
-            <a:spcPts val="0"/>
-          </a:spcBef>
-          <a:spcAft>
-            <a:spcPts val="0"/>
-          </a:spcAft>
-          <a:buClrTx/>
-          <a:buSzTx/>
-          <a:buFontTx/>
-          <a:buNone/>
-          <a:tabLst/>
-          <a:defRPr b="0" baseline="0" cap="none" i="0" spc="0" strike="noStrike" sz="1800" u="none" kumimoji="0" normalizeH="0">
-            <a:ln>
-              <a:noFill/>
-            </a:ln>
-            <a:solidFill>
-              <a:srgbClr val="000000"/>
-            </a:solidFill>
-            <a:effectLst/>
-            <a:uFillTx/>
-          </a:defRPr>
-        </a:lvl7pPr>
-        <a:lvl8pPr marL="0" marR="0" indent="0" algn="l" defTabSz="914400" rtl="0" fontAlgn="auto" latinLnBrk="1" hangingPunct="0">
-          <a:lnSpc>
-            <a:spcPct val="100000"/>
-          </a:lnSpc>
-          <a:spcBef>
-            <a:spcPts val="0"/>
-          </a:spcBef>
-          <a:spcAft>
-            <a:spcPts val="0"/>
-          </a:spcAft>
-          <a:buClrTx/>
-          <a:buSzTx/>
-          <a:buFontTx/>
-          <a:buNone/>
-          <a:tabLst/>
-          <a:defRPr b="0" baseline="0" cap="none" i="0" spc="0" strike="noStrike" sz="1800" u="none" kumimoji="0" normalizeH="0">
-            <a:ln>
-              <a:noFill/>
-            </a:ln>
-            <a:solidFill>
-              <a:srgbClr val="000000"/>
-            </a:solidFill>
-            <a:effectLst/>
-            <a:uFillTx/>
-          </a:defRPr>
-        </a:lvl8pPr>
-        <a:lvl9pPr marL="0" marR="0" indent="0" algn="l" defTabSz="914400" rtl="0" fontAlgn="auto" latinLnBrk="1" hangingPunct="0">
-          <a:lnSpc>
-            <a:spcPct val="100000"/>
-          </a:lnSpc>
-          <a:spcBef>
-            <a:spcPts val="0"/>
-          </a:spcBef>
-          <a:spcAft>
-            <a:spcPts val="0"/>
-          </a:spcAft>
-          <a:buClrTx/>
-          <a:buSzTx/>
-          <a:buFontTx/>
-          <a:buNone/>
-          <a:tabLst/>
-          <a:defRPr b="0" baseline="0" cap="none" i="0" spc="0" strike="noStrike" sz="1800" u="none" kumimoji="0" normalizeH="0">
-            <a:ln>
-              <a:noFill/>
-            </a:ln>
-            <a:solidFill>
-              <a:srgbClr val="000000"/>
-            </a:solidFill>
-            <a:effectLst/>
-            <a:uFillTx/>
-          </a:defRPr>
-        </a:lvl9pPr>
-      </a:lstStyle>
+      <a:bodyPr/>
+      <a:lstStyle/>
       <a:style>
         <a:lnRef idx="0"/>
         <a:fillRef idx="0"/>
@@ -4451,7 +3941,7 @@
 </file>
 
 <file path=ppt/theme/theme2.xml><?xml version="1.0" encoding="utf-8"?>
-<a:theme xmlns:a="http://schemas.openxmlformats.org/drawingml/2006/main" xmlns:r="http://schemas.openxmlformats.org/officeDocument/2006/relationships" name="Black">
+<a:theme xmlns:a="http://schemas.openxmlformats.org/drawingml/2006/main" xmlns:r="http://schemas.openxmlformats.org/officeDocument/2006/relationships" xmlns:p="http://schemas.openxmlformats.org/presentationml/2006/main" name="Black">
   <a:themeElements>
     <a:clrScheme name="Black">
       <a:dk1>
@@ -4508,7 +3998,7 @@
         <a:solidFill>
           <a:schemeClr val="phClr"/>
         </a:solidFill>
-        <a:gradFill rotWithShape="1">
+        <a:gradFill>
           <a:gsLst>
             <a:gs pos="0">
               <a:schemeClr val="phClr">
@@ -4531,7 +4021,7 @@
           </a:gsLst>
           <a:lin ang="16200000" scaled="1"/>
         </a:gradFill>
-        <a:gradFill rotWithShape="1">
+        <a:gradFill>
           <a:gsLst>
             <a:gs pos="0">
               <a:schemeClr val="phClr">
@@ -4589,7 +4079,7 @@
         <a:solidFill>
           <a:schemeClr val="phClr"/>
         </a:solidFill>
-        <a:gradFill rotWithShape="1">
+        <a:gradFill>
           <a:gsLst>
             <a:gs pos="0">
               <a:schemeClr val="phClr">
@@ -4611,11 +4101,9 @@
               </a:schemeClr>
             </a:gs>
           </a:gsLst>
-          <a:path path="circle">
-            <a:fillToRect l="50000" t="-80000" r="50000" b="180000"/>
-          </a:path>
+          <a:path path="circle"/>
         </a:gradFill>
-        <a:gradFill rotWithShape="1">
+        <a:gradFill>
           <a:gsLst>
             <a:gs pos="0">
               <a:schemeClr val="phClr">
@@ -4630,16 +4118,17 @@
               </a:schemeClr>
             </a:gs>
           </a:gsLst>
-          <a:path path="circle">
-            <a:fillToRect l="50000" t="50000" r="50000" b="50000"/>
-          </a:path>
+          <a:path path="circle"/>
         </a:gradFill>
       </a:bgFillStyleLst>
     </a:fmtScheme>
   </a:themeElements>
   <a:objectDefaults>
     <a:spDef>
-      <a:spPr>
+      <a:spPr bwMode="auto">
+        <a:prstGeom prst="rect">
+          <a:avLst/>
+        </a:prstGeom>
         <a:solidFill>
           <a:schemeClr val="accent1">
             <a:lumOff val="13529"/>
@@ -4650,277 +4139,9 @@
           <a:miter lim="400000"/>
         </a:ln>
         <a:effectLst/>
-        <a:sp3d/>
       </a:spPr>
-      <a:bodyPr rot="0" spcFirstLastPara="1" vertOverflow="overflow" horzOverflow="overflow" vert="horz" wrap="square" lIns="50800" tIns="50800" rIns="50800" bIns="50800" numCol="1" spcCol="38100" rtlCol="0" anchor="ctr" upright="0">
-        <a:spAutoFit/>
-      </a:bodyPr>
-      <a:lstStyle>
-        <a:defPPr marL="0" marR="0" indent="0" algn="ctr" defTabSz="825500" rtl="0" fontAlgn="auto" latinLnBrk="0" hangingPunct="0">
-          <a:lnSpc>
-            <a:spcPct val="100000"/>
-          </a:lnSpc>
-          <a:spcBef>
-            <a:spcPts val="0"/>
-          </a:spcBef>
-          <a:spcAft>
-            <a:spcPts val="0"/>
-          </a:spcAft>
-          <a:buClrTx/>
-          <a:buSzTx/>
-          <a:buFontTx/>
-          <a:buNone/>
-          <a:tabLst/>
-          <a:defRPr b="0" baseline="0" cap="none" i="0" spc="0" strike="noStrike" sz="3200" u="none" kumimoji="0" normalizeH="0">
-            <a:ln>
-              <a:noFill/>
-            </a:ln>
-            <a:solidFill>
-              <a:srgbClr val="FFFFFF"/>
-            </a:solidFill>
-            <a:effectLst/>
-            <a:uFillTx/>
-            <a:latin typeface="+mn-lt"/>
-            <a:ea typeface="+mn-ea"/>
-            <a:cs typeface="+mn-cs"/>
-            <a:sym typeface="Helvetica Neue Medium"/>
-          </a:defRPr>
-        </a:defPPr>
-        <a:lvl1pPr marL="0" marR="0" indent="0" algn="l" defTabSz="914400" rtl="0" fontAlgn="auto" latinLnBrk="1" hangingPunct="0">
-          <a:lnSpc>
-            <a:spcPct val="100000"/>
-          </a:lnSpc>
-          <a:spcBef>
-            <a:spcPts val="0"/>
-          </a:spcBef>
-          <a:spcAft>
-            <a:spcPts val="0"/>
-          </a:spcAft>
-          <a:buClrTx/>
-          <a:buSzTx/>
-          <a:buFontTx/>
-          <a:buNone/>
-          <a:tabLst/>
-          <a:defRPr b="0" baseline="0" cap="none" i="0" spc="0" strike="noStrike" sz="1800" u="none" kumimoji="0" normalizeH="0">
-            <a:ln>
-              <a:noFill/>
-            </a:ln>
-            <a:solidFill>
-              <a:srgbClr val="000000"/>
-            </a:solidFill>
-            <a:effectLst/>
-            <a:uFillTx/>
-          </a:defRPr>
-        </a:lvl1pPr>
-        <a:lvl2pPr marL="0" marR="0" indent="0" algn="l" defTabSz="914400" rtl="0" fontAlgn="auto" latinLnBrk="1" hangingPunct="0">
-          <a:lnSpc>
-            <a:spcPct val="100000"/>
-          </a:lnSpc>
-          <a:spcBef>
-            <a:spcPts val="0"/>
-          </a:spcBef>
-          <a:spcAft>
-            <a:spcPts val="0"/>
-          </a:spcAft>
-          <a:buClrTx/>
-          <a:buSzTx/>
-          <a:buFontTx/>
-          <a:buNone/>
-          <a:tabLst/>
-          <a:defRPr b="0" baseline="0" cap="none" i="0" spc="0" strike="noStrike" sz="1800" u="none" kumimoji="0" normalizeH="0">
-            <a:ln>
-              <a:noFill/>
-            </a:ln>
-            <a:solidFill>
-              <a:srgbClr val="000000"/>
-            </a:solidFill>
-            <a:effectLst/>
-            <a:uFillTx/>
-          </a:defRPr>
-        </a:lvl2pPr>
-        <a:lvl3pPr marL="0" marR="0" indent="0" algn="l" defTabSz="914400" rtl="0" fontAlgn="auto" latinLnBrk="1" hangingPunct="0">
-          <a:lnSpc>
-            <a:spcPct val="100000"/>
-          </a:lnSpc>
-          <a:spcBef>
-            <a:spcPts val="0"/>
-          </a:spcBef>
-          <a:spcAft>
-            <a:spcPts val="0"/>
-          </a:spcAft>
-          <a:buClrTx/>
-          <a:buSzTx/>
-          <a:buFontTx/>
-          <a:buNone/>
-          <a:tabLst/>
-          <a:defRPr b="0" baseline="0" cap="none" i="0" spc="0" strike="noStrike" sz="1800" u="none" kumimoji="0" normalizeH="0">
-            <a:ln>
-              <a:noFill/>
-            </a:ln>
-            <a:solidFill>
-              <a:srgbClr val="000000"/>
-            </a:solidFill>
-            <a:effectLst/>
-            <a:uFillTx/>
-          </a:defRPr>
-        </a:lvl3pPr>
-        <a:lvl4pPr marL="0" marR="0" indent="0" algn="l" defTabSz="914400" rtl="0" fontAlgn="auto" latinLnBrk="1" hangingPunct="0">
-          <a:lnSpc>
-            <a:spcPct val="100000"/>
-          </a:lnSpc>
-          <a:spcBef>
-            <a:spcPts val="0"/>
-          </a:spcBef>
-          <a:spcAft>
-            <a:spcPts val="0"/>
-          </a:spcAft>
-          <a:buClrTx/>
-          <a:buSzTx/>
-          <a:buFontTx/>
-          <a:buNone/>
-          <a:tabLst/>
-          <a:defRPr b="0" baseline="0" cap="none" i="0" spc="0" strike="noStrike" sz="1800" u="none" kumimoji="0" normalizeH="0">
-            <a:ln>
-              <a:noFill/>
-            </a:ln>
-            <a:solidFill>
-              <a:srgbClr val="000000"/>
-            </a:solidFill>
-            <a:effectLst/>
-            <a:uFillTx/>
-          </a:defRPr>
-        </a:lvl4pPr>
-        <a:lvl5pPr marL="0" marR="0" indent="0" algn="l" defTabSz="914400" rtl="0" fontAlgn="auto" latinLnBrk="1" hangingPunct="0">
-          <a:lnSpc>
-            <a:spcPct val="100000"/>
-          </a:lnSpc>
-          <a:spcBef>
-            <a:spcPts val="0"/>
-          </a:spcBef>
-          <a:spcAft>
-            <a:spcPts val="0"/>
-          </a:spcAft>
-          <a:buClrTx/>
-          <a:buSzTx/>
-          <a:buFontTx/>
-          <a:buNone/>
-          <a:tabLst/>
-          <a:defRPr b="0" baseline="0" cap="none" i="0" spc="0" strike="noStrike" sz="1800" u="none" kumimoji="0" normalizeH="0">
-            <a:ln>
-              <a:noFill/>
-            </a:ln>
-            <a:solidFill>
-              <a:srgbClr val="000000"/>
-            </a:solidFill>
-            <a:effectLst/>
-            <a:uFillTx/>
-          </a:defRPr>
-        </a:lvl5pPr>
-        <a:lvl6pPr marL="0" marR="0" indent="0" algn="l" defTabSz="914400" rtl="0" fontAlgn="auto" latinLnBrk="1" hangingPunct="0">
-          <a:lnSpc>
-            <a:spcPct val="100000"/>
-          </a:lnSpc>
-          <a:spcBef>
-            <a:spcPts val="0"/>
-          </a:spcBef>
-          <a:spcAft>
-            <a:spcPts val="0"/>
-          </a:spcAft>
-          <a:buClrTx/>
-          <a:buSzTx/>
-          <a:buFontTx/>
-          <a:buNone/>
-          <a:tabLst/>
-          <a:defRPr b="0" baseline="0" cap="none" i="0" spc="0" strike="noStrike" sz="1800" u="none" kumimoji="0" normalizeH="0">
-            <a:ln>
-              <a:noFill/>
-            </a:ln>
-            <a:solidFill>
-              <a:srgbClr val="000000"/>
-            </a:solidFill>
-            <a:effectLst/>
-            <a:uFillTx/>
-          </a:defRPr>
-        </a:lvl6pPr>
-        <a:lvl7pPr marL="0" marR="0" indent="0" algn="l" defTabSz="914400" rtl="0" fontAlgn="auto" latinLnBrk="1" hangingPunct="0">
-          <a:lnSpc>
-            <a:spcPct val="100000"/>
-          </a:lnSpc>
-          <a:spcBef>
-            <a:spcPts val="0"/>
-          </a:spcBef>
-          <a:spcAft>
-            <a:spcPts val="0"/>
-          </a:spcAft>
-          <a:buClrTx/>
-          <a:buSzTx/>
-          <a:buFontTx/>
-          <a:buNone/>
-          <a:tabLst/>
-          <a:defRPr b="0" baseline="0" cap="none" i="0" spc="0" strike="noStrike" sz="1800" u="none" kumimoji="0" normalizeH="0">
-            <a:ln>
-              <a:noFill/>
-            </a:ln>
-            <a:solidFill>
-              <a:srgbClr val="000000"/>
-            </a:solidFill>
-            <a:effectLst/>
-            <a:uFillTx/>
-          </a:defRPr>
-        </a:lvl7pPr>
-        <a:lvl8pPr marL="0" marR="0" indent="0" algn="l" defTabSz="914400" rtl="0" fontAlgn="auto" latinLnBrk="1" hangingPunct="0">
-          <a:lnSpc>
-            <a:spcPct val="100000"/>
-          </a:lnSpc>
-          <a:spcBef>
-            <a:spcPts val="0"/>
-          </a:spcBef>
-          <a:spcAft>
-            <a:spcPts val="0"/>
-          </a:spcAft>
-          <a:buClrTx/>
-          <a:buSzTx/>
-          <a:buFontTx/>
-          <a:buNone/>
-          <a:tabLst/>
-          <a:defRPr b="0" baseline="0" cap="none" i="0" spc="0" strike="noStrike" sz="1800" u="none" kumimoji="0" normalizeH="0">
-            <a:ln>
-              <a:noFill/>
-            </a:ln>
-            <a:solidFill>
-              <a:srgbClr val="000000"/>
-            </a:solidFill>
-            <a:effectLst/>
-            <a:uFillTx/>
-          </a:defRPr>
-        </a:lvl8pPr>
-        <a:lvl9pPr marL="0" marR="0" indent="0" algn="l" defTabSz="914400" rtl="0" fontAlgn="auto" latinLnBrk="1" hangingPunct="0">
-          <a:lnSpc>
-            <a:spcPct val="100000"/>
-          </a:lnSpc>
-          <a:spcBef>
-            <a:spcPts val="0"/>
-          </a:spcBef>
-          <a:spcAft>
-            <a:spcPts val="0"/>
-          </a:spcAft>
-          <a:buClrTx/>
-          <a:buSzTx/>
-          <a:buFontTx/>
-          <a:buNone/>
-          <a:tabLst/>
-          <a:defRPr b="0" baseline="0" cap="none" i="0" spc="0" strike="noStrike" sz="1800" u="none" kumimoji="0" normalizeH="0">
-            <a:ln>
-              <a:noFill/>
-            </a:ln>
-            <a:solidFill>
-              <a:srgbClr val="000000"/>
-            </a:solidFill>
-            <a:effectLst/>
-            <a:uFillTx/>
-          </a:defRPr>
-        </a:lvl9pPr>
-      </a:lstStyle>
+      <a:bodyPr/>
+      <a:lstStyle/>
       <a:style>
         <a:lnRef idx="0"/>
         <a:fillRef idx="0"/>
@@ -4929,7 +4150,10 @@
       </a:style>
     </a:spDef>
     <a:lnDef>
-      <a:spPr>
+      <a:spPr bwMode="auto">
+        <a:prstGeom prst="rect">
+          <a:avLst/>
+        </a:prstGeom>
         <a:noFill/>
         <a:ln w="25400" cap="flat">
           <a:solidFill>
@@ -4939,273 +4163,9 @@
           <a:miter lim="400000"/>
         </a:ln>
         <a:effectLst/>
-        <a:sp3d/>
       </a:spPr>
-      <a:bodyPr rot="0" spcFirstLastPara="1" vertOverflow="overflow" horzOverflow="overflow" vert="horz" wrap="square" lIns="91439" tIns="45719" rIns="91439" bIns="45719" numCol="1" spcCol="38100" rtlCol="0" anchor="t" upright="0">
-        <a:noAutofit/>
-      </a:bodyPr>
-      <a:lstStyle>
-        <a:defPPr marL="0" marR="0" indent="0" algn="l" defTabSz="914400" rtl="0" fontAlgn="auto" latinLnBrk="1" hangingPunct="0">
-          <a:lnSpc>
-            <a:spcPct val="100000"/>
-          </a:lnSpc>
-          <a:spcBef>
-            <a:spcPts val="0"/>
-          </a:spcBef>
-          <a:spcAft>
-            <a:spcPts val="0"/>
-          </a:spcAft>
-          <a:buClrTx/>
-          <a:buSzTx/>
-          <a:buFontTx/>
-          <a:buNone/>
-          <a:tabLst/>
-          <a:defRPr b="0" baseline="0" cap="none" i="0" spc="0" strike="noStrike" sz="1800" u="none" kumimoji="0" normalizeH="0">
-            <a:ln>
-              <a:noFill/>
-            </a:ln>
-            <a:solidFill>
-              <a:srgbClr val="000000"/>
-            </a:solidFill>
-            <a:effectLst/>
-            <a:uFillTx/>
-          </a:defRPr>
-        </a:defPPr>
-        <a:lvl1pPr marL="0" marR="0" indent="0" algn="l" defTabSz="914400" rtl="0" fontAlgn="auto" latinLnBrk="1" hangingPunct="0">
-          <a:lnSpc>
-            <a:spcPct val="100000"/>
-          </a:lnSpc>
-          <a:spcBef>
-            <a:spcPts val="0"/>
-          </a:spcBef>
-          <a:spcAft>
-            <a:spcPts val="0"/>
-          </a:spcAft>
-          <a:buClrTx/>
-          <a:buSzTx/>
-          <a:buFontTx/>
-          <a:buNone/>
-          <a:tabLst/>
-          <a:defRPr b="0" baseline="0" cap="none" i="0" spc="0" strike="noStrike" sz="1800" u="none" kumimoji="0" normalizeH="0">
-            <a:ln>
-              <a:noFill/>
-            </a:ln>
-            <a:solidFill>
-              <a:srgbClr val="000000"/>
-            </a:solidFill>
-            <a:effectLst/>
-            <a:uFillTx/>
-          </a:defRPr>
-        </a:lvl1pPr>
-        <a:lvl2pPr marL="0" marR="0" indent="0" algn="l" defTabSz="914400" rtl="0" fontAlgn="auto" latinLnBrk="1" hangingPunct="0">
-          <a:lnSpc>
-            <a:spcPct val="100000"/>
-          </a:lnSpc>
-          <a:spcBef>
-            <a:spcPts val="0"/>
-          </a:spcBef>
-          <a:spcAft>
-            <a:spcPts val="0"/>
-          </a:spcAft>
-          <a:buClrTx/>
-          <a:buSzTx/>
-          <a:buFontTx/>
-          <a:buNone/>
-          <a:tabLst/>
-          <a:defRPr b="0" baseline="0" cap="none" i="0" spc="0" strike="noStrike" sz="1800" u="none" kumimoji="0" normalizeH="0">
-            <a:ln>
-              <a:noFill/>
-            </a:ln>
-            <a:solidFill>
-              <a:srgbClr val="000000"/>
-            </a:solidFill>
-            <a:effectLst/>
-            <a:uFillTx/>
-          </a:defRPr>
-        </a:lvl2pPr>
-        <a:lvl3pPr marL="0" marR="0" indent="0" algn="l" defTabSz="914400" rtl="0" fontAlgn="auto" latinLnBrk="1" hangingPunct="0">
-          <a:lnSpc>
-            <a:spcPct val="100000"/>
-          </a:lnSpc>
-          <a:spcBef>
-            <a:spcPts val="0"/>
-          </a:spcBef>
-          <a:spcAft>
-            <a:spcPts val="0"/>
-          </a:spcAft>
-          <a:buClrTx/>
-          <a:buSzTx/>
-          <a:buFontTx/>
-          <a:buNone/>
-          <a:tabLst/>
-          <a:defRPr b="0" baseline="0" cap="none" i="0" spc="0" strike="noStrike" sz="1800" u="none" kumimoji="0" normalizeH="0">
-            <a:ln>
-              <a:noFill/>
-            </a:ln>
-            <a:solidFill>
-              <a:srgbClr val="000000"/>
-            </a:solidFill>
-            <a:effectLst/>
-            <a:uFillTx/>
-          </a:defRPr>
-        </a:lvl3pPr>
-        <a:lvl4pPr marL="0" marR="0" indent="0" algn="l" defTabSz="914400" rtl="0" fontAlgn="auto" latinLnBrk="1" hangingPunct="0">
-          <a:lnSpc>
-            <a:spcPct val="100000"/>
-          </a:lnSpc>
-          <a:spcBef>
-            <a:spcPts val="0"/>
-          </a:spcBef>
-          <a:spcAft>
-            <a:spcPts val="0"/>
-          </a:spcAft>
-          <a:buClrTx/>
-          <a:buSzTx/>
-          <a:buFontTx/>
-          <a:buNone/>
-          <a:tabLst/>
-          <a:defRPr b="0" baseline="0" cap="none" i="0" spc="0" strike="noStrike" sz="1800" u="none" kumimoji="0" normalizeH="0">
-            <a:ln>
-              <a:noFill/>
-            </a:ln>
-            <a:solidFill>
-              <a:srgbClr val="000000"/>
-            </a:solidFill>
-            <a:effectLst/>
-            <a:uFillTx/>
-          </a:defRPr>
-        </a:lvl4pPr>
-        <a:lvl5pPr marL="0" marR="0" indent="0" algn="l" defTabSz="914400" rtl="0" fontAlgn="auto" latinLnBrk="1" hangingPunct="0">
-          <a:lnSpc>
-            <a:spcPct val="100000"/>
-          </a:lnSpc>
-          <a:spcBef>
-            <a:spcPts val="0"/>
-          </a:spcBef>
-          <a:spcAft>
-            <a:spcPts val="0"/>
-          </a:spcAft>
-          <a:buClrTx/>
-          <a:buSzTx/>
-          <a:buFontTx/>
-          <a:buNone/>
-          <a:tabLst/>
-          <a:defRPr b="0" baseline="0" cap="none" i="0" spc="0" strike="noStrike" sz="1800" u="none" kumimoji="0" normalizeH="0">
-            <a:ln>
-              <a:noFill/>
-            </a:ln>
-            <a:solidFill>
-              <a:srgbClr val="000000"/>
-            </a:solidFill>
-            <a:effectLst/>
-            <a:uFillTx/>
-          </a:defRPr>
-        </a:lvl5pPr>
-        <a:lvl6pPr marL="0" marR="0" indent="0" algn="l" defTabSz="914400" rtl="0" fontAlgn="auto" latinLnBrk="1" hangingPunct="0">
-          <a:lnSpc>
-            <a:spcPct val="100000"/>
-          </a:lnSpc>
-          <a:spcBef>
-            <a:spcPts val="0"/>
-          </a:spcBef>
-          <a:spcAft>
-            <a:spcPts val="0"/>
-          </a:spcAft>
-          <a:buClrTx/>
-          <a:buSzTx/>
-          <a:buFontTx/>
-          <a:buNone/>
-          <a:tabLst/>
-          <a:defRPr b="0" baseline="0" cap="none" i="0" spc="0" strike="noStrike" sz="1800" u="none" kumimoji="0" normalizeH="0">
-            <a:ln>
-              <a:noFill/>
-            </a:ln>
-            <a:solidFill>
-              <a:srgbClr val="000000"/>
-            </a:solidFill>
-            <a:effectLst/>
-            <a:uFillTx/>
-          </a:defRPr>
-        </a:lvl6pPr>
-        <a:lvl7pPr marL="0" marR="0" indent="0" algn="l" defTabSz="914400" rtl="0" fontAlgn="auto" latinLnBrk="1" hangingPunct="0">
-          <a:lnSpc>
-            <a:spcPct val="100000"/>
-          </a:lnSpc>
-          <a:spcBef>
-            <a:spcPts val="0"/>
-          </a:spcBef>
-          <a:spcAft>
-            <a:spcPts val="0"/>
-          </a:spcAft>
-          <a:buClrTx/>
-          <a:buSzTx/>
-          <a:buFontTx/>
-          <a:buNone/>
-          <a:tabLst/>
-          <a:defRPr b="0" baseline="0" cap="none" i="0" spc="0" strike="noStrike" sz="1800" u="none" kumimoji="0" normalizeH="0">
-            <a:ln>
-              <a:noFill/>
-            </a:ln>
-            <a:solidFill>
-              <a:srgbClr val="000000"/>
-            </a:solidFill>
-            <a:effectLst/>
-            <a:uFillTx/>
-          </a:defRPr>
-        </a:lvl7pPr>
-        <a:lvl8pPr marL="0" marR="0" indent="0" algn="l" defTabSz="914400" rtl="0" fontAlgn="auto" latinLnBrk="1" hangingPunct="0">
-          <a:lnSpc>
-            <a:spcPct val="100000"/>
-          </a:lnSpc>
-          <a:spcBef>
-            <a:spcPts val="0"/>
-          </a:spcBef>
-          <a:spcAft>
-            <a:spcPts val="0"/>
-          </a:spcAft>
-          <a:buClrTx/>
-          <a:buSzTx/>
-          <a:buFontTx/>
-          <a:buNone/>
-          <a:tabLst/>
-          <a:defRPr b="0" baseline="0" cap="none" i="0" spc="0" strike="noStrike" sz="1800" u="none" kumimoji="0" normalizeH="0">
-            <a:ln>
-              <a:noFill/>
-            </a:ln>
-            <a:solidFill>
-              <a:srgbClr val="000000"/>
-            </a:solidFill>
-            <a:effectLst/>
-            <a:uFillTx/>
-          </a:defRPr>
-        </a:lvl8pPr>
-        <a:lvl9pPr marL="0" marR="0" indent="0" algn="l" defTabSz="914400" rtl="0" fontAlgn="auto" latinLnBrk="1" hangingPunct="0">
-          <a:lnSpc>
-            <a:spcPct val="100000"/>
-          </a:lnSpc>
-          <a:spcBef>
-            <a:spcPts val="0"/>
-          </a:spcBef>
-          <a:spcAft>
-            <a:spcPts val="0"/>
-          </a:spcAft>
-          <a:buClrTx/>
-          <a:buSzTx/>
-          <a:buFontTx/>
-          <a:buNone/>
-          <a:tabLst/>
-          <a:defRPr b="0" baseline="0" cap="none" i="0" spc="0" strike="noStrike" sz="1800" u="none" kumimoji="0" normalizeH="0">
-            <a:ln>
-              <a:noFill/>
-            </a:ln>
-            <a:solidFill>
-              <a:srgbClr val="000000"/>
-            </a:solidFill>
-            <a:effectLst/>
-            <a:uFillTx/>
-          </a:defRPr>
-        </a:lvl9pPr>
-      </a:lstStyle>
+      <a:bodyPr/>
+      <a:lstStyle/>
       <a:style>
         <a:lnRef idx="0"/>
         <a:fillRef idx="0"/>
@@ -5214,284 +4174,19 @@
       </a:style>
     </a:lnDef>
     <a:txDef>
-      <a:spPr>
+      <a:spPr bwMode="auto">
+        <a:prstGeom prst="rect">
+          <a:avLst/>
+        </a:prstGeom>
         <a:noFill/>
         <a:ln w="12700" cap="flat">
           <a:noFill/>
           <a:miter lim="400000"/>
         </a:ln>
         <a:effectLst/>
-        <a:sp3d/>
       </a:spPr>
-      <a:bodyPr rot="0" spcFirstLastPara="1" vertOverflow="overflow" horzOverflow="overflow" vert="horz" wrap="square" lIns="50800" tIns="50800" rIns="50800" bIns="50800" numCol="1" spcCol="38100" rtlCol="0" anchor="ctr" upright="0">
-        <a:spAutoFit/>
-      </a:bodyPr>
-      <a:lstStyle>
-        <a:defPPr marL="0" marR="0" indent="0" algn="l" defTabSz="825500" rtl="0" fontAlgn="auto" latinLnBrk="0" hangingPunct="0">
-          <a:lnSpc>
-            <a:spcPct val="100000"/>
-          </a:lnSpc>
-          <a:spcBef>
-            <a:spcPts val="5900"/>
-          </a:spcBef>
-          <a:spcAft>
-            <a:spcPts val="0"/>
-          </a:spcAft>
-          <a:buClrTx/>
-          <a:buSzTx/>
-          <a:buFontTx/>
-          <a:buNone/>
-          <a:tabLst/>
-          <a:defRPr b="0" baseline="0" cap="none" i="0" spc="0" strike="noStrike" sz="4800" u="none" kumimoji="0" normalizeH="0">
-            <a:ln>
-              <a:noFill/>
-            </a:ln>
-            <a:solidFill>
-              <a:srgbClr val="FFFFFF"/>
-            </a:solidFill>
-            <a:effectLst/>
-            <a:uFillTx/>
-            <a:latin typeface="Helvetica Neue"/>
-            <a:ea typeface="Helvetica Neue"/>
-            <a:cs typeface="Helvetica Neue"/>
-            <a:sym typeface="Helvetica Neue"/>
-          </a:defRPr>
-        </a:defPPr>
-        <a:lvl1pPr marL="0" marR="0" indent="0" algn="l" defTabSz="914400" rtl="0" fontAlgn="auto" latinLnBrk="1" hangingPunct="0">
-          <a:lnSpc>
-            <a:spcPct val="100000"/>
-          </a:lnSpc>
-          <a:spcBef>
-            <a:spcPts val="0"/>
-          </a:spcBef>
-          <a:spcAft>
-            <a:spcPts val="0"/>
-          </a:spcAft>
-          <a:buClrTx/>
-          <a:buSzTx/>
-          <a:buFontTx/>
-          <a:buNone/>
-          <a:tabLst/>
-          <a:defRPr b="0" baseline="0" cap="none" i="0" spc="0" strike="noStrike" sz="1800" u="none" kumimoji="0" normalizeH="0">
-            <a:ln>
-              <a:noFill/>
-            </a:ln>
-            <a:solidFill>
-              <a:srgbClr val="000000"/>
-            </a:solidFill>
-            <a:effectLst/>
-            <a:uFillTx/>
-          </a:defRPr>
-        </a:lvl1pPr>
-        <a:lvl2pPr marL="0" marR="0" indent="0" algn="l" defTabSz="914400" rtl="0" fontAlgn="auto" latinLnBrk="1" hangingPunct="0">
-          <a:lnSpc>
-            <a:spcPct val="100000"/>
-          </a:lnSpc>
-          <a:spcBef>
-            <a:spcPts val="0"/>
-          </a:spcBef>
-          <a:spcAft>
-            <a:spcPts val="0"/>
-          </a:spcAft>
-          <a:buClrTx/>
-          <a:buSzTx/>
-          <a:buFontTx/>
-          <a:buNone/>
-          <a:tabLst/>
-          <a:defRPr b="0" baseline="0" cap="none" i="0" spc="0" strike="noStrike" sz="1800" u="none" kumimoji="0" normalizeH="0">
-            <a:ln>
-              <a:noFill/>
-            </a:ln>
-            <a:solidFill>
-              <a:srgbClr val="000000"/>
-            </a:solidFill>
-            <a:effectLst/>
-            <a:uFillTx/>
-          </a:defRPr>
-        </a:lvl2pPr>
-        <a:lvl3pPr marL="0" marR="0" indent="0" algn="l" defTabSz="914400" rtl="0" fontAlgn="auto" latinLnBrk="1" hangingPunct="0">
-          <a:lnSpc>
-            <a:spcPct val="100000"/>
-          </a:lnSpc>
-          <a:spcBef>
-            <a:spcPts val="0"/>
-          </a:spcBef>
-          <a:spcAft>
-            <a:spcPts val="0"/>
-          </a:spcAft>
-          <a:buClrTx/>
-          <a:buSzTx/>
-          <a:buFontTx/>
-          <a:buNone/>
-          <a:tabLst/>
-          <a:defRPr b="0" baseline="0" cap="none" i="0" spc="0" strike="noStrike" sz="1800" u="none" kumimoji="0" normalizeH="0">
-            <a:ln>
-              <a:noFill/>
-            </a:ln>
-            <a:solidFill>
-              <a:srgbClr val="000000"/>
-            </a:solidFill>
-            <a:effectLst/>
-            <a:uFillTx/>
-          </a:defRPr>
-        </a:lvl3pPr>
-        <a:lvl4pPr marL="0" marR="0" indent="0" algn="l" defTabSz="914400" rtl="0" fontAlgn="auto" latinLnBrk="1" hangingPunct="0">
-          <a:lnSpc>
-            <a:spcPct val="100000"/>
-          </a:lnSpc>
-          <a:spcBef>
-            <a:spcPts val="0"/>
-          </a:spcBef>
-          <a:spcAft>
-            <a:spcPts val="0"/>
-          </a:spcAft>
-          <a:buClrTx/>
-          <a:buSzTx/>
-          <a:buFontTx/>
-          <a:buNone/>
-          <a:tabLst/>
-          <a:defRPr b="0" baseline="0" cap="none" i="0" spc="0" strike="noStrike" sz="1800" u="none" kumimoji="0" normalizeH="0">
-            <a:ln>
-              <a:noFill/>
-            </a:ln>
-            <a:solidFill>
-              <a:srgbClr val="000000"/>
-            </a:solidFill>
-            <a:effectLst/>
-            <a:uFillTx/>
-          </a:defRPr>
-        </a:lvl4pPr>
-        <a:lvl5pPr marL="0" marR="0" indent="0" algn="l" defTabSz="914400" rtl="0" fontAlgn="auto" latinLnBrk="1" hangingPunct="0">
-          <a:lnSpc>
-            <a:spcPct val="100000"/>
-          </a:lnSpc>
-          <a:spcBef>
-            <a:spcPts val="0"/>
-          </a:spcBef>
-          <a:spcAft>
-            <a:spcPts val="0"/>
-          </a:spcAft>
-          <a:buClrTx/>
-          <a:buSzTx/>
-          <a:buFontTx/>
-          <a:buNone/>
-          <a:tabLst/>
-          <a:defRPr b="0" baseline="0" cap="none" i="0" spc="0" strike="noStrike" sz="1800" u="none" kumimoji="0" normalizeH="0">
-            <a:ln>
-              <a:noFill/>
-            </a:ln>
-            <a:solidFill>
-              <a:srgbClr val="000000"/>
-            </a:solidFill>
-            <a:effectLst/>
-            <a:uFillTx/>
-          </a:defRPr>
-        </a:lvl5pPr>
-        <a:lvl6pPr marL="0" marR="0" indent="0" algn="l" defTabSz="914400" rtl="0" fontAlgn="auto" latinLnBrk="1" hangingPunct="0">
-          <a:lnSpc>
-            <a:spcPct val="100000"/>
-          </a:lnSpc>
-          <a:spcBef>
-            <a:spcPts val="0"/>
-          </a:spcBef>
-          <a:spcAft>
-            <a:spcPts val="0"/>
-          </a:spcAft>
-          <a:buClrTx/>
-          <a:buSzTx/>
-          <a:buFontTx/>
-          <a:buNone/>
-          <a:tabLst/>
-          <a:defRPr b="0" baseline="0" cap="none" i="0" spc="0" strike="noStrike" sz="1800" u="none" kumimoji="0" normalizeH="0">
-            <a:ln>
-              <a:noFill/>
-            </a:ln>
-            <a:solidFill>
-              <a:srgbClr val="000000"/>
-            </a:solidFill>
-            <a:effectLst/>
-            <a:uFillTx/>
-          </a:defRPr>
-        </a:lvl6pPr>
-        <a:lvl7pPr marL="0" marR="0" indent="0" algn="l" defTabSz="914400" rtl="0" fontAlgn="auto" latinLnBrk="1" hangingPunct="0">
-          <a:lnSpc>
-            <a:spcPct val="100000"/>
-          </a:lnSpc>
-          <a:spcBef>
-            <a:spcPts val="0"/>
-          </a:spcBef>
-          <a:spcAft>
-            <a:spcPts val="0"/>
-          </a:spcAft>
-          <a:buClrTx/>
-          <a:buSzTx/>
-          <a:buFontTx/>
-          <a:buNone/>
-          <a:tabLst/>
-          <a:defRPr b="0" baseline="0" cap="none" i="0" spc="0" strike="noStrike" sz="1800" u="none" kumimoji="0" normalizeH="0">
-            <a:ln>
-              <a:noFill/>
-            </a:ln>
-            <a:solidFill>
-              <a:srgbClr val="000000"/>
-            </a:solidFill>
-            <a:effectLst/>
-            <a:uFillTx/>
-          </a:defRPr>
-        </a:lvl7pPr>
-        <a:lvl8pPr marL="0" marR="0" indent="0" algn="l" defTabSz="914400" rtl="0" fontAlgn="auto" latinLnBrk="1" hangingPunct="0">
-          <a:lnSpc>
-            <a:spcPct val="100000"/>
-          </a:lnSpc>
-          <a:spcBef>
-            <a:spcPts val="0"/>
-          </a:spcBef>
-          <a:spcAft>
-            <a:spcPts val="0"/>
-          </a:spcAft>
-          <a:buClrTx/>
-          <a:buSzTx/>
-          <a:buFontTx/>
-          <a:buNone/>
-          <a:tabLst/>
-          <a:defRPr b="0" baseline="0" cap="none" i="0" spc="0" strike="noStrike" sz="1800" u="none" kumimoji="0" normalizeH="0">
-            <a:ln>
-              <a:noFill/>
-            </a:ln>
-            <a:solidFill>
-              <a:srgbClr val="000000"/>
-            </a:solidFill>
-            <a:effectLst/>
-            <a:uFillTx/>
-          </a:defRPr>
-        </a:lvl8pPr>
-        <a:lvl9pPr marL="0" marR="0" indent="0" algn="l" defTabSz="914400" rtl="0" fontAlgn="auto" latinLnBrk="1" hangingPunct="0">
-          <a:lnSpc>
-            <a:spcPct val="100000"/>
-          </a:lnSpc>
-          <a:spcBef>
-            <a:spcPts val="0"/>
-          </a:spcBef>
-          <a:spcAft>
-            <a:spcPts val="0"/>
-          </a:spcAft>
-          <a:buClrTx/>
-          <a:buSzTx/>
-          <a:buFontTx/>
-          <a:buNone/>
-          <a:tabLst/>
-          <a:defRPr b="0" baseline="0" cap="none" i="0" spc="0" strike="noStrike" sz="1800" u="none" kumimoji="0" normalizeH="0">
-            <a:ln>
-              <a:noFill/>
-            </a:ln>
-            <a:solidFill>
-              <a:srgbClr val="000000"/>
-            </a:solidFill>
-            <a:effectLst/>
-            <a:uFillTx/>
-          </a:defRPr>
-        </a:lvl9pPr>
-      </a:lstStyle>
+      <a:bodyPr/>
+      <a:lstStyle/>
       <a:style>
         <a:lnRef idx="0"/>
         <a:fillRef idx="0"/>

--- a/sample-files/sample.pptx
+++ b/sample-files/sample.pptx
@@ -3682,6 +3682,289 @@
 </p:sld>
 </file>
 
+<file path=ppt/theme/theme0.xml><?xml version="1.0" encoding="utf-8"?>
+<a:theme xmlns:a="http://schemas.openxmlformats.org/drawingml/2006/main" name="Office Theme">
+  <a:themeElements>
+    <a:clrScheme name="">
+      <a:dk1>
+        <a:srgbClr val="000000"/>
+      </a:dk1>
+      <a:lt1>
+        <a:srgbClr val="FFFFFF"/>
+      </a:lt1>
+      <a:dk2>
+        <a:srgbClr val="000000"/>
+      </a:dk2>
+      <a:lt2>
+        <a:srgbClr val="808080"/>
+      </a:lt2>
+      <a:accent1>
+        <a:srgbClr val="BBE0E3"/>
+      </a:accent1>
+      <a:accent2>
+        <a:srgbClr val="333399"/>
+      </a:accent2>
+      <a:accent3>
+        <a:srgbClr val="FFFFFF"/>
+      </a:accent3>
+      <a:accent4>
+        <a:srgbClr val="000000"/>
+      </a:accent4>
+      <a:accent5>
+        <a:srgbClr val="DAEDEF"/>
+      </a:accent5>
+      <a:accent6>
+        <a:srgbClr val="2D2D8A"/>
+      </a:accent6>
+      <a:hlink>
+        <a:srgbClr val="009999"/>
+      </a:hlink>
+      <a:folHlink>
+        <a:srgbClr val="99CC00"/>
+      </a:folHlink>
+    </a:clrScheme>
+    <a:fontScheme name="Office">
+      <a:majorFont>
+        <a:latin typeface="Calibri"/>
+        <a:ea typeface=""/>
+        <a:cs typeface=""/>
+        <a:font script="Jpan" typeface="ＭＳ Ｐゴシック"/>
+        <a:font script="Hang" typeface="맑은 고딕"/>
+        <a:font script="Hans" typeface="宋体"/>
+        <a:font script="Hant" typeface="新細明體"/>
+        <a:font script="Arab" typeface="Times New Roman"/>
+        <a:font script="Hebr" typeface="Times New Roman"/>
+        <a:font script="Thai" typeface="Angsana New"/>
+        <a:font script="Ethi" typeface="Nyala"/>
+        <a:font script="Beng" typeface="Vrinda"/>
+        <a:font script="Gujr" typeface="Shruti"/>
+        <a:font script="Khmr" typeface="MoolBoran"/>
+        <a:font script="Knda" typeface="Tunga"/>
+        <a:font script="Guru" typeface="Raavi"/>
+        <a:font script="Cans" typeface="Euphemia"/>
+        <a:font script="Cher" typeface="Plantagenet Cherokee"/>
+        <a:font script="Yiii" typeface="Microsoft Yi Baiti"/>
+        <a:font script="Tibt" typeface="Microsoft Himalaya"/>
+        <a:font script="Thaa" typeface="MV Boli"/>
+        <a:font script="Deva" typeface="Mangal"/>
+        <a:font script="Telu" typeface="Gautami"/>
+        <a:font script="Taml" typeface="Latha"/>
+        <a:font script="Syrc" typeface="Estrangelo Edessa"/>
+        <a:font script="Orya" typeface="Kalinga"/>
+        <a:font script="Mlym" typeface="Kartika"/>
+        <a:font script="Laoo" typeface="DokChampa"/>
+        <a:font script="Sinh" typeface="Iskoola Pota"/>
+        <a:font script="Mong" typeface="Mongolian Baiti"/>
+        <a:font script="Viet" typeface="Times New Roman"/>
+        <a:font script="Uigh" typeface="Microsoft Uighur"/>
+      </a:majorFont>
+      <a:minorFont>
+        <a:latin typeface="Calibri"/>
+        <a:ea typeface=""/>
+        <a:cs typeface=""/>
+        <a:font script="Jpan" typeface="ＭＳ Ｐゴシック"/>
+        <a:font script="Hang" typeface="맑은 고딕"/>
+        <a:font script="Hans" typeface="宋体"/>
+        <a:font script="Hant" typeface="新細明體"/>
+        <a:font script="Arab" typeface="Arial"/>
+        <a:font script="Hebr" typeface="Arial"/>
+        <a:font script="Thai" typeface="Cordia New"/>
+        <a:font script="Ethi" typeface="Nyala"/>
+        <a:font script="Beng" typeface="Vrinda"/>
+        <a:font script="Gujr" typeface="Shruti"/>
+        <a:font script="Khmr" typeface="DaunPenh"/>
+        <a:font script="Knda" typeface="Tunga"/>
+        <a:font script="Guru" typeface="Raavi"/>
+        <a:font script="Cans" typeface="Euphemia"/>
+        <a:font script="Cher" typeface="Plantagenet Cherokee"/>
+        <a:font script="Yiii" typeface="Microsoft Yi Baiti"/>
+        <a:font script="Tibt" typeface="Microsoft Himalaya"/>
+        <a:font script="Thaa" typeface="MV Boli"/>
+        <a:font script="Deva" typeface="Mangal"/>
+        <a:font script="Telu" typeface="Gautami"/>
+        <a:font script="Taml" typeface="Latha"/>
+        <a:font script="Syrc" typeface="Estrangelo Edessa"/>
+        <a:font script="Orya" typeface="Kalinga"/>
+        <a:font script="Mlym" typeface="Kartika"/>
+        <a:font script="Laoo" typeface="DokChampa"/>
+        <a:font script="Sinh" typeface="Iskoola Pota"/>
+        <a:font script="Mong" typeface="Mongolian Baiti"/>
+        <a:font script="Viet" typeface="Arial"/>
+        <a:font script="Uigh" typeface="Microsoft Uighur"/>
+      </a:minorFont>
+    </a:fontScheme>
+    <a:fmtScheme name="Office">
+      <a:fillStyleLst>
+        <a:solidFill>
+          <a:schemeClr val="phClr"/>
+        </a:solidFill>
+        <a:gradFill rotWithShape="1">
+          <a:gsLst>
+            <a:gs pos="0">
+              <a:schemeClr val="phClr">
+                <a:tint val="50000"/>
+                <a:satMod val="300000"/>
+              </a:schemeClr>
+            </a:gs>
+            <a:gs pos="35000">
+              <a:schemeClr val="phClr">
+                <a:tint val="37000"/>
+                <a:satMod val="300000"/>
+              </a:schemeClr>
+            </a:gs>
+            <a:gs pos="100000">
+              <a:schemeClr val="phClr">
+                <a:tint val="15000"/>
+                <a:satMod val="350000"/>
+              </a:schemeClr>
+            </a:gs>
+          </a:gsLst>
+          <a:lin ang="16200000" scaled="1"/>
+        </a:gradFill>
+        <a:gradFill rotWithShape="1">
+          <a:gsLst>
+            <a:gs pos="0">
+              <a:schemeClr val="phClr">
+                <a:shade val="51000"/>
+                <a:satMod val="130000"/>
+              </a:schemeClr>
+            </a:gs>
+            <a:gs pos="80000">
+              <a:schemeClr val="phClr">
+                <a:shade val="93000"/>
+                <a:satMod val="130000"/>
+              </a:schemeClr>
+            </a:gs>
+            <a:gs pos="100000">
+              <a:schemeClr val="phClr">
+                <a:shade val="94000"/>
+                <a:satMod val="135000"/>
+              </a:schemeClr>
+            </a:gs>
+          </a:gsLst>
+          <a:lin ang="16200000" scaled="0"/>
+        </a:gradFill>
+      </a:fillStyleLst>
+      <a:lnStyleLst>
+        <a:ln w="9525" cap="flat" cmpd="sng" algn="ctr">
+          <a:solidFill>
+            <a:schemeClr val="phClr">
+              <a:shade val="95000"/>
+              <a:satMod val="105000"/>
+            </a:schemeClr>
+          </a:solidFill>
+          <a:prstDash val="solid"/>
+        </a:ln>
+        <a:ln w="25400" cap="flat" cmpd="sng" algn="ctr">
+          <a:solidFill>
+            <a:schemeClr val="phClr"/>
+          </a:solidFill>
+          <a:prstDash val="solid"/>
+        </a:ln>
+        <a:ln w="38100" cap="flat" cmpd="sng" algn="ctr">
+          <a:solidFill>
+            <a:schemeClr val="phClr"/>
+          </a:solidFill>
+          <a:prstDash val="solid"/>
+        </a:ln>
+      </a:lnStyleLst>
+      <a:effectStyleLst>
+        <a:effectStyle>
+          <a:effectLst>
+            <a:outerShdw blurRad="40000" dist="20000" dir="5400000" rotWithShape="0">
+              <a:srgbClr val="000000">
+                <a:alpha val="38000"/>
+              </a:srgbClr>
+            </a:outerShdw>
+          </a:effectLst>
+        </a:effectStyle>
+        <a:effectStyle>
+          <a:effectLst>
+            <a:outerShdw blurRad="40000" dist="23000" dir="5400000" rotWithShape="0">
+              <a:srgbClr val="000000">
+                <a:alpha val="35000"/>
+              </a:srgbClr>
+            </a:outerShdw>
+          </a:effectLst>
+        </a:effectStyle>
+        <a:effectStyle>
+          <a:effectLst>
+            <a:outerShdw blurRad="40000" dist="23000" dir="5400000" rotWithShape="0">
+              <a:srgbClr val="000000">
+                <a:alpha val="35000"/>
+              </a:srgbClr>
+            </a:outerShdw>
+          </a:effectLst>
+          <a:scene3d>
+            <a:camera prst="orthographicFront">
+              <a:rot lat="0" lon="0" rev="0"/>
+            </a:camera>
+            <a:lightRig rig="threePt" dir="t">
+              <a:rot lat="0" lon="0" rev="1200000"/>
+            </a:lightRig>
+          </a:scene3d>
+          <a:sp3d>
+            <a:bevelT w="63500" h="25400"/>
+          </a:sp3d>
+        </a:effectStyle>
+      </a:effectStyleLst>
+      <a:bgFillStyleLst>
+        <a:solidFill>
+          <a:schemeClr val="phClr"/>
+        </a:solidFill>
+        <a:gradFill rotWithShape="1">
+          <a:gsLst>
+            <a:gs pos="0">
+              <a:schemeClr val="phClr">
+                <a:tint val="40000"/>
+                <a:satMod val="350000"/>
+              </a:schemeClr>
+            </a:gs>
+            <a:gs pos="40000">
+              <a:schemeClr val="phClr">
+                <a:tint val="45000"/>
+                <a:shade val="99000"/>
+                <a:satMod val="350000"/>
+              </a:schemeClr>
+            </a:gs>
+            <a:gs pos="100000">
+              <a:schemeClr val="phClr">
+                <a:shade val="20000"/>
+                <a:satMod val="255000"/>
+              </a:schemeClr>
+            </a:gs>
+          </a:gsLst>
+          <a:path path="circle">
+            <a:fillToRect l="50000" t="-80000" r="50000" b="180000"/>
+          </a:path>
+        </a:gradFill>
+        <a:gradFill rotWithShape="1">
+          <a:gsLst>
+            <a:gs pos="0">
+              <a:schemeClr val="phClr">
+                <a:tint val="80000"/>
+                <a:satMod val="300000"/>
+              </a:schemeClr>
+            </a:gs>
+            <a:gs pos="100000">
+              <a:schemeClr val="phClr">
+                <a:shade val="30000"/>
+                <a:satMod val="200000"/>
+              </a:schemeClr>
+            </a:gs>
+          </a:gsLst>
+          <a:path path="circle">
+            <a:fillToRect l="50000" t="50000" r="50000" b="50000"/>
+          </a:path>
+        </a:gradFill>
+      </a:bgFillStyleLst>
+    </a:fmtScheme>
+  </a:themeElements>
+  <a:objectDefaults/>
+  <a:extraClrSchemeLst/>
+</a:theme>
+</file>
+
 <file path=ppt/theme/theme1.xml><?xml version="1.0" encoding="utf-8"?>
 <a:theme xmlns:a="http://schemas.openxmlformats.org/drawingml/2006/main" xmlns:r="http://schemas.openxmlformats.org/officeDocument/2006/relationships" xmlns:p="http://schemas.openxmlformats.org/presentationml/2006/main" name="Black">
   <a:themeElements>

--- a/sample-files/sample.pptx
+++ b/sample-files/sample.pptx
@@ -293,7 +293,7 @@
       </p:grpSpPr>
       <p:sp>
         <p:nvSpPr>
-          <p:cNvPr id="620583952" name="Shape 134"/>
+          <p:cNvPr id="1599814977" name="Shape 134"/>
           <p:cNvSpPr/>
           <p:nvPr>
             <p:ph type="sldImg"/>
@@ -321,7 +321,7 @@
       </p:sp>
       <p:sp>
         <p:nvSpPr>
-          <p:cNvPr id="490607779" name="Shape 135"/>
+          <p:cNvPr id="1961840337" name="Shape 135"/>
           <p:cNvSpPr/>
           <p:nvPr>
             <p:ph type="body" sz="quarter" idx="1"/>
@@ -464,7 +464,7 @@
       </p:grpSpPr>
       <p:sp>
         <p:nvSpPr>
-          <p:cNvPr id="2" name="Slide Image Placeholder 1"/>
+          <p:cNvPr id="1881737617" name="Slide Image Placeholder 1"/>
           <p:cNvSpPr>
             <a:spLocks noChangeAspect="1" noGrp="1" noRot="1"/>
           </p:cNvSpPr>
@@ -476,7 +476,7 @@
       </p:sp>
       <p:sp>
         <p:nvSpPr>
-          <p:cNvPr id="3" name="Notes Placeholder 2"/>
+          <p:cNvPr id="1992959472" name="Notes Placeholder 2"/>
           <p:cNvSpPr>
             <a:spLocks noGrp="1"/>
           </p:cNvSpPr>
@@ -498,7 +498,7 @@
       </p:sp>
       <p:sp>
         <p:nvSpPr>
-          <p:cNvPr id="4" name="Slide Number Placeholder 3"/>
+          <p:cNvPr id="1736322264" name="Slide Number Placeholder 3"/>
           <p:cNvSpPr>
             <a:spLocks noGrp="1"/>
           </p:cNvSpPr>
@@ -549,7 +549,7 @@
       </p:grpSpPr>
       <p:sp>
         <p:nvSpPr>
-          <p:cNvPr id="958986120" name="Title Text"/>
+          <p:cNvPr id="1232131813" name="Title Text"/>
           <p:cNvSpPr txBox="1"/>
           <p:nvPr>
             <p:ph type="title"/>
@@ -581,7 +581,7 @@
       </p:sp>
       <p:sp>
         <p:nvSpPr>
-          <p:cNvPr id="1718990709" name="Body Level One…"/>
+          <p:cNvPr id="2060001999" name="Body Level One…"/>
           <p:cNvSpPr txBox="1"/>
           <p:nvPr>
             <p:ph type="body" sz="quarter" idx="1"/>
@@ -704,7 +704,7 @@
       </p:sp>
       <p:sp>
         <p:nvSpPr>
-          <p:cNvPr id="1814026573" name="Slide Number"/>
+          <p:cNvPr id="1512158261" name="Slide Number"/>
           <p:cNvSpPr txBox="1"/>
           <p:nvPr>
             <p:ph type="sldNum" sz="quarter" idx="2"/>
@@ -757,7 +757,7 @@
       </p:grpSpPr>
       <p:sp>
         <p:nvSpPr>
-          <p:cNvPr id="215716306" name="Body Level One…"/>
+          <p:cNvPr id="1543843057" name="Body Level One…"/>
           <p:cNvSpPr txBox="1"/>
           <p:nvPr>
             <p:ph type="body" idx="1"/>
@@ -850,7 +850,7 @@
       </p:sp>
       <p:sp>
         <p:nvSpPr>
-          <p:cNvPr id="211545165" name="Slide Number"/>
+          <p:cNvPr id="710671666" name="Slide Number"/>
           <p:cNvSpPr txBox="1"/>
           <p:nvPr>
             <p:ph type="sldNum" sz="quarter" idx="2"/>
@@ -903,7 +903,7 @@
       </p:grpSpPr>
       <p:sp>
         <p:nvSpPr>
-          <p:cNvPr id="1469861949" name="Close-up of an orange flower surrounded by large tropical leaves"/>
+          <p:cNvPr id="842562090" name="Close-up of an orange flower surrounded by large tropical leaves"/>
           <p:cNvSpPr/>
           <p:nvPr>
             <p:ph type="pic" sz="quarter" idx="21"/>
@@ -933,7 +933,7 @@
       </p:sp>
       <p:sp>
         <p:nvSpPr>
-          <p:cNvPr id="1640187885" name="Close-up of a red-eyed tree frog perched on a leaf"/>
+          <p:cNvPr id="1504735642" name="Close-up of a red-eyed tree frog perched on a leaf"/>
           <p:cNvSpPr/>
           <p:nvPr>
             <p:ph type="pic" sz="quarter" idx="22"/>
@@ -963,7 +963,7 @@
       </p:sp>
       <p:sp>
         <p:nvSpPr>
-          <p:cNvPr id="951690275" name="River flowing through a tropical forest"/>
+          <p:cNvPr id="884666299" name="River flowing through a tropical forest"/>
           <p:cNvSpPr/>
           <p:nvPr>
             <p:ph type="pic" idx="23"/>
@@ -993,7 +993,7 @@
       </p:sp>
       <p:sp>
         <p:nvSpPr>
-          <p:cNvPr id="1112717383" name="Slide Number"/>
+          <p:cNvPr id="440783149" name="Slide Number"/>
           <p:cNvSpPr txBox="1"/>
           <p:nvPr>
             <p:ph type="sldNum" sz="quarter" idx="2"/>
@@ -1046,7 +1046,7 @@
       </p:grpSpPr>
       <p:sp>
         <p:nvSpPr>
-          <p:cNvPr id="313718528" name="–Johnny Appleseed"/>
+          <p:cNvPr id="910370104" name="–Johnny Appleseed"/>
           <p:cNvSpPr txBox="1"/>
           <p:nvPr>
             <p:ph type="body" sz="quarter" idx="21"/>
@@ -1091,7 +1091,7 @@
       </p:sp>
       <p:sp>
         <p:nvSpPr>
-          <p:cNvPr id="218511664" name="“Type a quote here.”"/>
+          <p:cNvPr id="1133822696" name="“Type a quote here.”"/>
           <p:cNvSpPr txBox="1"/>
           <p:nvPr>
             <p:ph type="body" sz="quarter" idx="22"/>
@@ -1140,7 +1140,7 @@
       </p:sp>
       <p:sp>
         <p:nvSpPr>
-          <p:cNvPr id="1230146830" name="Slide Number"/>
+          <p:cNvPr id="613970757" name="Slide Number"/>
           <p:cNvSpPr txBox="1"/>
           <p:nvPr>
             <p:ph type="sldNum" sz="quarter" idx="2"/>
@@ -1193,7 +1193,7 @@
       </p:grpSpPr>
       <p:sp>
         <p:nvSpPr>
-          <p:cNvPr id="1251693123" name="river flowing through a tropical forest"/>
+          <p:cNvPr id="1053540655" name="river flowing through a tropical forest"/>
           <p:cNvSpPr/>
           <p:nvPr>
             <p:ph type="pic" idx="21"/>
@@ -1223,7 +1223,7 @@
       </p:sp>
       <p:sp>
         <p:nvSpPr>
-          <p:cNvPr id="1349654308" name="Slide Number"/>
+          <p:cNvPr id="343010927" name="Slide Number"/>
           <p:cNvSpPr txBox="1"/>
           <p:nvPr>
             <p:ph type="sldNum" sz="quarter" idx="2"/>
@@ -1276,7 +1276,7 @@
       </p:grpSpPr>
       <p:sp>
         <p:nvSpPr>
-          <p:cNvPr id="1447115745" name="Slide Number"/>
+          <p:cNvPr id="1258523005" name="Slide Number"/>
           <p:cNvSpPr txBox="1"/>
           <p:nvPr>
             <p:ph type="sldNum" sz="quarter" idx="2"/>
@@ -1329,7 +1329,7 @@
       </p:grpSpPr>
       <p:sp>
         <p:nvSpPr>
-          <p:cNvPr id="1747468626" name="River flowing through a tropical forest"/>
+          <p:cNvPr id="394409174" name="River flowing through a tropical forest"/>
           <p:cNvSpPr/>
           <p:nvPr>
             <p:ph type="pic" idx="21"/>
@@ -1359,7 +1359,7 @@
       </p:sp>
       <p:sp>
         <p:nvSpPr>
-          <p:cNvPr id="821183091" name="Title Text"/>
+          <p:cNvPr id="4533537" name="Title Text"/>
           <p:cNvSpPr txBox="1"/>
           <p:nvPr>
             <p:ph type="title"/>
@@ -1391,7 +1391,7 @@
       </p:sp>
       <p:sp>
         <p:nvSpPr>
-          <p:cNvPr id="508744095" name="Body Level One…"/>
+          <p:cNvPr id="1801175522" name="Body Level One…"/>
           <p:cNvSpPr txBox="1"/>
           <p:nvPr>
             <p:ph type="body" sz="quarter" idx="1"/>
@@ -1514,7 +1514,7 @@
       </p:sp>
       <p:sp>
         <p:nvSpPr>
-          <p:cNvPr id="1528677633" name="Slide Number"/>
+          <p:cNvPr id="28460533" name="Slide Number"/>
           <p:cNvSpPr txBox="1"/>
           <p:nvPr>
             <p:ph type="sldNum" sz="quarter" idx="2"/>
@@ -1567,7 +1567,7 @@
       </p:grpSpPr>
       <p:sp>
         <p:nvSpPr>
-          <p:cNvPr id="1452750617" name="Title Text"/>
+          <p:cNvPr id="2137916603" name="Title Text"/>
           <p:cNvSpPr txBox="1"/>
           <p:nvPr>
             <p:ph type="title"/>
@@ -1599,7 +1599,7 @@
       </p:sp>
       <p:sp>
         <p:nvSpPr>
-          <p:cNvPr id="1753058353" name="Slide Number"/>
+          <p:cNvPr id="2059238008" name="Slide Number"/>
           <p:cNvSpPr txBox="1"/>
           <p:nvPr>
             <p:ph type="sldNum" sz="quarter" idx="2"/>
@@ -1652,7 +1652,7 @@
       </p:grpSpPr>
       <p:sp>
         <p:nvSpPr>
-          <p:cNvPr id="1415054560" name="Close-up of an orange flower surrounded by large tropical leaves"/>
+          <p:cNvPr id="1653995056" name="Close-up of an orange flower surrounded by large tropical leaves"/>
           <p:cNvSpPr/>
           <p:nvPr>
             <p:ph type="pic" idx="21"/>
@@ -1682,7 +1682,7 @@
       </p:sp>
       <p:sp>
         <p:nvSpPr>
-          <p:cNvPr id="1733009731" name="Title Text"/>
+          <p:cNvPr id="1053904246" name="Title Text"/>
           <p:cNvSpPr txBox="1"/>
           <p:nvPr>
             <p:ph type="title"/>
@@ -1718,7 +1718,7 @@
       </p:sp>
       <p:sp>
         <p:nvSpPr>
-          <p:cNvPr id="1386951147" name="Body Level One…"/>
+          <p:cNvPr id="84072699" name="Body Level One…"/>
           <p:cNvSpPr txBox="1"/>
           <p:nvPr>
             <p:ph type="body" sz="quarter" idx="1"/>
@@ -1841,7 +1841,7 @@
       </p:sp>
       <p:sp>
         <p:nvSpPr>
-          <p:cNvPr id="1415861216" name="Slide Number"/>
+          <p:cNvPr id="262215894" name="Slide Number"/>
           <p:cNvSpPr txBox="1"/>
           <p:nvPr>
             <p:ph type="sldNum" sz="quarter" idx="2"/>
@@ -1894,7 +1894,7 @@
       </p:grpSpPr>
       <p:sp>
         <p:nvSpPr>
-          <p:cNvPr id="923551078" name="Title Text"/>
+          <p:cNvPr id="369018583" name="Title Text"/>
           <p:cNvSpPr txBox="1"/>
           <p:nvPr>
             <p:ph type="title"/>
@@ -1922,7 +1922,7 @@
       </p:sp>
       <p:sp>
         <p:nvSpPr>
-          <p:cNvPr id="1816153035" name="Slide Number"/>
+          <p:cNvPr id="1229397826" name="Slide Number"/>
           <p:cNvSpPr txBox="1"/>
           <p:nvPr>
             <p:ph type="sldNum" sz="quarter" idx="2"/>
@@ -1975,7 +1975,7 @@
       </p:grpSpPr>
       <p:sp>
         <p:nvSpPr>
-          <p:cNvPr id="1648667203" name="Title Text"/>
+          <p:cNvPr id="2024912123" name="Title Text"/>
           <p:cNvSpPr txBox="1"/>
           <p:nvPr>
             <p:ph type="title"/>
@@ -2003,7 +2003,7 @@
       </p:sp>
       <p:sp>
         <p:nvSpPr>
-          <p:cNvPr id="1152746493" name="Body Level One…"/>
+          <p:cNvPr id="2067172308" name="Body Level One…"/>
           <p:cNvSpPr txBox="1"/>
           <p:nvPr>
             <p:ph type="body" idx="1"/>
@@ -2092,7 +2092,7 @@
       </p:sp>
       <p:sp>
         <p:nvSpPr>
-          <p:cNvPr id="795061034" name="Slide Number"/>
+          <p:cNvPr id="1006908168" name="Slide Number"/>
           <p:cNvSpPr txBox="1"/>
           <p:nvPr>
             <p:ph type="sldNum" sz="quarter" idx="2"/>
@@ -2145,7 +2145,7 @@
       </p:grpSpPr>
       <p:sp>
         <p:nvSpPr>
-          <p:cNvPr id="1531402662" name="Close-up of a red-eyed tree frog perched on a leaf"/>
+          <p:cNvPr id="317796159" name="Close-up of a red-eyed tree frog perched on a leaf"/>
           <p:cNvSpPr/>
           <p:nvPr>
             <p:ph type="pic" sz="half" idx="21"/>
@@ -2175,7 +2175,7 @@
       </p:sp>
       <p:sp>
         <p:nvSpPr>
-          <p:cNvPr id="91459855" name="Title Text"/>
+          <p:cNvPr id="1593834194" name="Title Text"/>
           <p:cNvSpPr txBox="1"/>
           <p:nvPr>
             <p:ph type="title"/>
@@ -2203,7 +2203,7 @@
       </p:sp>
       <p:sp>
         <p:nvSpPr>
-          <p:cNvPr id="1935781153" name="Body Level One…"/>
+          <p:cNvPr id="507921764" name="Body Level One…"/>
           <p:cNvSpPr txBox="1"/>
           <p:nvPr>
             <p:ph type="body" sz="half" idx="1"/>
@@ -2316,7 +2316,7 @@
       </p:sp>
       <p:sp>
         <p:nvSpPr>
-          <p:cNvPr id="1039098071" name="Slide Number"/>
+          <p:cNvPr id="834635244" name="Slide Number"/>
           <p:cNvSpPr txBox="1"/>
           <p:nvPr>
             <p:ph type="sldNum" sz="quarter" idx="2"/>
@@ -2369,7 +2369,7 @@
       </p:grpSpPr>
       <p:sp>
         <p:nvSpPr>
-          <p:cNvPr id="1109842687" name="Title Text"/>
+          <p:cNvPr id="164188852" name="Title Text"/>
           <p:cNvSpPr txBox="1"/>
           <p:nvPr>
             <p:ph type="title"/>
@@ -2397,7 +2397,7 @@
       </p:sp>
       <p:sp>
         <p:nvSpPr>
-          <p:cNvPr id="943152248" name="Body Level One…"/>
+          <p:cNvPr id="1517639646" name="Body Level One…"/>
           <p:cNvSpPr txBox="1"/>
           <p:nvPr>
             <p:ph type="body" sz="half" idx="1"/>
@@ -2510,7 +2510,7 @@
       </p:sp>
       <p:sp>
         <p:nvSpPr>
-          <p:cNvPr id="163739041" name="Slide Number"/>
+          <p:cNvPr id="776665343" name="Slide Number"/>
           <p:cNvSpPr txBox="1"/>
           <p:nvPr>
             <p:ph type="sldNum" sz="quarter" idx="2"/>
@@ -2563,7 +2563,7 @@
       </p:grpSpPr>
       <p:sp>
         <p:nvSpPr>
-          <p:cNvPr id="1824773800" name="Title Text"/>
+          <p:cNvPr id="1147088599" name="Title Text"/>
           <p:cNvSpPr txBox="1"/>
           <p:nvPr>
             <p:ph type="title"/>
@@ -2591,7 +2591,7 @@
       </p:sp>
       <p:sp>
         <p:nvSpPr>
-          <p:cNvPr id="1839135980" name="Body Level One…"/>
+          <p:cNvPr id="1980641827" name="Body Level One…"/>
           <p:cNvSpPr txBox="1"/>
           <p:nvPr>
             <p:ph type="body" sz="half" idx="1"/>
@@ -2704,7 +2704,7 @@
       </p:sp>
       <p:sp>
         <p:nvSpPr>
-          <p:cNvPr id="1361005062" name="Slide Number"/>
+          <p:cNvPr id="403513412" name="Slide Number"/>
           <p:cNvSpPr txBox="1"/>
           <p:nvPr>
             <p:ph type="sldNum" sz="quarter" idx="2"/>
@@ -2764,7 +2764,7 @@
       </p:grpSpPr>
       <p:sp>
         <p:nvSpPr>
-          <p:cNvPr id="130732852" name="Title Text"/>
+          <p:cNvPr id="1978627024" name="Title Text"/>
           <p:cNvSpPr txBox="1"/>
           <p:nvPr>
             <p:ph type="title"/>
@@ -2801,7 +2801,7 @@
       </p:sp>
       <p:sp>
         <p:nvSpPr>
-          <p:cNvPr id="1132041117" name="Body Level One…"/>
+          <p:cNvPr id="1387130379" name="Body Level One…"/>
           <p:cNvSpPr txBox="1"/>
           <p:nvPr>
             <p:ph type="body" idx="1"/>
@@ -2878,7 +2878,7 @@
       </p:sp>
       <p:sp>
         <p:nvSpPr>
-          <p:cNvPr id="1005232112" name="Slide Number"/>
+          <p:cNvPr id="1409529237" name="Slide Number"/>
           <p:cNvSpPr txBox="1"/>
           <p:nvPr>
             <p:ph type="sldNum" sz="quarter" idx="2"/>
@@ -3612,7 +3612,7 @@
       </p:grpSpPr>
       <p:sp>
         <p:nvSpPr>
-          <p:cNvPr id="20963923" name="My Presentation"/>
+          <p:cNvPr id="317537720" name="My Presentation"/>
           <p:cNvSpPr txBox="1"/>
           <p:nvPr>
             <p:ph type="ctrTitle"/>
@@ -3640,7 +3640,7 @@
       </p:sp>
       <p:sp>
         <p:nvSpPr>
-          <p:cNvPr id="1583487635" name="Muhammad Zeeshan"/>
+          <p:cNvPr id="2134756337" name="Muhammad Zeeshan"/>
           <p:cNvSpPr txBox="1"/>
           <p:nvPr>
             <p:ph type="subTitle" sz="quarter" idx="1"/>

--- a/sample-files/sample.pptx
+++ b/sample-files/sample.pptx
@@ -293,7 +293,7 @@
       </p:grpSpPr>
       <p:sp>
         <p:nvSpPr>
-          <p:cNvPr id="1599814977" name="Shape 134"/>
+          <p:cNvPr id="647219105" name="Shape 134"/>
           <p:cNvSpPr/>
           <p:nvPr>
             <p:ph type="sldImg"/>
@@ -321,7 +321,7 @@
       </p:sp>
       <p:sp>
         <p:nvSpPr>
-          <p:cNvPr id="1961840337" name="Shape 135"/>
+          <p:cNvPr id="418715547" name="Shape 135"/>
           <p:cNvSpPr/>
           <p:nvPr>
             <p:ph type="body" sz="quarter" idx="1"/>
@@ -464,7 +464,7 @@
       </p:grpSpPr>
       <p:sp>
         <p:nvSpPr>
-          <p:cNvPr id="1881737617" name="Slide Image Placeholder 1"/>
+          <p:cNvPr id="1365327404" name="Slide Image Placeholder 1"/>
           <p:cNvSpPr>
             <a:spLocks noChangeAspect="1" noGrp="1" noRot="1"/>
           </p:cNvSpPr>
@@ -476,7 +476,7 @@
       </p:sp>
       <p:sp>
         <p:nvSpPr>
-          <p:cNvPr id="1992959472" name="Notes Placeholder 2"/>
+          <p:cNvPr id="1723958378" name="Notes Placeholder 2"/>
           <p:cNvSpPr>
             <a:spLocks noGrp="1"/>
           </p:cNvSpPr>
@@ -498,7 +498,7 @@
       </p:sp>
       <p:sp>
         <p:nvSpPr>
-          <p:cNvPr id="1736322264" name="Slide Number Placeholder 3"/>
+          <p:cNvPr id="1492075266" name="Slide Number Placeholder 3"/>
           <p:cNvSpPr>
             <a:spLocks noGrp="1"/>
           </p:cNvSpPr>
@@ -549,7 +549,7 @@
       </p:grpSpPr>
       <p:sp>
         <p:nvSpPr>
-          <p:cNvPr id="1232131813" name="Title Text"/>
+          <p:cNvPr id="369862323" name="Title Text"/>
           <p:cNvSpPr txBox="1"/>
           <p:nvPr>
             <p:ph type="title"/>
@@ -581,7 +581,7 @@
       </p:sp>
       <p:sp>
         <p:nvSpPr>
-          <p:cNvPr id="2060001999" name="Body Level One…"/>
+          <p:cNvPr id="742673414" name="Body Level One…"/>
           <p:cNvSpPr txBox="1"/>
           <p:nvPr>
             <p:ph type="body" sz="quarter" idx="1"/>
@@ -704,7 +704,7 @@
       </p:sp>
       <p:sp>
         <p:nvSpPr>
-          <p:cNvPr id="1512158261" name="Slide Number"/>
+          <p:cNvPr id="520564199" name="Slide Number"/>
           <p:cNvSpPr txBox="1"/>
           <p:nvPr>
             <p:ph type="sldNum" sz="quarter" idx="2"/>
@@ -757,7 +757,7 @@
       </p:grpSpPr>
       <p:sp>
         <p:nvSpPr>
-          <p:cNvPr id="1543843057" name="Body Level One…"/>
+          <p:cNvPr id="561531567" name="Body Level One…"/>
           <p:cNvSpPr txBox="1"/>
           <p:nvPr>
             <p:ph type="body" idx="1"/>
@@ -850,7 +850,7 @@
       </p:sp>
       <p:sp>
         <p:nvSpPr>
-          <p:cNvPr id="710671666" name="Slide Number"/>
+          <p:cNvPr id="1957474363" name="Slide Number"/>
           <p:cNvSpPr txBox="1"/>
           <p:nvPr>
             <p:ph type="sldNum" sz="quarter" idx="2"/>
@@ -903,7 +903,7 @@
       </p:grpSpPr>
       <p:sp>
         <p:nvSpPr>
-          <p:cNvPr id="842562090" name="Close-up of an orange flower surrounded by large tropical leaves"/>
+          <p:cNvPr id="2089651296" name="Close-up of an orange flower surrounded by large tropical leaves"/>
           <p:cNvSpPr/>
           <p:nvPr>
             <p:ph type="pic" sz="quarter" idx="21"/>
@@ -933,7 +933,7 @@
       </p:sp>
       <p:sp>
         <p:nvSpPr>
-          <p:cNvPr id="1504735642" name="Close-up of a red-eyed tree frog perched on a leaf"/>
+          <p:cNvPr id="364056033" name="Close-up of a red-eyed tree frog perched on a leaf"/>
           <p:cNvSpPr/>
           <p:nvPr>
             <p:ph type="pic" sz="quarter" idx="22"/>
@@ -963,7 +963,7 @@
       </p:sp>
       <p:sp>
         <p:nvSpPr>
-          <p:cNvPr id="884666299" name="River flowing through a tropical forest"/>
+          <p:cNvPr id="1083470186" name="River flowing through a tropical forest"/>
           <p:cNvSpPr/>
           <p:nvPr>
             <p:ph type="pic" idx="23"/>
@@ -993,7 +993,7 @@
       </p:sp>
       <p:sp>
         <p:nvSpPr>
-          <p:cNvPr id="440783149" name="Slide Number"/>
+          <p:cNvPr id="1621314472" name="Slide Number"/>
           <p:cNvSpPr txBox="1"/>
           <p:nvPr>
             <p:ph type="sldNum" sz="quarter" idx="2"/>
@@ -1046,7 +1046,7 @@
       </p:grpSpPr>
       <p:sp>
         <p:nvSpPr>
-          <p:cNvPr id="910370104" name="–Johnny Appleseed"/>
+          <p:cNvPr id="1473737401" name="–Johnny Appleseed"/>
           <p:cNvSpPr txBox="1"/>
           <p:nvPr>
             <p:ph type="body" sz="quarter" idx="21"/>
@@ -1091,7 +1091,7 @@
       </p:sp>
       <p:sp>
         <p:nvSpPr>
-          <p:cNvPr id="1133822696" name="“Type a quote here.”"/>
+          <p:cNvPr id="222044903" name="“Type a quote here.”"/>
           <p:cNvSpPr txBox="1"/>
           <p:nvPr>
             <p:ph type="body" sz="quarter" idx="22"/>
@@ -1140,7 +1140,7 @@
       </p:sp>
       <p:sp>
         <p:nvSpPr>
-          <p:cNvPr id="613970757" name="Slide Number"/>
+          <p:cNvPr id="1377658939" name="Slide Number"/>
           <p:cNvSpPr txBox="1"/>
           <p:nvPr>
             <p:ph type="sldNum" sz="quarter" idx="2"/>
@@ -1193,7 +1193,7 @@
       </p:grpSpPr>
       <p:sp>
         <p:nvSpPr>
-          <p:cNvPr id="1053540655" name="river flowing through a tropical forest"/>
+          <p:cNvPr id="1699675117" name="river flowing through a tropical forest"/>
           <p:cNvSpPr/>
           <p:nvPr>
             <p:ph type="pic" idx="21"/>
@@ -1223,7 +1223,7 @@
       </p:sp>
       <p:sp>
         <p:nvSpPr>
-          <p:cNvPr id="343010927" name="Slide Number"/>
+          <p:cNvPr id="1232511156" name="Slide Number"/>
           <p:cNvSpPr txBox="1"/>
           <p:nvPr>
             <p:ph type="sldNum" sz="quarter" idx="2"/>
@@ -1276,7 +1276,7 @@
       </p:grpSpPr>
       <p:sp>
         <p:nvSpPr>
-          <p:cNvPr id="1258523005" name="Slide Number"/>
+          <p:cNvPr id="163275107" name="Slide Number"/>
           <p:cNvSpPr txBox="1"/>
           <p:nvPr>
             <p:ph type="sldNum" sz="quarter" idx="2"/>
@@ -1329,7 +1329,7 @@
       </p:grpSpPr>
       <p:sp>
         <p:nvSpPr>
-          <p:cNvPr id="394409174" name="River flowing through a tropical forest"/>
+          <p:cNvPr id="224788747" name="River flowing through a tropical forest"/>
           <p:cNvSpPr/>
           <p:nvPr>
             <p:ph type="pic" idx="21"/>
@@ -1359,7 +1359,7 @@
       </p:sp>
       <p:sp>
         <p:nvSpPr>
-          <p:cNvPr id="4533537" name="Title Text"/>
+          <p:cNvPr id="1771972005" name="Title Text"/>
           <p:cNvSpPr txBox="1"/>
           <p:nvPr>
             <p:ph type="title"/>
@@ -1391,7 +1391,7 @@
       </p:sp>
       <p:sp>
         <p:nvSpPr>
-          <p:cNvPr id="1801175522" name="Body Level One…"/>
+          <p:cNvPr id="1206152980" name="Body Level One…"/>
           <p:cNvSpPr txBox="1"/>
           <p:nvPr>
             <p:ph type="body" sz="quarter" idx="1"/>
@@ -1514,7 +1514,7 @@
       </p:sp>
       <p:sp>
         <p:nvSpPr>
-          <p:cNvPr id="28460533" name="Slide Number"/>
+          <p:cNvPr id="1541213785" name="Slide Number"/>
           <p:cNvSpPr txBox="1"/>
           <p:nvPr>
             <p:ph type="sldNum" sz="quarter" idx="2"/>
@@ -1567,7 +1567,7 @@
       </p:grpSpPr>
       <p:sp>
         <p:nvSpPr>
-          <p:cNvPr id="2137916603" name="Title Text"/>
+          <p:cNvPr id="2055015227" name="Title Text"/>
           <p:cNvSpPr txBox="1"/>
           <p:nvPr>
             <p:ph type="title"/>
@@ -1599,7 +1599,7 @@
       </p:sp>
       <p:sp>
         <p:nvSpPr>
-          <p:cNvPr id="2059238008" name="Slide Number"/>
+          <p:cNvPr id="1113125606" name="Slide Number"/>
           <p:cNvSpPr txBox="1"/>
           <p:nvPr>
             <p:ph type="sldNum" sz="quarter" idx="2"/>
@@ -1652,7 +1652,7 @@
       </p:grpSpPr>
       <p:sp>
         <p:nvSpPr>
-          <p:cNvPr id="1653995056" name="Close-up of an orange flower surrounded by large tropical leaves"/>
+          <p:cNvPr id="1409363241" name="Close-up of an orange flower surrounded by large tropical leaves"/>
           <p:cNvSpPr/>
           <p:nvPr>
             <p:ph type="pic" idx="21"/>
@@ -1682,7 +1682,7 @@
       </p:sp>
       <p:sp>
         <p:nvSpPr>
-          <p:cNvPr id="1053904246" name="Title Text"/>
+          <p:cNvPr id="1275223606" name="Title Text"/>
           <p:cNvSpPr txBox="1"/>
           <p:nvPr>
             <p:ph type="title"/>
@@ -1718,7 +1718,7 @@
       </p:sp>
       <p:sp>
         <p:nvSpPr>
-          <p:cNvPr id="84072699" name="Body Level One…"/>
+          <p:cNvPr id="1491217005" name="Body Level One…"/>
           <p:cNvSpPr txBox="1"/>
           <p:nvPr>
             <p:ph type="body" sz="quarter" idx="1"/>
@@ -1841,7 +1841,7 @@
       </p:sp>
       <p:sp>
         <p:nvSpPr>
-          <p:cNvPr id="262215894" name="Slide Number"/>
+          <p:cNvPr id="875878210" name="Slide Number"/>
           <p:cNvSpPr txBox="1"/>
           <p:nvPr>
             <p:ph type="sldNum" sz="quarter" idx="2"/>
@@ -1894,7 +1894,7 @@
       </p:grpSpPr>
       <p:sp>
         <p:nvSpPr>
-          <p:cNvPr id="369018583" name="Title Text"/>
+          <p:cNvPr id="1911521938" name="Title Text"/>
           <p:cNvSpPr txBox="1"/>
           <p:nvPr>
             <p:ph type="title"/>
@@ -1922,7 +1922,7 @@
       </p:sp>
       <p:sp>
         <p:nvSpPr>
-          <p:cNvPr id="1229397826" name="Slide Number"/>
+          <p:cNvPr id="370933311" name="Slide Number"/>
           <p:cNvSpPr txBox="1"/>
           <p:nvPr>
             <p:ph type="sldNum" sz="quarter" idx="2"/>
@@ -1975,7 +1975,7 @@
       </p:grpSpPr>
       <p:sp>
         <p:nvSpPr>
-          <p:cNvPr id="2024912123" name="Title Text"/>
+          <p:cNvPr id="1123396944" name="Title Text"/>
           <p:cNvSpPr txBox="1"/>
           <p:nvPr>
             <p:ph type="title"/>
@@ -2003,7 +2003,7 @@
       </p:sp>
       <p:sp>
         <p:nvSpPr>
-          <p:cNvPr id="2067172308" name="Body Level One…"/>
+          <p:cNvPr id="1287819346" name="Body Level One…"/>
           <p:cNvSpPr txBox="1"/>
           <p:nvPr>
             <p:ph type="body" idx="1"/>
@@ -2092,7 +2092,7 @@
       </p:sp>
       <p:sp>
         <p:nvSpPr>
-          <p:cNvPr id="1006908168" name="Slide Number"/>
+          <p:cNvPr id="582554994" name="Slide Number"/>
           <p:cNvSpPr txBox="1"/>
           <p:nvPr>
             <p:ph type="sldNum" sz="quarter" idx="2"/>
@@ -2145,7 +2145,7 @@
       </p:grpSpPr>
       <p:sp>
         <p:nvSpPr>
-          <p:cNvPr id="317796159" name="Close-up of a red-eyed tree frog perched on a leaf"/>
+          <p:cNvPr id="1796979307" name="Close-up of a red-eyed tree frog perched on a leaf"/>
           <p:cNvSpPr/>
           <p:nvPr>
             <p:ph type="pic" sz="half" idx="21"/>
@@ -2175,7 +2175,7 @@
       </p:sp>
       <p:sp>
         <p:nvSpPr>
-          <p:cNvPr id="1593834194" name="Title Text"/>
+          <p:cNvPr id="415465102" name="Title Text"/>
           <p:cNvSpPr txBox="1"/>
           <p:nvPr>
             <p:ph type="title"/>
@@ -2203,7 +2203,7 @@
       </p:sp>
       <p:sp>
         <p:nvSpPr>
-          <p:cNvPr id="507921764" name="Body Level One…"/>
+          <p:cNvPr id="1462774100" name="Body Level One…"/>
           <p:cNvSpPr txBox="1"/>
           <p:nvPr>
             <p:ph type="body" sz="half" idx="1"/>
@@ -2316,7 +2316,7 @@
       </p:sp>
       <p:sp>
         <p:nvSpPr>
-          <p:cNvPr id="834635244" name="Slide Number"/>
+          <p:cNvPr id="1132880165" name="Slide Number"/>
           <p:cNvSpPr txBox="1"/>
           <p:nvPr>
             <p:ph type="sldNum" sz="quarter" idx="2"/>
@@ -2369,7 +2369,7 @@
       </p:grpSpPr>
       <p:sp>
         <p:nvSpPr>
-          <p:cNvPr id="164188852" name="Title Text"/>
+          <p:cNvPr id="854300286" name="Title Text"/>
           <p:cNvSpPr txBox="1"/>
           <p:nvPr>
             <p:ph type="title"/>
@@ -2397,7 +2397,7 @@
       </p:sp>
       <p:sp>
         <p:nvSpPr>
-          <p:cNvPr id="1517639646" name="Body Level One…"/>
+          <p:cNvPr id="2038968297" name="Body Level One…"/>
           <p:cNvSpPr txBox="1"/>
           <p:nvPr>
             <p:ph type="body" sz="half" idx="1"/>
@@ -2510,7 +2510,7 @@
       </p:sp>
       <p:sp>
         <p:nvSpPr>
-          <p:cNvPr id="776665343" name="Slide Number"/>
+          <p:cNvPr id="1002878642" name="Slide Number"/>
           <p:cNvSpPr txBox="1"/>
           <p:nvPr>
             <p:ph type="sldNum" sz="quarter" idx="2"/>
@@ -2563,7 +2563,7 @@
       </p:grpSpPr>
       <p:sp>
         <p:nvSpPr>
-          <p:cNvPr id="1147088599" name="Title Text"/>
+          <p:cNvPr id="1773530400" name="Title Text"/>
           <p:cNvSpPr txBox="1"/>
           <p:nvPr>
             <p:ph type="title"/>
@@ -2591,7 +2591,7 @@
       </p:sp>
       <p:sp>
         <p:nvSpPr>
-          <p:cNvPr id="1980641827" name="Body Level One…"/>
+          <p:cNvPr id="1689915861" name="Body Level One…"/>
           <p:cNvSpPr txBox="1"/>
           <p:nvPr>
             <p:ph type="body" sz="half" idx="1"/>
@@ -2704,7 +2704,7 @@
       </p:sp>
       <p:sp>
         <p:nvSpPr>
-          <p:cNvPr id="403513412" name="Slide Number"/>
+          <p:cNvPr id="171073485" name="Slide Number"/>
           <p:cNvSpPr txBox="1"/>
           <p:nvPr>
             <p:ph type="sldNum" sz="quarter" idx="2"/>
@@ -2764,7 +2764,7 @@
       </p:grpSpPr>
       <p:sp>
         <p:nvSpPr>
-          <p:cNvPr id="1978627024" name="Title Text"/>
+          <p:cNvPr id="398229804" name="Title Text"/>
           <p:cNvSpPr txBox="1"/>
           <p:nvPr>
             <p:ph type="title"/>
@@ -2801,7 +2801,7 @@
       </p:sp>
       <p:sp>
         <p:nvSpPr>
-          <p:cNvPr id="1387130379" name="Body Level One…"/>
+          <p:cNvPr id="1433514605" name="Body Level One…"/>
           <p:cNvSpPr txBox="1"/>
           <p:nvPr>
             <p:ph type="body" idx="1"/>
@@ -2878,7 +2878,7 @@
       </p:sp>
       <p:sp>
         <p:nvSpPr>
-          <p:cNvPr id="1409529237" name="Slide Number"/>
+          <p:cNvPr id="1567774541" name="Slide Number"/>
           <p:cNvSpPr txBox="1"/>
           <p:nvPr>
             <p:ph type="sldNum" sz="quarter" idx="2"/>
@@ -3612,7 +3612,7 @@
       </p:grpSpPr>
       <p:sp>
         <p:nvSpPr>
-          <p:cNvPr id="317537720" name="My Presentation"/>
+          <p:cNvPr id="787825161" name="My Presentation"/>
           <p:cNvSpPr txBox="1"/>
           <p:nvPr>
             <p:ph type="ctrTitle"/>
@@ -3640,7 +3640,7 @@
       </p:sp>
       <p:sp>
         <p:nvSpPr>
-          <p:cNvPr id="2134756337" name="Muhammad Zeeshan"/>
+          <p:cNvPr id="1159898914" name="Muhammad Zeeshan"/>
           <p:cNvSpPr txBox="1"/>
           <p:nvPr>
             <p:ph type="subTitle" sz="quarter" idx="1"/>
@@ -3660,7 +3660,7 @@
             </a:pPr>
             <a:r>
               <a:rPr/>
-              <a:t>Muhammad Zeeshan</a:t>
+              <a:t>Graham Steffaniak</a:t>
             </a:r>
             <a:endParaRPr/>
           </a:p>
@@ -3680,289 +3680,6 @@
     </mc:Fallback>
   </mc:AlternateContent>
 </p:sld>
-</file>
-
-<file path=ppt/theme/theme0.xml><?xml version="1.0" encoding="utf-8"?>
-<a:theme xmlns:a="http://schemas.openxmlformats.org/drawingml/2006/main" name="Office Theme">
-  <a:themeElements>
-    <a:clrScheme name="">
-      <a:dk1>
-        <a:srgbClr val="000000"/>
-      </a:dk1>
-      <a:lt1>
-        <a:srgbClr val="FFFFFF"/>
-      </a:lt1>
-      <a:dk2>
-        <a:srgbClr val="000000"/>
-      </a:dk2>
-      <a:lt2>
-        <a:srgbClr val="808080"/>
-      </a:lt2>
-      <a:accent1>
-        <a:srgbClr val="BBE0E3"/>
-      </a:accent1>
-      <a:accent2>
-        <a:srgbClr val="333399"/>
-      </a:accent2>
-      <a:accent3>
-        <a:srgbClr val="FFFFFF"/>
-      </a:accent3>
-      <a:accent4>
-        <a:srgbClr val="000000"/>
-      </a:accent4>
-      <a:accent5>
-        <a:srgbClr val="DAEDEF"/>
-      </a:accent5>
-      <a:accent6>
-        <a:srgbClr val="2D2D8A"/>
-      </a:accent6>
-      <a:hlink>
-        <a:srgbClr val="009999"/>
-      </a:hlink>
-      <a:folHlink>
-        <a:srgbClr val="99CC00"/>
-      </a:folHlink>
-    </a:clrScheme>
-    <a:fontScheme name="Office">
-      <a:majorFont>
-        <a:latin typeface="Calibri"/>
-        <a:ea typeface=""/>
-        <a:cs typeface=""/>
-        <a:font script="Jpan" typeface="ＭＳ Ｐゴシック"/>
-        <a:font script="Hang" typeface="맑은 고딕"/>
-        <a:font script="Hans" typeface="宋体"/>
-        <a:font script="Hant" typeface="新細明體"/>
-        <a:font script="Arab" typeface="Times New Roman"/>
-        <a:font script="Hebr" typeface="Times New Roman"/>
-        <a:font script="Thai" typeface="Angsana New"/>
-        <a:font script="Ethi" typeface="Nyala"/>
-        <a:font script="Beng" typeface="Vrinda"/>
-        <a:font script="Gujr" typeface="Shruti"/>
-        <a:font script="Khmr" typeface="MoolBoran"/>
-        <a:font script="Knda" typeface="Tunga"/>
-        <a:font script="Guru" typeface="Raavi"/>
-        <a:font script="Cans" typeface="Euphemia"/>
-        <a:font script="Cher" typeface="Plantagenet Cherokee"/>
-        <a:font script="Yiii" typeface="Microsoft Yi Baiti"/>
-        <a:font script="Tibt" typeface="Microsoft Himalaya"/>
-        <a:font script="Thaa" typeface="MV Boli"/>
-        <a:font script="Deva" typeface="Mangal"/>
-        <a:font script="Telu" typeface="Gautami"/>
-        <a:font script="Taml" typeface="Latha"/>
-        <a:font script="Syrc" typeface="Estrangelo Edessa"/>
-        <a:font script="Orya" typeface="Kalinga"/>
-        <a:font script="Mlym" typeface="Kartika"/>
-        <a:font script="Laoo" typeface="DokChampa"/>
-        <a:font script="Sinh" typeface="Iskoola Pota"/>
-        <a:font script="Mong" typeface="Mongolian Baiti"/>
-        <a:font script="Viet" typeface="Times New Roman"/>
-        <a:font script="Uigh" typeface="Microsoft Uighur"/>
-      </a:majorFont>
-      <a:minorFont>
-        <a:latin typeface="Calibri"/>
-        <a:ea typeface=""/>
-        <a:cs typeface=""/>
-        <a:font script="Jpan" typeface="ＭＳ Ｐゴシック"/>
-        <a:font script="Hang" typeface="맑은 고딕"/>
-        <a:font script="Hans" typeface="宋体"/>
-        <a:font script="Hant" typeface="新細明體"/>
-        <a:font script="Arab" typeface="Arial"/>
-        <a:font script="Hebr" typeface="Arial"/>
-        <a:font script="Thai" typeface="Cordia New"/>
-        <a:font script="Ethi" typeface="Nyala"/>
-        <a:font script="Beng" typeface="Vrinda"/>
-        <a:font script="Gujr" typeface="Shruti"/>
-        <a:font script="Khmr" typeface="DaunPenh"/>
-        <a:font script="Knda" typeface="Tunga"/>
-        <a:font script="Guru" typeface="Raavi"/>
-        <a:font script="Cans" typeface="Euphemia"/>
-        <a:font script="Cher" typeface="Plantagenet Cherokee"/>
-        <a:font script="Yiii" typeface="Microsoft Yi Baiti"/>
-        <a:font script="Tibt" typeface="Microsoft Himalaya"/>
-        <a:font script="Thaa" typeface="MV Boli"/>
-        <a:font script="Deva" typeface="Mangal"/>
-        <a:font script="Telu" typeface="Gautami"/>
-        <a:font script="Taml" typeface="Latha"/>
-        <a:font script="Syrc" typeface="Estrangelo Edessa"/>
-        <a:font script="Orya" typeface="Kalinga"/>
-        <a:font script="Mlym" typeface="Kartika"/>
-        <a:font script="Laoo" typeface="DokChampa"/>
-        <a:font script="Sinh" typeface="Iskoola Pota"/>
-        <a:font script="Mong" typeface="Mongolian Baiti"/>
-        <a:font script="Viet" typeface="Arial"/>
-        <a:font script="Uigh" typeface="Microsoft Uighur"/>
-      </a:minorFont>
-    </a:fontScheme>
-    <a:fmtScheme name="Office">
-      <a:fillStyleLst>
-        <a:solidFill>
-          <a:schemeClr val="phClr"/>
-        </a:solidFill>
-        <a:gradFill rotWithShape="1">
-          <a:gsLst>
-            <a:gs pos="0">
-              <a:schemeClr val="phClr">
-                <a:tint val="50000"/>
-                <a:satMod val="300000"/>
-              </a:schemeClr>
-            </a:gs>
-            <a:gs pos="35000">
-              <a:schemeClr val="phClr">
-                <a:tint val="37000"/>
-                <a:satMod val="300000"/>
-              </a:schemeClr>
-            </a:gs>
-            <a:gs pos="100000">
-              <a:schemeClr val="phClr">
-                <a:tint val="15000"/>
-                <a:satMod val="350000"/>
-              </a:schemeClr>
-            </a:gs>
-          </a:gsLst>
-          <a:lin ang="16200000" scaled="1"/>
-        </a:gradFill>
-        <a:gradFill rotWithShape="1">
-          <a:gsLst>
-            <a:gs pos="0">
-              <a:schemeClr val="phClr">
-                <a:shade val="51000"/>
-                <a:satMod val="130000"/>
-              </a:schemeClr>
-            </a:gs>
-            <a:gs pos="80000">
-              <a:schemeClr val="phClr">
-                <a:shade val="93000"/>
-                <a:satMod val="130000"/>
-              </a:schemeClr>
-            </a:gs>
-            <a:gs pos="100000">
-              <a:schemeClr val="phClr">
-                <a:shade val="94000"/>
-                <a:satMod val="135000"/>
-              </a:schemeClr>
-            </a:gs>
-          </a:gsLst>
-          <a:lin ang="16200000" scaled="0"/>
-        </a:gradFill>
-      </a:fillStyleLst>
-      <a:lnStyleLst>
-        <a:ln w="9525" cap="flat" cmpd="sng" algn="ctr">
-          <a:solidFill>
-            <a:schemeClr val="phClr">
-              <a:shade val="95000"/>
-              <a:satMod val="105000"/>
-            </a:schemeClr>
-          </a:solidFill>
-          <a:prstDash val="solid"/>
-        </a:ln>
-        <a:ln w="25400" cap="flat" cmpd="sng" algn="ctr">
-          <a:solidFill>
-            <a:schemeClr val="phClr"/>
-          </a:solidFill>
-          <a:prstDash val="solid"/>
-        </a:ln>
-        <a:ln w="38100" cap="flat" cmpd="sng" algn="ctr">
-          <a:solidFill>
-            <a:schemeClr val="phClr"/>
-          </a:solidFill>
-          <a:prstDash val="solid"/>
-        </a:ln>
-      </a:lnStyleLst>
-      <a:effectStyleLst>
-        <a:effectStyle>
-          <a:effectLst>
-            <a:outerShdw blurRad="40000" dist="20000" dir="5400000" rotWithShape="0">
-              <a:srgbClr val="000000">
-                <a:alpha val="38000"/>
-              </a:srgbClr>
-            </a:outerShdw>
-          </a:effectLst>
-        </a:effectStyle>
-        <a:effectStyle>
-          <a:effectLst>
-            <a:outerShdw blurRad="40000" dist="23000" dir="5400000" rotWithShape="0">
-              <a:srgbClr val="000000">
-                <a:alpha val="35000"/>
-              </a:srgbClr>
-            </a:outerShdw>
-          </a:effectLst>
-        </a:effectStyle>
-        <a:effectStyle>
-          <a:effectLst>
-            <a:outerShdw blurRad="40000" dist="23000" dir="5400000" rotWithShape="0">
-              <a:srgbClr val="000000">
-                <a:alpha val="35000"/>
-              </a:srgbClr>
-            </a:outerShdw>
-          </a:effectLst>
-          <a:scene3d>
-            <a:camera prst="orthographicFront">
-              <a:rot lat="0" lon="0" rev="0"/>
-            </a:camera>
-            <a:lightRig rig="threePt" dir="t">
-              <a:rot lat="0" lon="0" rev="1200000"/>
-            </a:lightRig>
-          </a:scene3d>
-          <a:sp3d>
-            <a:bevelT w="63500" h="25400"/>
-          </a:sp3d>
-        </a:effectStyle>
-      </a:effectStyleLst>
-      <a:bgFillStyleLst>
-        <a:solidFill>
-          <a:schemeClr val="phClr"/>
-        </a:solidFill>
-        <a:gradFill rotWithShape="1">
-          <a:gsLst>
-            <a:gs pos="0">
-              <a:schemeClr val="phClr">
-                <a:tint val="40000"/>
-                <a:satMod val="350000"/>
-              </a:schemeClr>
-            </a:gs>
-            <a:gs pos="40000">
-              <a:schemeClr val="phClr">
-                <a:tint val="45000"/>
-                <a:shade val="99000"/>
-                <a:satMod val="350000"/>
-              </a:schemeClr>
-            </a:gs>
-            <a:gs pos="100000">
-              <a:schemeClr val="phClr">
-                <a:shade val="20000"/>
-                <a:satMod val="255000"/>
-              </a:schemeClr>
-            </a:gs>
-          </a:gsLst>
-          <a:path path="circle">
-            <a:fillToRect l="50000" t="-80000" r="50000" b="180000"/>
-          </a:path>
-        </a:gradFill>
-        <a:gradFill rotWithShape="1">
-          <a:gsLst>
-            <a:gs pos="0">
-              <a:schemeClr val="phClr">
-                <a:tint val="80000"/>
-                <a:satMod val="300000"/>
-              </a:schemeClr>
-            </a:gs>
-            <a:gs pos="100000">
-              <a:schemeClr val="phClr">
-                <a:shade val="30000"/>
-                <a:satMod val="200000"/>
-              </a:schemeClr>
-            </a:gs>
-          </a:gsLst>
-          <a:path path="circle">
-            <a:fillToRect l="50000" t="50000" r="50000" b="50000"/>
-          </a:path>
-        </a:gradFill>
-      </a:bgFillStyleLst>
-    </a:fmtScheme>
-  </a:themeElements>
-  <a:objectDefaults/>
-  <a:extraClrSchemeLst/>
-</a:theme>
 </file>
 
 <file path=ppt/theme/theme1.xml><?xml version="1.0" encoding="utf-8"?>
